--- a/docs/slides.pptx
+++ b/docs/slides.pptx
@@ -4,50 +4,53 @@
   <p:sldMasterIdLst>
     <p:sldMasterId id="2147483648" r:id="rId1"/>
   </p:sldMasterIdLst>
+  <p:notesMasterIdLst>
+    <p:notesMasterId r:id="rId43"/>
+  </p:notesMasterIdLst>
   <p:sldIdLst>
-    <p:sldId id="256" r:id="rId7"/>
-    <p:sldId id="257" r:id="rId9"/>
-    <p:sldId id="258" r:id="rId10"/>
-    <p:sldId id="259" r:id="rId11"/>
-    <p:sldId id="260" r:id="rId12"/>
-    <p:sldId id="261" r:id="rId13"/>
-    <p:sldId id="262" r:id="rId14"/>
-    <p:sldId id="263" r:id="rId15"/>
-    <p:sldId id="264" r:id="rId16"/>
-    <p:sldId id="265" r:id="rId17"/>
-    <p:sldId id="266" r:id="rId18"/>
-    <p:sldId id="267" r:id="rId19"/>
-    <p:sldId id="268" r:id="rId20"/>
-    <p:sldId id="269" r:id="rId21"/>
-    <p:sldId id="270" r:id="rId22"/>
-    <p:sldId id="271" r:id="rId23"/>
-    <p:sldId id="272" r:id="rId24"/>
-    <p:sldId id="273" r:id="rId25"/>
-    <p:sldId id="274" r:id="rId26"/>
-    <p:sldId id="275" r:id="rId27"/>
-    <p:sldId id="276" r:id="rId28"/>
-    <p:sldId id="277" r:id="rId29"/>
-    <p:sldId id="278" r:id="rId30"/>
-    <p:sldId id="279" r:id="rId31"/>
-    <p:sldId id="280" r:id="rId32"/>
-    <p:sldId id="281" r:id="rId33"/>
-    <p:sldId id="282" r:id="rId34"/>
-    <p:sldId id="283" r:id="rId35"/>
-    <p:sldId id="284" r:id="rId36"/>
-    <p:sldId id="285" r:id="rId37"/>
-    <p:sldId id="286" r:id="rId38"/>
-    <p:sldId id="287" r:id="rId39"/>
-    <p:sldId id="288" r:id="rId40"/>
-    <p:sldId id="289" r:id="rId41"/>
-    <p:sldId id="290" r:id="rId42"/>
-    <p:sldId id="291" r:id="rId43"/>
-    <p:sldId id="292" r:id="rId44"/>
-    <p:sldId id="293" r:id="rId45"/>
-    <p:sldId id="294" r:id="rId46"/>
-    <p:sldId id="295" r:id="rId47"/>
-    <p:sldId id="296" r:id="rId48"/>
+    <p:sldId id="256" r:id="rId2"/>
+    <p:sldId id="257" r:id="rId3"/>
+    <p:sldId id="258" r:id="rId4"/>
+    <p:sldId id="259" r:id="rId5"/>
+    <p:sldId id="260" r:id="rId6"/>
+    <p:sldId id="261" r:id="rId7"/>
+    <p:sldId id="262" r:id="rId8"/>
+    <p:sldId id="263" r:id="rId9"/>
+    <p:sldId id="264" r:id="rId10"/>
+    <p:sldId id="265" r:id="rId11"/>
+    <p:sldId id="266" r:id="rId12"/>
+    <p:sldId id="267" r:id="rId13"/>
+    <p:sldId id="268" r:id="rId14"/>
+    <p:sldId id="269" r:id="rId15"/>
+    <p:sldId id="270" r:id="rId16"/>
+    <p:sldId id="271" r:id="rId17"/>
+    <p:sldId id="272" r:id="rId18"/>
+    <p:sldId id="273" r:id="rId19"/>
+    <p:sldId id="274" r:id="rId20"/>
+    <p:sldId id="275" r:id="rId21"/>
+    <p:sldId id="276" r:id="rId22"/>
+    <p:sldId id="277" r:id="rId23"/>
+    <p:sldId id="278" r:id="rId24"/>
+    <p:sldId id="279" r:id="rId25"/>
+    <p:sldId id="280" r:id="rId26"/>
+    <p:sldId id="281" r:id="rId27"/>
+    <p:sldId id="282" r:id="rId28"/>
+    <p:sldId id="283" r:id="rId29"/>
+    <p:sldId id="284" r:id="rId30"/>
+    <p:sldId id="285" r:id="rId31"/>
+    <p:sldId id="286" r:id="rId32"/>
+    <p:sldId id="287" r:id="rId33"/>
+    <p:sldId id="288" r:id="rId34"/>
+    <p:sldId id="289" r:id="rId35"/>
+    <p:sldId id="290" r:id="rId36"/>
+    <p:sldId id="291" r:id="rId37"/>
+    <p:sldId id="292" r:id="rId38"/>
+    <p:sldId id="293" r:id="rId39"/>
+    <p:sldId id="294" r:id="rId40"/>
+    <p:sldId id="295" r:id="rId41"/>
+    <p:sldId id="296" r:id="rId42"/>
   </p:sldIdLst>
-  <p:sldSz cx="12191695" cy="6858000" type="screen4x3"/>
+  <p:sldSz cx="12192000" cy="6858000"/>
   <p:notesSz cx="6858000" cy="9144000"/>
   <p:defaultTextStyle>
     <a:defPPr>
@@ -144,11 +147,27 @@
       </a:defRPr>
     </a:lvl9pPr>
   </p:defaultTextStyle>
+  <p:extLst>
+    <p:ext uri="{EFAFB233-063F-42B5-8137-9DF3F51BA10A}">
+      <p15:sldGuideLst xmlns:p15="http://schemas.microsoft.com/office/powerpoint/2012/main">
+        <p15:guide id="1" orient="horz" pos="2160">
+          <p15:clr>
+            <a:srgbClr val="A4A3A4"/>
+          </p15:clr>
+        </p15:guide>
+        <p15:guide id="2" pos="2880">
+          <p15:clr>
+            <a:srgbClr val="A4A3A4"/>
+          </p15:clr>
+        </p15:guide>
+      </p15:sldGuideLst>
+    </p:ext>
+  </p:extLst>
 </p:presentation>
 </file>
 
 <file path=ppt/notesMasters/notesMaster1.xml><?xml version="1.0" encoding="utf-8"?>
-<p:notesMaster xmlns:a="http://schemas.openxmlformats.org/drawingml/2006/main" xmlns:p="http://schemas.openxmlformats.org/presentationml/2006/main" xmlns:r="http://schemas.openxmlformats.org/officeDocument/2006/relationships">
+<p:notesMaster xmlns:a="http://schemas.openxmlformats.org/drawingml/2006/main" xmlns:r="http://schemas.openxmlformats.org/officeDocument/2006/relationships" xmlns:p="http://schemas.openxmlformats.org/presentationml/2006/main">
   <p:cSld>
     <p:bg>
       <p:bgRef idx="1001">
@@ -169,241 +188,16 @@
           <a:chExt cx="0" cy="0"/>
         </a:xfrm>
       </p:grpSpPr>
-      <p:sp>
-        <p:nvSpPr>
-          <p:cNvPr id="2" name="Header Placeholder 1"/>
-          <p:cNvSpPr>
-            <a:spLocks noGrp="1"/>
-          </p:cNvSpPr>
-          <p:nvPr>
-            <p:ph type="hdr" sz="quarter"/>
-          </p:nvPr>
-        </p:nvSpPr>
-        <p:spPr>
-          <a:xfrm>
-            <a:off x="0" y="0"/>
-            <a:ext cx="2971800" cy="457200"/>
-          </a:xfrm>
-          <a:prstGeom prst="rect">
-            <a:avLst/>
-          </a:prstGeom>
-        </p:spPr>
-        <p:txBody>
-          <a:bodyPr vert="horz" lIns="91440" tIns="45720" rIns="91440" bIns="45720" rtlCol="0"/>
-          <a:lstStyle>
-            <a:lvl1pPr algn="l">
-              <a:defRPr sz="1200"/>
-            </a:lvl1pPr>
-          </a:lstStyle>
-          <a:p>
-            <a:endParaRPr lang="en-US"/>
-          </a:p>
-        </p:txBody>
-      </p:sp>
-      <p:sp>
-        <p:nvSpPr>
-          <p:cNvPr id="3" name="Date Placeholder 2"/>
-          <p:cNvSpPr>
-            <a:spLocks noGrp="1"/>
-          </p:cNvSpPr>
-          <p:nvPr>
-            <p:ph type="dt" idx="1"/>
-          </p:nvPr>
-        </p:nvSpPr>
-        <p:spPr>
-          <a:xfrm>
-            <a:off x="3884613" y="0"/>
-            <a:ext cx="2971800" cy="457200"/>
-          </a:xfrm>
-          <a:prstGeom prst="rect">
-            <a:avLst/>
-          </a:prstGeom>
-        </p:spPr>
-        <p:txBody>
-          <a:bodyPr vert="horz" lIns="91440" tIns="45720" rIns="91440" bIns="45720" rtlCol="0"/>
-          <a:lstStyle>
-            <a:lvl1pPr algn="r">
-              <a:defRPr sz="1200"/>
-            </a:lvl1pPr>
-          </a:lstStyle>
-          <a:p>
-            <a:fld id="{0F89C1C7-3DCD-1040-A9CF-14679D8B5DDD}" type="datetimeFigureOut">
-              <a:rPr lang="en-US" smtClean="0"/>
-              <a:t>10/17/16</a:t>
-            </a:fld>
-            <a:endParaRPr lang="en-US"/>
-          </a:p>
-        </p:txBody>
-      </p:sp>
-      <p:sp>
-        <p:nvSpPr>
-          <p:cNvPr id="4" name="Slide Image Placeholder 3"/>
-          <p:cNvSpPr>
-            <a:spLocks noGrp="1" noRot="1" noChangeAspect="1"/>
-          </p:cNvSpPr>
-          <p:nvPr>
-            <p:ph type="sldImg" idx="2"/>
-          </p:nvPr>
-        </p:nvSpPr>
-        <p:spPr>
-          <a:xfrm>
-            <a:off x="1143000" y="685800"/>
-            <a:ext cx="4572000" cy="3429000"/>
-          </a:xfrm>
-          <a:prstGeom prst="rect">
-            <a:avLst/>
-          </a:prstGeom>
-          <a:noFill/>
-          <a:ln w="12700">
-            <a:solidFill>
-              <a:prstClr val="black"/>
-            </a:solidFill>
-          </a:ln>
-        </p:spPr>
-        <p:txBody>
-          <a:bodyPr vert="horz" lIns="91440" tIns="45720" rIns="91440" bIns="45720" rtlCol="0" anchor="ctr"/>
-          <a:lstStyle/>
-          <a:p>
-            <a:endParaRPr lang="en-US"/>
-          </a:p>
-        </p:txBody>
-      </p:sp>
-      <p:sp>
-        <p:nvSpPr>
-          <p:cNvPr id="5" name="Notes Placeholder 4"/>
-          <p:cNvSpPr>
-            <a:spLocks noGrp="1"/>
-          </p:cNvSpPr>
-          <p:nvPr>
-            <p:ph type="body" sz="quarter" idx="3"/>
-          </p:nvPr>
-        </p:nvSpPr>
-        <p:spPr>
-          <a:xfrm>
-            <a:off x="685800" y="4343400"/>
-            <a:ext cx="5486400" cy="4114800"/>
-          </a:xfrm>
-          <a:prstGeom prst="rect">
-            <a:avLst/>
-          </a:prstGeom>
-        </p:spPr>
-        <p:txBody>
-          <a:bodyPr vert="horz" lIns="91440" tIns="45720" rIns="91440" bIns="45720" rtlCol="0"/>
-          <a:lstStyle/>
-          <a:p>
-            <a:pPr lvl="0"/>
-            <a:r>
-              <a:rPr lang="en-US" smtClean="0"/>
-              <a:t>Click to edit Master text styles</a:t>
-            </a:r>
-          </a:p>
-          <a:p>
-            <a:pPr lvl="1"/>
-            <a:r>
-              <a:rPr lang="en-US" smtClean="0"/>
-              <a:t>Second level</a:t>
-            </a:r>
-          </a:p>
-          <a:p>
-            <a:pPr lvl="2"/>
-            <a:r>
-              <a:rPr lang="en-US" smtClean="0"/>
-              <a:t>Third level</a:t>
-            </a:r>
-          </a:p>
-          <a:p>
-            <a:pPr lvl="3"/>
-            <a:r>
-              <a:rPr lang="en-US" smtClean="0"/>
-              <a:t>Fourth level</a:t>
-            </a:r>
-          </a:p>
-          <a:p>
-            <a:pPr lvl="4"/>
-            <a:r>
-              <a:rPr lang="en-US" smtClean="0"/>
-              <a:t>Fifth level</a:t>
-            </a:r>
-            <a:endParaRPr lang="en-US"/>
-          </a:p>
-        </p:txBody>
-      </p:sp>
-      <p:sp>
-        <p:nvSpPr>
-          <p:cNvPr id="6" name="Footer Placeholder 5"/>
-          <p:cNvSpPr>
-            <a:spLocks noGrp="1"/>
-          </p:cNvSpPr>
-          <p:nvPr>
-            <p:ph type="ftr" sz="quarter" idx="4"/>
-          </p:nvPr>
-        </p:nvSpPr>
-        <p:spPr>
-          <a:xfrm>
-            <a:off x="0" y="8685213"/>
-            <a:ext cx="2971800" cy="457200"/>
-          </a:xfrm>
-          <a:prstGeom prst="rect">
-            <a:avLst/>
-          </a:prstGeom>
-        </p:spPr>
-        <p:txBody>
-          <a:bodyPr vert="horz" lIns="91440" tIns="45720" rIns="91440" bIns="45720" rtlCol="0" anchor="b"/>
-          <a:lstStyle>
-            <a:lvl1pPr algn="l">
-              <a:defRPr sz="1200"/>
-            </a:lvl1pPr>
-          </a:lstStyle>
-          <a:p>
-            <a:endParaRPr lang="en-US"/>
-          </a:p>
-        </p:txBody>
-      </p:sp>
-      <p:sp>
-        <p:nvSpPr>
-          <p:cNvPr id="7" name="Slide Number Placeholder 6"/>
-          <p:cNvSpPr>
-            <a:spLocks noGrp="1"/>
-          </p:cNvSpPr>
-          <p:nvPr>
-            <p:ph type="sldNum" sz="quarter" idx="5"/>
-          </p:nvPr>
-        </p:nvSpPr>
-        <p:spPr>
-          <a:xfrm>
-            <a:off x="3884613" y="8685213"/>
-            <a:ext cx="2971800" cy="457200"/>
-          </a:xfrm>
-          <a:prstGeom prst="rect">
-            <a:avLst/>
-          </a:prstGeom>
-        </p:spPr>
-        <p:txBody>
-          <a:bodyPr vert="horz" lIns="91440" tIns="45720" rIns="91440" bIns="45720" rtlCol="0" anchor="b"/>
-          <a:lstStyle>
-            <a:lvl1pPr algn="r">
-              <a:defRPr sz="1200"/>
-            </a:lvl1pPr>
-          </a:lstStyle>
-          <a:p>
-            <a:fld id="{BB5E49A5-4136-284D-997B-48E1D791AD67}" type="slidenum">
-              <a:rPr lang="en-US" smtClean="0"/>
-              <a:t>‹#›</a:t>
-            </a:fld>
-            <a:endParaRPr lang="en-US"/>
-          </a:p>
-        </p:txBody>
-      </p:sp>
     </p:spTree>
     <p:extLst>
       <p:ext uri="{BB962C8B-B14F-4D97-AF65-F5344CB8AC3E}">
-        <p14:creationId xmlns:p14="http://schemas.microsoft.com/office/powerpoint/2010/main" val="2623252185"/>
+        <p14:creationId xmlns:p14="http://schemas.microsoft.com/office/powerpoint/2010/main" val="3158763618"/>
       </p:ext>
     </p:extLst>
   </p:cSld>
   <p:clrMap bg1="lt1" tx1="dk1" bg2="lt2" tx2="dk2" accent1="accent1" accent2="accent2" accent3="accent3" accent4="accent4" accent5="accent5" accent6="accent6" hlink="hlink" folHlink="folHlink"/>
   <p:notesStyle>
-    <a:lvl1pPr marL="0" algn="l" defTabSz="457200" rtl="0" eaLnBrk="1" latinLnBrk="0" hangingPunct="1">
+    <a:lvl1pPr marL="0" algn="l" defTabSz="914400" rtl="0" eaLnBrk="1" latinLnBrk="0" hangingPunct="1">
       <a:defRPr sz="1200" kern="1200">
         <a:solidFill>
           <a:schemeClr val="tx1"/>
@@ -413,7 +207,7 @@
         <a:cs typeface="+mn-cs"/>
       </a:defRPr>
     </a:lvl1pPr>
-    <a:lvl2pPr marL="457200" algn="l" defTabSz="457200" rtl="0" eaLnBrk="1" latinLnBrk="0" hangingPunct="1">
+    <a:lvl2pPr marL="457200" algn="l" defTabSz="914400" rtl="0" eaLnBrk="1" latinLnBrk="0" hangingPunct="1">
       <a:defRPr sz="1200" kern="1200">
         <a:solidFill>
           <a:schemeClr val="tx1"/>
@@ -423,7 +217,7 @@
         <a:cs typeface="+mn-cs"/>
       </a:defRPr>
     </a:lvl2pPr>
-    <a:lvl3pPr marL="914400" algn="l" defTabSz="457200" rtl="0" eaLnBrk="1" latinLnBrk="0" hangingPunct="1">
+    <a:lvl3pPr marL="914400" algn="l" defTabSz="914400" rtl="0" eaLnBrk="1" latinLnBrk="0" hangingPunct="1">
       <a:defRPr sz="1200" kern="1200">
         <a:solidFill>
           <a:schemeClr val="tx1"/>
@@ -433,7 +227,7 @@
         <a:cs typeface="+mn-cs"/>
       </a:defRPr>
     </a:lvl3pPr>
-    <a:lvl4pPr marL="1371600" algn="l" defTabSz="457200" rtl="0" eaLnBrk="1" latinLnBrk="0" hangingPunct="1">
+    <a:lvl4pPr marL="1371600" algn="l" defTabSz="914400" rtl="0" eaLnBrk="1" latinLnBrk="0" hangingPunct="1">
       <a:defRPr sz="1200" kern="1200">
         <a:solidFill>
           <a:schemeClr val="tx1"/>
@@ -443,7 +237,7 @@
         <a:cs typeface="+mn-cs"/>
       </a:defRPr>
     </a:lvl4pPr>
-    <a:lvl5pPr marL="1828800" algn="l" defTabSz="457200" rtl="0" eaLnBrk="1" latinLnBrk="0" hangingPunct="1">
+    <a:lvl5pPr marL="1828800" algn="l" defTabSz="914400" rtl="0" eaLnBrk="1" latinLnBrk="0" hangingPunct="1">
       <a:defRPr sz="1200" kern="1200">
         <a:solidFill>
           <a:schemeClr val="tx1"/>
@@ -453,7 +247,7 @@
         <a:cs typeface="+mn-cs"/>
       </a:defRPr>
     </a:lvl5pPr>
-    <a:lvl6pPr marL="2286000" algn="l" defTabSz="457200" rtl="0" eaLnBrk="1" latinLnBrk="0" hangingPunct="1">
+    <a:lvl6pPr marL="2286000" algn="l" defTabSz="914400" rtl="0" eaLnBrk="1" latinLnBrk="0" hangingPunct="1">
       <a:defRPr sz="1200" kern="1200">
         <a:solidFill>
           <a:schemeClr val="tx1"/>
@@ -463,7 +257,7 @@
         <a:cs typeface="+mn-cs"/>
       </a:defRPr>
     </a:lvl6pPr>
-    <a:lvl7pPr marL="2743200" algn="l" defTabSz="457200" rtl="0" eaLnBrk="1" latinLnBrk="0" hangingPunct="1">
+    <a:lvl7pPr marL="2743200" algn="l" defTabSz="914400" rtl="0" eaLnBrk="1" latinLnBrk="0" hangingPunct="1">
       <a:defRPr sz="1200" kern="1200">
         <a:solidFill>
           <a:schemeClr val="tx1"/>
@@ -473,7 +267,7 @@
         <a:cs typeface="+mn-cs"/>
       </a:defRPr>
     </a:lvl7pPr>
-    <a:lvl8pPr marL="3200400" algn="l" defTabSz="457200" rtl="0" eaLnBrk="1" latinLnBrk="0" hangingPunct="1">
+    <a:lvl8pPr marL="3200400" algn="l" defTabSz="914400" rtl="0" eaLnBrk="1" latinLnBrk="0" hangingPunct="1">
       <a:defRPr sz="1200" kern="1200">
         <a:solidFill>
           <a:schemeClr val="tx1"/>
@@ -483,7 +277,7 @@
         <a:cs typeface="+mn-cs"/>
       </a:defRPr>
     </a:lvl8pPr>
-    <a:lvl9pPr marL="3657600" algn="l" defTabSz="457200" rtl="0" eaLnBrk="1" latinLnBrk="0" hangingPunct="1">
+    <a:lvl9pPr marL="3657600" algn="l" defTabSz="914400" rtl="0" eaLnBrk="1" latinLnBrk="0" hangingPunct="1">
       <a:defRPr sz="1200" kern="1200">
         <a:solidFill>
           <a:schemeClr val="tx1"/>
@@ -498,7 +292,7 @@
 </file>
 
 <file path=ppt/notesSlides/notesSlide1.xml><?xml version="1.0" encoding="utf-8"?>
-<p:notes xmlns:a="http://schemas.openxmlformats.org/drawingml/2006/main" xmlns:p="http://schemas.openxmlformats.org/presentationml/2006/main" xmlns:r="http://schemas.openxmlformats.org/officeDocument/2006/relationships">
+<p:notes xmlns:a="http://schemas.openxmlformats.org/drawingml/2006/main" xmlns:r="http://schemas.openxmlformats.org/officeDocument/2006/relationships" xmlns:p="http://schemas.openxmlformats.org/presentationml/2006/main">
   <p:cSld>
     <p:spTree>
       <p:nvGrpSpPr>
@@ -518,7 +312,7 @@
         <p:nvSpPr>
           <p:cNvPr id="2" name="Slide Image Placeholder 1"/>
           <p:cNvSpPr>
-            <a:spLocks noGrp="1"/>
+            <a:spLocks noGrp="1" noRot="1" noChangeAspect="1"/>
           </p:cNvSpPr>
           <p:nvPr>
             <p:ph type="sldImg" idx="2"/>
@@ -533,7 +327,7 @@
             <a:spLocks noGrp="1"/>
           </p:cNvSpPr>
           <p:nvPr>
-            <p:ph type="body" idx="3" sz="quarter"/>
+            <p:ph type="body" sz="quarter" idx="3"/>
           </p:nvPr>
         </p:nvSpPr>
         <p:spPr/>
@@ -542,26 +336,31 @@
           <a:lstStyle/>
           <a:p>
             <a:r>
+              <a:rPr dirty="0"/>
               <a:t>Welcome to our ICS 410 tutorial on the Dart programming language. We are really glad you are here.</a:t>
             </a:r>
           </a:p>
           <a:p>
             <a:r>
+              <a:rPr dirty="0"/>
               <a:t>Over the next thirty minutes we will give you a complete tour of Dart — what it is, where it came from, why it matters today, and how its most important language features actually work in practice.</a:t>
             </a:r>
           </a:p>
           <a:p>
             <a:r>
+              <a:rPr dirty="0"/>
               <a:t>We have written this so it is useful whether you have never touched a single line of Dart in your life, or you are already a working developer who just wants a fast modern refresher.</a:t>
             </a:r>
           </a:p>
           <a:p>
             <a:r>
+              <a:rPr dirty="0"/>
               <a:t>Every code example you will see has a runnable companion file in the GitHub repository linked in the description. We strongly encourage you to clone it and code along.</a:t>
             </a:r>
           </a:p>
           <a:p>
             <a:r>
+              <a:rPr dirty="0"/>
               <a:t>So grab a coffee, open a terminal, and let us get started.</a:t>
             </a:r>
           </a:p>
@@ -574,7 +373,7 @@
             <a:spLocks noGrp="1"/>
           </p:cNvSpPr>
           <p:nvPr>
-            <p:ph type="sldNum" idx="5" sz="quarter"/>
+            <p:ph type="sldNum" sz="quarter" idx="5"/>
           </p:nvPr>
         </p:nvSpPr>
         <p:spPr/>
@@ -588,7 +387,7 @@
 </file>
 
 <file path=ppt/notesSlides/notesSlide10.xml><?xml version="1.0" encoding="utf-8"?>
-<p:notes xmlns:a="http://schemas.openxmlformats.org/drawingml/2006/main" xmlns:p="http://schemas.openxmlformats.org/presentationml/2006/main" xmlns:r="http://schemas.openxmlformats.org/officeDocument/2006/relationships">
+<p:notes xmlns:a="http://schemas.openxmlformats.org/drawingml/2006/main" xmlns:r="http://schemas.openxmlformats.org/officeDocument/2006/relationships" xmlns:p="http://schemas.openxmlformats.org/presentationml/2006/main">
   <p:cSld>
     <p:spTree>
       <p:nvGrpSpPr>
@@ -608,7 +407,7 @@
         <p:nvSpPr>
           <p:cNvPr id="2" name="Slide Image Placeholder 1"/>
           <p:cNvSpPr>
-            <a:spLocks noGrp="1"/>
+            <a:spLocks noGrp="1" noRot="1" noChangeAspect="1"/>
           </p:cNvSpPr>
           <p:nvPr>
             <p:ph type="sldImg" idx="2"/>
@@ -623,7 +422,7 @@
             <a:spLocks noGrp="1"/>
           </p:cNvSpPr>
           <p:nvPr>
-            <p:ph type="body" idx="3" sz="quarter"/>
+            <p:ph type="body" sz="quarter" idx="3"/>
           </p:nvPr>
         </p:nvSpPr>
         <p:spPr/>
@@ -632,31 +431,69 @@
           <a:lstStyle/>
           <a:p>
             <a:r>
+              <a:rPr dirty="0"/>
               <a:t>Dart does not auto-convert between types. You convert explicitly, preventing subtle bugs.</a:t>
             </a:r>
           </a:p>
           <a:p>
             <a:r>
-              <a:t>To go from string to number, call `int.parse` or `double.parse`. If input might be malformed, prefer `tryParse`, which returns null instead of throwing.</a:t>
-            </a:r>
-          </a:p>
-          <a:p>
-            <a:r>
-              <a:t>For number to string, call `toString` or use string interpolation.</a:t>
-            </a:r>
-          </a:p>
-          <a:p>
-            <a:r>
+              <a:rPr dirty="0"/>
+              <a:t>To go from string to number, call `</a:t>
+            </a:r>
+            <a:r>
+              <a:rPr dirty="0" err="1"/>
+              <a:t>int.parse</a:t>
+            </a:r>
+            <a:r>
+              <a:rPr dirty="0"/>
+              <a:t>` or `</a:t>
+            </a:r>
+            <a:r>
+              <a:rPr dirty="0" err="1"/>
+              <a:t>double.parse</a:t>
+            </a:r>
+            <a:r>
+              <a:rPr dirty="0"/>
+              <a:t>`. If input might be malformed, prefer `</a:t>
+            </a:r>
+            <a:r>
+              <a:rPr dirty="0" err="1"/>
+              <a:t>tryParse</a:t>
+            </a:r>
+            <a:r>
+              <a:rPr dirty="0"/>
+              <a:t>`, which returns null instead of throwing.</a:t>
+            </a:r>
+          </a:p>
+          <a:p>
+            <a:r>
+              <a:rPr dirty="0"/>
+              <a:t>For number to string, call `</a:t>
+            </a:r>
+            <a:r>
+              <a:rPr dirty="0" err="1"/>
+              <a:t>toString</a:t>
+            </a:r>
+            <a:r>
+              <a:rPr dirty="0"/>
+              <a:t>` or use string interpolation.</a:t>
+            </a:r>
+          </a:p>
+          <a:p>
+            <a:r>
+              <a:rPr dirty="0"/>
               <a:t>To force one type into another at runtime, use `as`. If the cast mismatches, you get an exception, so usually guard with an `is` check first.</a:t>
             </a:r>
           </a:p>
           <a:p>
             <a:r>
+              <a:rPr dirty="0"/>
               <a:t>`is` returns true when an object is compatible with a type. `is!` is its negation.</a:t>
             </a:r>
           </a:p>
           <a:p>
             <a:r>
+              <a:rPr dirty="0"/>
               <a:t>After an `is` check, the compiler "type-promotes" the variable, so you can use it directly without an extra cast.</a:t>
             </a:r>
           </a:p>
@@ -669,7 +506,7 @@
             <a:spLocks noGrp="1"/>
           </p:cNvSpPr>
           <p:nvPr>
-            <p:ph type="sldNum" idx="5" sz="quarter"/>
+            <p:ph type="sldNum" sz="quarter" idx="5"/>
           </p:nvPr>
         </p:nvSpPr>
         <p:spPr/>
@@ -683,7 +520,7 @@
 </file>
 
 <file path=ppt/notesSlides/notesSlide11.xml><?xml version="1.0" encoding="utf-8"?>
-<p:notes xmlns:a="http://schemas.openxmlformats.org/drawingml/2006/main" xmlns:p="http://schemas.openxmlformats.org/presentationml/2006/main" xmlns:r="http://schemas.openxmlformats.org/officeDocument/2006/relationships">
+<p:notes xmlns:a="http://schemas.openxmlformats.org/drawingml/2006/main" xmlns:r="http://schemas.openxmlformats.org/officeDocument/2006/relationships" xmlns:p="http://schemas.openxmlformats.org/presentationml/2006/main">
   <p:cSld>
     <p:spTree>
       <p:nvGrpSpPr>
@@ -703,7 +540,7 @@
         <p:nvSpPr>
           <p:cNvPr id="2" name="Slide Image Placeholder 1"/>
           <p:cNvSpPr>
-            <a:spLocks noGrp="1"/>
+            <a:spLocks noGrp="1" noRot="1" noChangeAspect="1"/>
           </p:cNvSpPr>
           <p:nvPr>
             <p:ph type="sldImg" idx="2"/>
@@ -718,7 +555,7 @@
             <a:spLocks noGrp="1"/>
           </p:cNvSpPr>
           <p:nvPr>
-            <p:ph type="body" idx="3" sz="quarter"/>
+            <p:ph type="body" sz="quarter" idx="3"/>
           </p:nvPr>
         </p:nvSpPr>
         <p:spPr/>
@@ -727,36 +564,43 @@
           <a:lstStyle/>
           <a:p>
             <a:r>
+              <a:rPr dirty="0"/>
               <a:t>Beyond primitives, Dart ships rich built-in collections.</a:t>
             </a:r>
           </a:p>
           <a:p>
             <a:r>
+              <a:rPr dirty="0"/>
               <a:t>`List` is an ordered sequence, growable by default — like an array in C or Java.</a:t>
             </a:r>
           </a:p>
           <a:p>
             <a:r>
+              <a:rPr dirty="0"/>
               <a:t>`Set` is an unordered collection that rejects duplicates — perfect when you care only about membership.</a:t>
             </a:r>
           </a:p>
           <a:p>
             <a:r>
+              <a:rPr dirty="0"/>
               <a:t>`Map` stores key-value pairs, like a Python dictionary.</a:t>
             </a:r>
           </a:p>
           <a:p>
             <a:r>
+              <a:rPr dirty="0"/>
               <a:t>All three are generic. You parameterize them with the element type using angle brackets — `List&lt;int&gt;`, `Map&lt;String, int&gt;`.</a:t>
             </a:r>
           </a:p>
           <a:p>
             <a:r>
+              <a:rPr dirty="0"/>
               <a:t>You can write your own generic classes too, with `&lt;T&gt;` after the class name.</a:t>
             </a:r>
           </a:p>
           <a:p>
             <a:r>
+              <a:rPr dirty="0"/>
               <a:t>New in Dart 3 are records — anonymous fixed-size tuples you can return without defining a class. We revisit records on slide twenty-six.</a:t>
             </a:r>
           </a:p>
@@ -769,7 +613,7 @@
             <a:spLocks noGrp="1"/>
           </p:cNvSpPr>
           <p:nvPr>
-            <p:ph type="sldNum" idx="5" sz="quarter"/>
+            <p:ph type="sldNum" sz="quarter" idx="5"/>
           </p:nvPr>
         </p:nvSpPr>
         <p:spPr/>
@@ -783,7 +627,7 @@
 </file>
 
 <file path=ppt/notesSlides/notesSlide12.xml><?xml version="1.0" encoding="utf-8"?>
-<p:notes xmlns:a="http://schemas.openxmlformats.org/drawingml/2006/main" xmlns:p="http://schemas.openxmlformats.org/presentationml/2006/main" xmlns:r="http://schemas.openxmlformats.org/officeDocument/2006/relationships">
+<p:notes xmlns:a="http://schemas.openxmlformats.org/drawingml/2006/main" xmlns:r="http://schemas.openxmlformats.org/officeDocument/2006/relationships" xmlns:p="http://schemas.openxmlformats.org/presentationml/2006/main">
   <p:cSld>
     <p:spTree>
       <p:nvGrpSpPr>
@@ -803,7 +647,7 @@
         <p:nvSpPr>
           <p:cNvPr id="2" name="Slide Image Placeholder 1"/>
           <p:cNvSpPr>
-            <a:spLocks noGrp="1"/>
+            <a:spLocks noGrp="1" noRot="1" noChangeAspect="1"/>
           </p:cNvSpPr>
           <p:nvPr>
             <p:ph type="sldImg" idx="2"/>
@@ -818,7 +662,7 @@
             <a:spLocks noGrp="1"/>
           </p:cNvSpPr>
           <p:nvPr>
-            <p:ph type="body" idx="3" sz="quarter"/>
+            <p:ph type="body" sz="quarter" idx="3"/>
           </p:nvPr>
         </p:nvSpPr>
         <p:spPr/>
@@ -827,26 +671,31 @@
           <a:lstStyle/>
           <a:p>
             <a:r>
+              <a:rPr dirty="0"/>
               <a:t>Now we shift gears from data to control.</a:t>
             </a:r>
           </a:p>
           <a:p>
             <a:r>
+              <a:rPr dirty="0"/>
               <a:t>"Control abstraction" is just the term for how a language lets you steer the flow of execution — when to branch, when to loop, when to call into another piece of code.</a:t>
             </a:r>
           </a:p>
           <a:p>
             <a:r>
+              <a:rPr dirty="0"/>
               <a:t>Over the next five slides we will look at branching with conditionals, repeating with loops, defining and calling functions, and finally what actually happens when you pass a value as an argument.</a:t>
             </a:r>
           </a:p>
           <a:p>
             <a:r>
+              <a:rPr dirty="0"/>
               <a:t>That last point — pass semantics — is something many languages get subtly different. Confusion about it is the source of countless bugs in real production code, so we will be very precise about it.</a:t>
             </a:r>
           </a:p>
           <a:p>
             <a:r>
+              <a:rPr dirty="0"/>
               <a:t>Together with data abstraction, control abstraction gives you the building blocks for every program you will ever write.</a:t>
             </a:r>
           </a:p>
@@ -859,7 +708,7 @@
             <a:spLocks noGrp="1"/>
           </p:cNvSpPr>
           <p:nvPr>
-            <p:ph type="sldNum" idx="5" sz="quarter"/>
+            <p:ph type="sldNum" sz="quarter" idx="5"/>
           </p:nvPr>
         </p:nvSpPr>
         <p:spPr/>
@@ -873,7 +722,7 @@
 </file>
 
 <file path=ppt/notesSlides/notesSlide13.xml><?xml version="1.0" encoding="utf-8"?>
-<p:notes xmlns:a="http://schemas.openxmlformats.org/drawingml/2006/main" xmlns:p="http://schemas.openxmlformats.org/presentationml/2006/main" xmlns:r="http://schemas.openxmlformats.org/officeDocument/2006/relationships">
+<p:notes xmlns:a="http://schemas.openxmlformats.org/drawingml/2006/main" xmlns:r="http://schemas.openxmlformats.org/officeDocument/2006/relationships" xmlns:p="http://schemas.openxmlformats.org/presentationml/2006/main">
   <p:cSld>
     <p:spTree>
       <p:nvGrpSpPr>
@@ -893,7 +742,7 @@
         <p:nvSpPr>
           <p:cNvPr id="2" name="Slide Image Placeholder 1"/>
           <p:cNvSpPr>
-            <a:spLocks noGrp="1"/>
+            <a:spLocks noGrp="1" noRot="1" noChangeAspect="1"/>
           </p:cNvSpPr>
           <p:nvPr>
             <p:ph type="sldImg" idx="2"/>
@@ -908,7 +757,7 @@
             <a:spLocks noGrp="1"/>
           </p:cNvSpPr>
           <p:nvPr>
-            <p:ph type="body" idx="3" sz="quarter"/>
+            <p:ph type="body" sz="quarter" idx="3"/>
           </p:nvPr>
         </p:nvSpPr>
         <p:spPr/>
@@ -917,32 +766,54 @@
           <a:lstStyle/>
           <a:p>
             <a:r>
+              <a:rPr dirty="0"/>
               <a:t>Branching in Dart looks familiar to anyone who has used a C-style language.</a:t>
             </a:r>
           </a:p>
           <a:p>
             <a:r>
+              <a:rPr dirty="0"/>
               <a:t>You have classic `if`, `else if`, `else` chains for multi-way branching. And you have the ternary operator with question-mark and colon for picking between two values inline.</a:t>
             </a:r>
           </a:p>
           <a:p>
             <a:r>
+              <a:rPr dirty="0"/>
               <a:t>The double question mark — formally called the null-coalescing operator — gives you a quick fallback when the left side is null. We will see this again when we cover null safety.</a:t>
             </a:r>
           </a:p>
           <a:p>
             <a:r>
+              <a:rPr dirty="0"/>
               <a:t>Dart 3 added two big improvements here. First, switch expressions, which actually return a value rather than just executing statements.</a:t>
             </a:r>
           </a:p>
           <a:p>
             <a:r>
-              <a:t>Second, pattern matching, which lets you destructure objects, records, and lists right inside the case label.</a:t>
-            </a:r>
-          </a:p>
-          <a:p>
-            <a:r>
-              <a:t>Notice how clean that grade-tier example is. No break statements anywhere, no fallthrough bugs to worry about. The underscore is the wildcard catch-all pattern. That style of code reads more like math than control flow, and it is one of the nicest parts of modern Dart.</a:t>
+              <a:rPr dirty="0"/>
+              <a:t>Second, pattern matching, which lets you </a:t>
+            </a:r>
+            <a:r>
+              <a:rPr dirty="0" err="1"/>
+              <a:t>destructure</a:t>
+            </a:r>
+            <a:r>
+              <a:rPr dirty="0"/>
+              <a:t> objects, records, and lists right inside the case label.</a:t>
+            </a:r>
+          </a:p>
+          <a:p>
+            <a:r>
+              <a:rPr dirty="0"/>
+              <a:t>Notice how clean that grade-tier example is. No break statements anywhere, no </a:t>
+            </a:r>
+            <a:r>
+              <a:rPr dirty="0" err="1"/>
+              <a:t>fallthrough</a:t>
+            </a:r>
+            <a:r>
+              <a:rPr dirty="0"/>
+              <a:t> bugs to worry about. The underscore is the wildcard catch-all pattern. That style of code reads more like math than control flow, and it is one of the nicest parts of modern Dart.</a:t>
             </a:r>
           </a:p>
         </p:txBody>
@@ -954,7 +825,7 @@
             <a:spLocks noGrp="1"/>
           </p:cNvSpPr>
           <p:nvPr>
-            <p:ph type="sldNum" idx="5" sz="quarter"/>
+            <p:ph type="sldNum" sz="quarter" idx="5"/>
           </p:nvPr>
         </p:nvSpPr>
         <p:spPr/>
@@ -968,7 +839,7 @@
 </file>
 
 <file path=ppt/notesSlides/notesSlide14.xml><?xml version="1.0" encoding="utf-8"?>
-<p:notes xmlns:a="http://schemas.openxmlformats.org/drawingml/2006/main" xmlns:p="http://schemas.openxmlformats.org/presentationml/2006/main" xmlns:r="http://schemas.openxmlformats.org/officeDocument/2006/relationships">
+<p:notes xmlns:a="http://schemas.openxmlformats.org/drawingml/2006/main" xmlns:r="http://schemas.openxmlformats.org/officeDocument/2006/relationships" xmlns:p="http://schemas.openxmlformats.org/presentationml/2006/main">
   <p:cSld>
     <p:spTree>
       <p:nvGrpSpPr>
@@ -988,7 +859,7 @@
         <p:nvSpPr>
           <p:cNvPr id="2" name="Slide Image Placeholder 1"/>
           <p:cNvSpPr>
-            <a:spLocks noGrp="1"/>
+            <a:spLocks noGrp="1" noRot="1" noChangeAspect="1"/>
           </p:cNvSpPr>
           <p:nvPr>
             <p:ph type="sldImg" idx="2"/>
@@ -1003,7 +874,7 @@
             <a:spLocks noGrp="1"/>
           </p:cNvSpPr>
           <p:nvPr>
-            <p:ph type="body" idx="3" sz="quarter"/>
+            <p:ph type="body" sz="quarter" idx="3"/>
           </p:nvPr>
         </p:nvSpPr>
         <p:spPr/>
@@ -1012,36 +883,59 @@
           <a:lstStyle/>
           <a:p>
             <a:r>
+              <a:rPr dirty="0"/>
               <a:t>Looping in Dart covers all the usual cases you would expect.</a:t>
             </a:r>
           </a:p>
           <a:p>
             <a:r>
+              <a:rPr dirty="0"/>
               <a:t>The classic three-part `for` loop with an explicit index is there when you genuinely need a counter.</a:t>
             </a:r>
           </a:p>
           <a:p>
             <a:r>
-              <a:t>The `for-in` form iterates over any iterable — lists, sets, even custom lazy iterables we will build in a few slides. This is the form you should reach for first because it is more readable.</a:t>
-            </a:r>
-          </a:p>
-          <a:p>
-            <a:r>
+              <a:rPr dirty="0"/>
+              <a:t>The `for-in` form iterates over any </a:t>
+            </a:r>
+            <a:r>
+              <a:rPr dirty="0" err="1"/>
+              <a:t>iterable</a:t>
+            </a:r>
+            <a:r>
+              <a:rPr dirty="0"/>
+              <a:t> — lists, sets, even custom lazy </a:t>
+            </a:r>
+            <a:r>
+              <a:rPr dirty="0" err="1"/>
+              <a:t>iterables</a:t>
+            </a:r>
+            <a:r>
+              <a:rPr dirty="0"/>
+              <a:t> we will build in a few slides. This is the form you should reach for first because it is more readable.</a:t>
+            </a:r>
+          </a:p>
+          <a:p>
+            <a:r>
+              <a:rPr dirty="0"/>
               <a:t>`while` and `do-while` behave exactly the way you expect from any C-style language. `while` checks the condition first; `do-while` checks after the first iteration.</a:t>
             </a:r>
           </a:p>
           <a:p>
             <a:r>
+              <a:rPr dirty="0"/>
               <a:t>And of course you can recurse — define a function that calls itself. But always include a base case so you do not blow up the call stack with infinite recursion.</a:t>
             </a:r>
           </a:p>
           <a:p>
             <a:r>
+              <a:rPr dirty="0"/>
               <a:t>The factorial example here is a one-liner thanks to the arrow function syntax we will cover in just two slides.</a:t>
             </a:r>
           </a:p>
           <a:p>
             <a:r>
+              <a:rPr dirty="0"/>
               <a:t>Both `break` and `continue` work normally inside loops. Dart also supports labeled breaks for jumping out of nested loops in one shot.</a:t>
             </a:r>
           </a:p>
@@ -1054,7 +948,7 @@
             <a:spLocks noGrp="1"/>
           </p:cNvSpPr>
           <p:nvPr>
-            <p:ph type="sldNum" idx="5" sz="quarter"/>
+            <p:ph type="sldNum" sz="quarter" idx="5"/>
           </p:nvPr>
         </p:nvSpPr>
         <p:spPr/>
@@ -1068,7 +962,7 @@
 </file>
 
 <file path=ppt/notesSlides/notesSlide15.xml><?xml version="1.0" encoding="utf-8"?>
-<p:notes xmlns:a="http://schemas.openxmlformats.org/drawingml/2006/main" xmlns:p="http://schemas.openxmlformats.org/presentationml/2006/main" xmlns:r="http://schemas.openxmlformats.org/officeDocument/2006/relationships">
+<p:notes xmlns:a="http://schemas.openxmlformats.org/drawingml/2006/main" xmlns:r="http://schemas.openxmlformats.org/officeDocument/2006/relationships" xmlns:p="http://schemas.openxmlformats.org/presentationml/2006/main">
   <p:cSld>
     <p:spTree>
       <p:nvGrpSpPr>
@@ -1088,7 +982,7 @@
         <p:nvSpPr>
           <p:cNvPr id="2" name="Slide Image Placeholder 1"/>
           <p:cNvSpPr>
-            <a:spLocks noGrp="1"/>
+            <a:spLocks noGrp="1" noRot="1" noChangeAspect="1"/>
           </p:cNvSpPr>
           <p:nvPr>
             <p:ph type="sldImg" idx="2"/>
@@ -1103,7 +997,7 @@
             <a:spLocks noGrp="1"/>
           </p:cNvSpPr>
           <p:nvPr>
-            <p:ph type="body" idx="3" sz="quarter"/>
+            <p:ph type="body" sz="quarter" idx="3"/>
           </p:nvPr>
         </p:nvSpPr>
         <p:spPr/>
@@ -1112,41 +1006,49 @@
           <a:lstStyle/>
           <a:p>
             <a:r>
+              <a:rPr dirty="0"/>
               <a:t>Functions in Dart are wonderfully flexible.</a:t>
             </a:r>
           </a:p>
           <a:p>
             <a:r>
+              <a:rPr dirty="0"/>
               <a:t>By default, parameters are positional and required.</a:t>
             </a:r>
           </a:p>
           <a:p>
             <a:r>
+              <a:rPr dirty="0"/>
               <a:t>Square brackets make parameters optional and positional, with defaults you specify.</a:t>
             </a:r>
           </a:p>
           <a:p>
             <a:r>
+              <a:rPr dirty="0"/>
               <a:t>Curly braces make them named. Named parameters self-document call sites because you write each name at the call.</a:t>
             </a:r>
           </a:p>
           <a:p>
             <a:r>
+              <a:rPr dirty="0"/>
               <a:t>Mark named parameters `required` for compiler enforcement, or give them defaults.</a:t>
             </a:r>
           </a:p>
           <a:p>
             <a:r>
+              <a:rPr dirty="0"/>
               <a:t>The fat-arrow is shorthand for a single-expression body — same as `return expr`, but tighter.</a:t>
             </a:r>
           </a:p>
           <a:p>
             <a:r>
+              <a:rPr dirty="0"/>
               <a:t>Functions are first-class values: pass them, store them, return them.</a:t>
             </a:r>
           </a:p>
           <a:p>
             <a:r>
+              <a:rPr dirty="0"/>
               <a:t>They form proper closures, capturing variables from the surrounding scope.</a:t>
             </a:r>
           </a:p>
@@ -1159,7 +1061,7 @@
             <a:spLocks noGrp="1"/>
           </p:cNvSpPr>
           <p:nvPr>
-            <p:ph type="sldNum" idx="5" sz="quarter"/>
+            <p:ph type="sldNum" sz="quarter" idx="5"/>
           </p:nvPr>
         </p:nvSpPr>
         <p:spPr/>
@@ -1173,7 +1075,7 @@
 </file>
 
 <file path=ppt/notesSlides/notesSlide16.xml><?xml version="1.0" encoding="utf-8"?>
-<p:notes xmlns:a="http://schemas.openxmlformats.org/drawingml/2006/main" xmlns:p="http://schemas.openxmlformats.org/presentationml/2006/main" xmlns:r="http://schemas.openxmlformats.org/officeDocument/2006/relationships">
+<p:notes xmlns:a="http://schemas.openxmlformats.org/drawingml/2006/main" xmlns:r="http://schemas.openxmlformats.org/officeDocument/2006/relationships" xmlns:p="http://schemas.openxmlformats.org/presentationml/2006/main">
   <p:cSld>
     <p:spTree>
       <p:nvGrpSpPr>
@@ -1193,7 +1095,7 @@
         <p:nvSpPr>
           <p:cNvPr id="2" name="Slide Image Placeholder 1"/>
           <p:cNvSpPr>
-            <a:spLocks noGrp="1"/>
+            <a:spLocks noGrp="1" noRot="1" noChangeAspect="1"/>
           </p:cNvSpPr>
           <p:nvPr>
             <p:ph type="sldImg" idx="2"/>
@@ -1208,7 +1110,7 @@
             <a:spLocks noGrp="1"/>
           </p:cNvSpPr>
           <p:nvPr>
-            <p:ph type="body" idx="3" sz="quarter"/>
+            <p:ph type="body" sz="quarter" idx="3"/>
           </p:nvPr>
         </p:nvSpPr>
         <p:spPr/>
@@ -1217,41 +1119,57 @@
           <a:lstStyle/>
           <a:p>
             <a:r>
+              <a:rPr dirty="0"/>
               <a:t>This is the slide that trips many people up. Listen closely.</a:t>
             </a:r>
           </a:p>
           <a:p>
             <a:r>
+              <a:rPr dirty="0"/>
               <a:t>Dart is "pass-by-value-of-the-reference," sometimes called call-by-sharing.</a:t>
             </a:r>
           </a:p>
           <a:p>
             <a:r>
-              <a:t>For primitive numbers and booleans, the value itself is copied into the parameter. Changes inside the function are local — they never leak out.</a:t>
-            </a:r>
-          </a:p>
-          <a:p>
-            <a:r>
+              <a:rPr dirty="0"/>
+              <a:t>For primitive numbers and </a:t>
+            </a:r>
+            <a:r>
+              <a:rPr dirty="0" err="1"/>
+              <a:t>booleans</a:t>
+            </a:r>
+            <a:r>
+              <a:rPr dirty="0"/>
+              <a:t>, the value itself is copied into the parameter. Changes inside the function are local — they never leak out.</a:t>
+            </a:r>
+          </a:p>
+          <a:p>
+            <a:r>
+              <a:rPr dirty="0"/>
               <a:t>For objects — lists, maps, sets, your own classes — what gets copied is the reference handle to the underlying object.</a:t>
             </a:r>
           </a:p>
           <a:p>
             <a:r>
+              <a:rPr dirty="0"/>
               <a:t>Both caller and function now hold separate handles pointing at the same single object in memory.</a:t>
             </a:r>
           </a:p>
           <a:p>
             <a:r>
+              <a:rPr dirty="0"/>
               <a:t>Mutating through the handle — say, calling `add` on a list — is visible to the caller because they share the object.</a:t>
             </a:r>
           </a:p>
           <a:p>
             <a:r>
+              <a:rPr dirty="0"/>
               <a:t>But reassigning the parameter to a different object only changes the local handle. The caller's variable is untouched.</a:t>
             </a:r>
           </a:p>
           <a:p>
             <a:r>
+              <a:rPr dirty="0"/>
               <a:t>Same model as Java, Python, and JavaScript — once you have it, it transfers.</a:t>
             </a:r>
           </a:p>
@@ -1264,7 +1182,7 @@
             <a:spLocks noGrp="1"/>
           </p:cNvSpPr>
           <p:nvPr>
-            <p:ph type="sldNum" idx="5" sz="quarter"/>
+            <p:ph type="sldNum" sz="quarter" idx="5"/>
           </p:nvPr>
         </p:nvSpPr>
         <p:spPr/>
@@ -1278,7 +1196,7 @@
 </file>
 
 <file path=ppt/notesSlides/notesSlide17.xml><?xml version="1.0" encoding="utf-8"?>
-<p:notes xmlns:a="http://schemas.openxmlformats.org/drawingml/2006/main" xmlns:p="http://schemas.openxmlformats.org/presentationml/2006/main" xmlns:r="http://schemas.openxmlformats.org/officeDocument/2006/relationships">
+<p:notes xmlns:a="http://schemas.openxmlformats.org/drawingml/2006/main" xmlns:r="http://schemas.openxmlformats.org/officeDocument/2006/relationships" xmlns:p="http://schemas.openxmlformats.org/presentationml/2006/main">
   <p:cSld>
     <p:spTree>
       <p:nvGrpSpPr>
@@ -1298,7 +1216,7 @@
         <p:nvSpPr>
           <p:cNvPr id="2" name="Slide Image Placeholder 1"/>
           <p:cNvSpPr>
-            <a:spLocks noGrp="1"/>
+            <a:spLocks noGrp="1" noRot="1" noChangeAspect="1"/>
           </p:cNvSpPr>
           <p:nvPr>
             <p:ph type="sldImg" idx="2"/>
@@ -1313,7 +1231,7 @@
             <a:spLocks noGrp="1"/>
           </p:cNvSpPr>
           <p:nvPr>
-            <p:ph type="body" idx="3" sz="quarter"/>
+            <p:ph type="body" sz="quarter" idx="3"/>
           </p:nvPr>
         </p:nvSpPr>
         <p:spPr/>
@@ -1354,7 +1272,7 @@
             <a:spLocks noGrp="1"/>
           </p:cNvSpPr>
           <p:nvPr>
-            <p:ph type="sldNum" idx="5" sz="quarter"/>
+            <p:ph type="sldNum" sz="quarter" idx="5"/>
           </p:nvPr>
         </p:nvSpPr>
         <p:spPr/>
@@ -1368,7 +1286,7 @@
 </file>
 
 <file path=ppt/notesSlides/notesSlide18.xml><?xml version="1.0" encoding="utf-8"?>
-<p:notes xmlns:a="http://schemas.openxmlformats.org/drawingml/2006/main" xmlns:p="http://schemas.openxmlformats.org/presentationml/2006/main" xmlns:r="http://schemas.openxmlformats.org/officeDocument/2006/relationships">
+<p:notes xmlns:a="http://schemas.openxmlformats.org/drawingml/2006/main" xmlns:r="http://schemas.openxmlformats.org/officeDocument/2006/relationships" xmlns:p="http://schemas.openxmlformats.org/presentationml/2006/main">
   <p:cSld>
     <p:spTree>
       <p:nvGrpSpPr>
@@ -1388,7 +1306,7 @@
         <p:nvSpPr>
           <p:cNvPr id="2" name="Slide Image Placeholder 1"/>
           <p:cNvSpPr>
-            <a:spLocks noGrp="1"/>
+            <a:spLocks noGrp="1" noRot="1" noChangeAspect="1"/>
           </p:cNvSpPr>
           <p:nvPr>
             <p:ph type="sldImg" idx="2"/>
@@ -1403,7 +1321,7 @@
             <a:spLocks noGrp="1"/>
           </p:cNvSpPr>
           <p:nvPr>
-            <p:ph type="body" idx="3" sz="quarter"/>
+            <p:ph type="body" sz="quarter" idx="3"/>
           </p:nvPr>
         </p:nvSpPr>
         <p:spPr/>
@@ -1449,7 +1367,7 @@
             <a:spLocks noGrp="1"/>
           </p:cNvSpPr>
           <p:nvPr>
-            <p:ph type="sldNum" idx="5" sz="quarter"/>
+            <p:ph type="sldNum" sz="quarter" idx="5"/>
           </p:nvPr>
         </p:nvSpPr>
         <p:spPr/>
@@ -1463,7 +1381,7 @@
 </file>
 
 <file path=ppt/notesSlides/notesSlide19.xml><?xml version="1.0" encoding="utf-8"?>
-<p:notes xmlns:a="http://schemas.openxmlformats.org/drawingml/2006/main" xmlns:p="http://schemas.openxmlformats.org/presentationml/2006/main" xmlns:r="http://schemas.openxmlformats.org/officeDocument/2006/relationships">
+<p:notes xmlns:a="http://schemas.openxmlformats.org/drawingml/2006/main" xmlns:r="http://schemas.openxmlformats.org/officeDocument/2006/relationships" xmlns:p="http://schemas.openxmlformats.org/presentationml/2006/main">
   <p:cSld>
     <p:spTree>
       <p:nvGrpSpPr>
@@ -1483,7 +1401,7 @@
         <p:nvSpPr>
           <p:cNvPr id="2" name="Slide Image Placeholder 1"/>
           <p:cNvSpPr>
-            <a:spLocks noGrp="1"/>
+            <a:spLocks noGrp="1" noRot="1" noChangeAspect="1"/>
           </p:cNvSpPr>
           <p:nvPr>
             <p:ph type="sldImg" idx="2"/>
@@ -1498,7 +1416,7 @@
             <a:spLocks noGrp="1"/>
           </p:cNvSpPr>
           <p:nvPr>
-            <p:ph type="body" idx="3" sz="quarter"/>
+            <p:ph type="body" sz="quarter" idx="3"/>
           </p:nvPr>
         </p:nvSpPr>
         <p:spPr/>
@@ -1544,7 +1462,7 @@
             <a:spLocks noGrp="1"/>
           </p:cNvSpPr>
           <p:nvPr>
-            <p:ph type="sldNum" idx="5" sz="quarter"/>
+            <p:ph type="sldNum" sz="quarter" idx="5"/>
           </p:nvPr>
         </p:nvSpPr>
         <p:spPr/>
@@ -1558,7 +1476,7 @@
 </file>
 
 <file path=ppt/notesSlides/notesSlide2.xml><?xml version="1.0" encoding="utf-8"?>
-<p:notes xmlns:a="http://schemas.openxmlformats.org/drawingml/2006/main" xmlns:p="http://schemas.openxmlformats.org/presentationml/2006/main" xmlns:r="http://schemas.openxmlformats.org/officeDocument/2006/relationships">
+<p:notes xmlns:a="http://schemas.openxmlformats.org/drawingml/2006/main" xmlns:r="http://schemas.openxmlformats.org/officeDocument/2006/relationships" xmlns:p="http://schemas.openxmlformats.org/presentationml/2006/main">
   <p:cSld>
     <p:spTree>
       <p:nvGrpSpPr>
@@ -1578,7 +1496,7 @@
         <p:nvSpPr>
           <p:cNvPr id="2" name="Slide Image Placeholder 1"/>
           <p:cNvSpPr>
-            <a:spLocks noGrp="1"/>
+            <a:spLocks noGrp="1" noRot="1" noChangeAspect="1"/>
           </p:cNvSpPr>
           <p:nvPr>
             <p:ph type="sldImg" idx="2"/>
@@ -1593,7 +1511,7 @@
             <a:spLocks noGrp="1"/>
           </p:cNvSpPr>
           <p:nvPr>
-            <p:ph type="body" idx="3" sz="quarter"/>
+            <p:ph type="body" sz="quarter" idx="3"/>
           </p:nvPr>
         </p:nvSpPr>
         <p:spPr/>
@@ -1602,36 +1520,43 @@
           <a:lstStyle/>
           <a:p>
             <a:r>
+              <a:rPr dirty="0"/>
               <a:t>Here is our roadmap for the next half hour. The video is divided into six clear sections, with timestamps on screen so you can jump around.</a:t>
             </a:r>
           </a:p>
           <a:p>
             <a:r>
+              <a:rPr dirty="0"/>
               <a:t>We begin with background and setup — what Dart is, why people use it, and how to install the SDK. That takes about three and a half minutes.</a:t>
             </a:r>
           </a:p>
           <a:p>
             <a:r>
+              <a:rPr dirty="0"/>
               <a:t>Then we cover data abstraction: how Dart lets you describe values with variables, primitives, conversions, and collections.</a:t>
             </a:r>
           </a:p>
           <a:p>
             <a:r>
+              <a:rPr dirty="0"/>
               <a:t>Next is control abstraction — conditionals, loops, functions, and how arguments are passed.</a:t>
             </a:r>
           </a:p>
           <a:p>
             <a:r>
+              <a:rPr dirty="0"/>
               <a:t>After that we explore Dart's three programming paradigms in depth: imperative, object-oriented, and functional.</a:t>
             </a:r>
           </a:p>
           <a:p>
             <a:r>
+              <a:rPr dirty="0"/>
               <a:t>Then we tackle the modern Dart 3 features that really set the language apart in 2026.</a:t>
             </a:r>
           </a:p>
           <a:p>
             <a:r>
+              <a:rPr dirty="0"/>
               <a:t>We close with a seven-question quiz from easy to hard, plus references for further study. Let us dive in.</a:t>
             </a:r>
           </a:p>
@@ -1644,7 +1569,7 @@
             <a:spLocks noGrp="1"/>
           </p:cNvSpPr>
           <p:nvPr>
-            <p:ph type="sldNum" idx="5" sz="quarter"/>
+            <p:ph type="sldNum" sz="quarter" idx="5"/>
           </p:nvPr>
         </p:nvSpPr>
         <p:spPr/>
@@ -1658,7 +1583,7 @@
 </file>
 
 <file path=ppt/notesSlides/notesSlide20.xml><?xml version="1.0" encoding="utf-8"?>
-<p:notes xmlns:a="http://schemas.openxmlformats.org/drawingml/2006/main" xmlns:p="http://schemas.openxmlformats.org/presentationml/2006/main" xmlns:r="http://schemas.openxmlformats.org/officeDocument/2006/relationships">
+<p:notes xmlns:a="http://schemas.openxmlformats.org/drawingml/2006/main" xmlns:r="http://schemas.openxmlformats.org/officeDocument/2006/relationships" xmlns:p="http://schemas.openxmlformats.org/presentationml/2006/main">
   <p:cSld>
     <p:spTree>
       <p:nvGrpSpPr>
@@ -1678,7 +1603,7 @@
         <p:nvSpPr>
           <p:cNvPr id="2" name="Slide Image Placeholder 1"/>
           <p:cNvSpPr>
-            <a:spLocks noGrp="1"/>
+            <a:spLocks noGrp="1" noRot="1" noChangeAspect="1"/>
           </p:cNvSpPr>
           <p:nvPr>
             <p:ph type="sldImg" idx="2"/>
@@ -1693,7 +1618,7 @@
             <a:spLocks noGrp="1"/>
           </p:cNvSpPr>
           <p:nvPr>
-            <p:ph type="body" idx="3" sz="quarter"/>
+            <p:ph type="body" sz="quarter" idx="3"/>
           </p:nvPr>
         </p:nvSpPr>
         <p:spPr/>
@@ -1734,7 +1659,7 @@
             <a:spLocks noGrp="1"/>
           </p:cNvSpPr>
           <p:nvPr>
-            <p:ph type="sldNum" idx="5" sz="quarter"/>
+            <p:ph type="sldNum" sz="quarter" idx="5"/>
           </p:nvPr>
         </p:nvSpPr>
         <p:spPr/>
@@ -1748,7 +1673,7 @@
 </file>
 
 <file path=ppt/notesSlides/notesSlide21.xml><?xml version="1.0" encoding="utf-8"?>
-<p:notes xmlns:a="http://schemas.openxmlformats.org/drawingml/2006/main" xmlns:p="http://schemas.openxmlformats.org/presentationml/2006/main" xmlns:r="http://schemas.openxmlformats.org/officeDocument/2006/relationships">
+<p:notes xmlns:a="http://schemas.openxmlformats.org/drawingml/2006/main" xmlns:r="http://schemas.openxmlformats.org/officeDocument/2006/relationships" xmlns:p="http://schemas.openxmlformats.org/presentationml/2006/main">
   <p:cSld>
     <p:spTree>
       <p:nvGrpSpPr>
@@ -1768,7 +1693,7 @@
         <p:nvSpPr>
           <p:cNvPr id="2" name="Slide Image Placeholder 1"/>
           <p:cNvSpPr>
-            <a:spLocks noGrp="1"/>
+            <a:spLocks noGrp="1" noRot="1" noChangeAspect="1"/>
           </p:cNvSpPr>
           <p:nvPr>
             <p:ph type="sldImg" idx="2"/>
@@ -1783,7 +1708,7 @@
             <a:spLocks noGrp="1"/>
           </p:cNvSpPr>
           <p:nvPr>
-            <p:ph type="body" idx="3" sz="quarter"/>
+            <p:ph type="body" sz="quarter" idx="3"/>
           </p:nvPr>
         </p:nvSpPr>
         <p:spPr/>
@@ -1839,7 +1764,7 @@
             <a:spLocks noGrp="1"/>
           </p:cNvSpPr>
           <p:nvPr>
-            <p:ph type="sldNum" idx="5" sz="quarter"/>
+            <p:ph type="sldNum" sz="quarter" idx="5"/>
           </p:nvPr>
         </p:nvSpPr>
         <p:spPr/>
@@ -1853,7 +1778,7 @@
 </file>
 
 <file path=ppt/notesSlides/notesSlide22.xml><?xml version="1.0" encoding="utf-8"?>
-<p:notes xmlns:a="http://schemas.openxmlformats.org/drawingml/2006/main" xmlns:p="http://schemas.openxmlformats.org/presentationml/2006/main" xmlns:r="http://schemas.openxmlformats.org/officeDocument/2006/relationships">
+<p:notes xmlns:a="http://schemas.openxmlformats.org/drawingml/2006/main" xmlns:r="http://schemas.openxmlformats.org/officeDocument/2006/relationships" xmlns:p="http://schemas.openxmlformats.org/presentationml/2006/main">
   <p:cSld>
     <p:spTree>
       <p:nvGrpSpPr>
@@ -1873,7 +1798,7 @@
         <p:nvSpPr>
           <p:cNvPr id="2" name="Slide Image Placeholder 1"/>
           <p:cNvSpPr>
-            <a:spLocks noGrp="1"/>
+            <a:spLocks noGrp="1" noRot="1" noChangeAspect="1"/>
           </p:cNvSpPr>
           <p:nvPr>
             <p:ph type="sldImg" idx="2"/>
@@ -1888,7 +1813,7 @@
             <a:spLocks noGrp="1"/>
           </p:cNvSpPr>
           <p:nvPr>
-            <p:ph type="body" idx="3" sz="quarter"/>
+            <p:ph type="body" sz="quarter" idx="3"/>
           </p:nvPr>
         </p:nvSpPr>
         <p:spPr/>
@@ -1939,7 +1864,7 @@
             <a:spLocks noGrp="1"/>
           </p:cNvSpPr>
           <p:nvPr>
-            <p:ph type="sldNum" idx="5" sz="quarter"/>
+            <p:ph type="sldNum" sz="quarter" idx="5"/>
           </p:nvPr>
         </p:nvSpPr>
         <p:spPr/>
@@ -1953,7 +1878,7 @@
 </file>
 
 <file path=ppt/notesSlides/notesSlide23.xml><?xml version="1.0" encoding="utf-8"?>
-<p:notes xmlns:a="http://schemas.openxmlformats.org/drawingml/2006/main" xmlns:p="http://schemas.openxmlformats.org/presentationml/2006/main" xmlns:r="http://schemas.openxmlformats.org/officeDocument/2006/relationships">
+<p:notes xmlns:a="http://schemas.openxmlformats.org/drawingml/2006/main" xmlns:r="http://schemas.openxmlformats.org/officeDocument/2006/relationships" xmlns:p="http://schemas.openxmlformats.org/presentationml/2006/main">
   <p:cSld>
     <p:spTree>
       <p:nvGrpSpPr>
@@ -1973,7 +1898,7 @@
         <p:nvSpPr>
           <p:cNvPr id="2" name="Slide Image Placeholder 1"/>
           <p:cNvSpPr>
-            <a:spLocks noGrp="1"/>
+            <a:spLocks noGrp="1" noRot="1" noChangeAspect="1"/>
           </p:cNvSpPr>
           <p:nvPr>
             <p:ph type="sldImg" idx="2"/>
@@ -1988,7 +1913,7 @@
             <a:spLocks noGrp="1"/>
           </p:cNvSpPr>
           <p:nvPr>
-            <p:ph type="body" idx="3" sz="quarter"/>
+            <p:ph type="body" sz="quarter" idx="3"/>
           </p:nvPr>
         </p:nvSpPr>
         <p:spPr/>
@@ -2044,7 +1969,7 @@
             <a:spLocks noGrp="1"/>
           </p:cNvSpPr>
           <p:nvPr>
-            <p:ph type="sldNum" idx="5" sz="quarter"/>
+            <p:ph type="sldNum" sz="quarter" idx="5"/>
           </p:nvPr>
         </p:nvSpPr>
         <p:spPr/>
@@ -2058,7 +1983,7 @@
 </file>
 
 <file path=ppt/notesSlides/notesSlide24.xml><?xml version="1.0" encoding="utf-8"?>
-<p:notes xmlns:a="http://schemas.openxmlformats.org/drawingml/2006/main" xmlns:p="http://schemas.openxmlformats.org/presentationml/2006/main" xmlns:r="http://schemas.openxmlformats.org/officeDocument/2006/relationships">
+<p:notes xmlns:a="http://schemas.openxmlformats.org/drawingml/2006/main" xmlns:r="http://schemas.openxmlformats.org/officeDocument/2006/relationships" xmlns:p="http://schemas.openxmlformats.org/presentationml/2006/main">
   <p:cSld>
     <p:spTree>
       <p:nvGrpSpPr>
@@ -2078,7 +2003,7 @@
         <p:nvSpPr>
           <p:cNvPr id="2" name="Slide Image Placeholder 1"/>
           <p:cNvSpPr>
-            <a:spLocks noGrp="1"/>
+            <a:spLocks noGrp="1" noRot="1" noChangeAspect="1"/>
           </p:cNvSpPr>
           <p:nvPr>
             <p:ph type="sldImg" idx="2"/>
@@ -2093,7 +2018,7 @@
             <a:spLocks noGrp="1"/>
           </p:cNvSpPr>
           <p:nvPr>
-            <p:ph type="body" idx="3" sz="quarter"/>
+            <p:ph type="body" sz="quarter" idx="3"/>
           </p:nvPr>
         </p:nvSpPr>
         <p:spPr/>
@@ -2149,7 +2074,7 @@
             <a:spLocks noGrp="1"/>
           </p:cNvSpPr>
           <p:nvPr>
-            <p:ph type="sldNum" idx="5" sz="quarter"/>
+            <p:ph type="sldNum" sz="quarter" idx="5"/>
           </p:nvPr>
         </p:nvSpPr>
         <p:spPr/>
@@ -2163,7 +2088,7 @@
 </file>
 
 <file path=ppt/notesSlides/notesSlide25.xml><?xml version="1.0" encoding="utf-8"?>
-<p:notes xmlns:a="http://schemas.openxmlformats.org/drawingml/2006/main" xmlns:p="http://schemas.openxmlformats.org/presentationml/2006/main" xmlns:r="http://schemas.openxmlformats.org/officeDocument/2006/relationships">
+<p:notes xmlns:a="http://schemas.openxmlformats.org/drawingml/2006/main" xmlns:r="http://schemas.openxmlformats.org/officeDocument/2006/relationships" xmlns:p="http://schemas.openxmlformats.org/presentationml/2006/main">
   <p:cSld>
     <p:spTree>
       <p:nvGrpSpPr>
@@ -2183,7 +2108,7 @@
         <p:nvSpPr>
           <p:cNvPr id="2" name="Slide Image Placeholder 1"/>
           <p:cNvSpPr>
-            <a:spLocks noGrp="1"/>
+            <a:spLocks noGrp="1" noRot="1" noChangeAspect="1"/>
           </p:cNvSpPr>
           <p:nvPr>
             <p:ph type="sldImg" idx="2"/>
@@ -2198,7 +2123,7 @@
             <a:spLocks noGrp="1"/>
           </p:cNvSpPr>
           <p:nvPr>
-            <p:ph type="body" idx="3" sz="quarter"/>
+            <p:ph type="body" sz="quarter" idx="3"/>
           </p:nvPr>
         </p:nvSpPr>
         <p:spPr/>
@@ -2244,7 +2169,7 @@
             <a:spLocks noGrp="1"/>
           </p:cNvSpPr>
           <p:nvPr>
-            <p:ph type="sldNum" idx="5" sz="quarter"/>
+            <p:ph type="sldNum" sz="quarter" idx="5"/>
           </p:nvPr>
         </p:nvSpPr>
         <p:spPr/>
@@ -2258,7 +2183,7 @@
 </file>
 
 <file path=ppt/notesSlides/notesSlide26.xml><?xml version="1.0" encoding="utf-8"?>
-<p:notes xmlns:a="http://schemas.openxmlformats.org/drawingml/2006/main" xmlns:p="http://schemas.openxmlformats.org/presentationml/2006/main" xmlns:r="http://schemas.openxmlformats.org/officeDocument/2006/relationships">
+<p:notes xmlns:a="http://schemas.openxmlformats.org/drawingml/2006/main" xmlns:r="http://schemas.openxmlformats.org/officeDocument/2006/relationships" xmlns:p="http://schemas.openxmlformats.org/presentationml/2006/main">
   <p:cSld>
     <p:spTree>
       <p:nvGrpSpPr>
@@ -2278,7 +2203,7 @@
         <p:nvSpPr>
           <p:cNvPr id="2" name="Slide Image Placeholder 1"/>
           <p:cNvSpPr>
-            <a:spLocks noGrp="1"/>
+            <a:spLocks noGrp="1" noRot="1" noChangeAspect="1"/>
           </p:cNvSpPr>
           <p:nvPr>
             <p:ph type="sldImg" idx="2"/>
@@ -2293,7 +2218,7 @@
             <a:spLocks noGrp="1"/>
           </p:cNvSpPr>
           <p:nvPr>
-            <p:ph type="body" idx="3" sz="quarter"/>
+            <p:ph type="body" sz="quarter" idx="3"/>
           </p:nvPr>
         </p:nvSpPr>
         <p:spPr/>
@@ -2339,7 +2264,7 @@
             <a:spLocks noGrp="1"/>
           </p:cNvSpPr>
           <p:nvPr>
-            <p:ph type="sldNum" idx="5" sz="quarter"/>
+            <p:ph type="sldNum" sz="quarter" idx="5"/>
           </p:nvPr>
         </p:nvSpPr>
         <p:spPr/>
@@ -2353,7 +2278,7 @@
 </file>
 
 <file path=ppt/notesSlides/notesSlide27.xml><?xml version="1.0" encoding="utf-8"?>
-<p:notes xmlns:a="http://schemas.openxmlformats.org/drawingml/2006/main" xmlns:p="http://schemas.openxmlformats.org/presentationml/2006/main" xmlns:r="http://schemas.openxmlformats.org/officeDocument/2006/relationships">
+<p:notes xmlns:a="http://schemas.openxmlformats.org/drawingml/2006/main" xmlns:r="http://schemas.openxmlformats.org/officeDocument/2006/relationships" xmlns:p="http://schemas.openxmlformats.org/presentationml/2006/main">
   <p:cSld>
     <p:spTree>
       <p:nvGrpSpPr>
@@ -2373,7 +2298,7 @@
         <p:nvSpPr>
           <p:cNvPr id="2" name="Slide Image Placeholder 1"/>
           <p:cNvSpPr>
-            <a:spLocks noGrp="1"/>
+            <a:spLocks noGrp="1" noRot="1" noChangeAspect="1"/>
           </p:cNvSpPr>
           <p:nvPr>
             <p:ph type="sldImg" idx="2"/>
@@ -2388,7 +2313,7 @@
             <a:spLocks noGrp="1"/>
           </p:cNvSpPr>
           <p:nvPr>
-            <p:ph type="body" idx="3" sz="quarter"/>
+            <p:ph type="body" sz="quarter" idx="3"/>
           </p:nvPr>
         </p:nvSpPr>
         <p:spPr/>
@@ -2429,7 +2354,7 @@
             <a:spLocks noGrp="1"/>
           </p:cNvSpPr>
           <p:nvPr>
-            <p:ph type="sldNum" idx="5" sz="quarter"/>
+            <p:ph type="sldNum" sz="quarter" idx="5"/>
           </p:nvPr>
         </p:nvSpPr>
         <p:spPr/>
@@ -2443,7 +2368,7 @@
 </file>
 
 <file path=ppt/notesSlides/notesSlide28.xml><?xml version="1.0" encoding="utf-8"?>
-<p:notes xmlns:a="http://schemas.openxmlformats.org/drawingml/2006/main" xmlns:p="http://schemas.openxmlformats.org/presentationml/2006/main" xmlns:r="http://schemas.openxmlformats.org/officeDocument/2006/relationships">
+<p:notes xmlns:a="http://schemas.openxmlformats.org/drawingml/2006/main" xmlns:r="http://schemas.openxmlformats.org/officeDocument/2006/relationships" xmlns:p="http://schemas.openxmlformats.org/presentationml/2006/main">
   <p:cSld>
     <p:spTree>
       <p:nvGrpSpPr>
@@ -2463,7 +2388,7 @@
         <p:nvSpPr>
           <p:cNvPr id="2" name="Slide Image Placeholder 1"/>
           <p:cNvSpPr>
-            <a:spLocks noGrp="1"/>
+            <a:spLocks noGrp="1" noRot="1" noChangeAspect="1"/>
           </p:cNvSpPr>
           <p:nvPr>
             <p:ph type="sldImg" idx="2"/>
@@ -2478,7 +2403,7 @@
             <a:spLocks noGrp="1"/>
           </p:cNvSpPr>
           <p:nvPr>
-            <p:ph type="body" idx="3" sz="quarter"/>
+            <p:ph type="body" sz="quarter" idx="3"/>
           </p:nvPr>
         </p:nvSpPr>
         <p:spPr/>
@@ -2514,7 +2439,7 @@
             <a:spLocks noGrp="1"/>
           </p:cNvSpPr>
           <p:nvPr>
-            <p:ph type="sldNum" idx="5" sz="quarter"/>
+            <p:ph type="sldNum" sz="quarter" idx="5"/>
           </p:nvPr>
         </p:nvSpPr>
         <p:spPr/>
@@ -2528,7 +2453,7 @@
 </file>
 
 <file path=ppt/notesSlides/notesSlide29.xml><?xml version="1.0" encoding="utf-8"?>
-<p:notes xmlns:a="http://schemas.openxmlformats.org/drawingml/2006/main" xmlns:p="http://schemas.openxmlformats.org/presentationml/2006/main" xmlns:r="http://schemas.openxmlformats.org/officeDocument/2006/relationships">
+<p:notes xmlns:a="http://schemas.openxmlformats.org/drawingml/2006/main" xmlns:r="http://schemas.openxmlformats.org/officeDocument/2006/relationships" xmlns:p="http://schemas.openxmlformats.org/presentationml/2006/main">
   <p:cSld>
     <p:spTree>
       <p:nvGrpSpPr>
@@ -2548,7 +2473,7 @@
         <p:nvSpPr>
           <p:cNvPr id="2" name="Slide Image Placeholder 1"/>
           <p:cNvSpPr>
-            <a:spLocks noGrp="1"/>
+            <a:spLocks noGrp="1" noRot="1" noChangeAspect="1"/>
           </p:cNvSpPr>
           <p:nvPr>
             <p:ph type="sldImg" idx="2"/>
@@ -2563,7 +2488,7 @@
             <a:spLocks noGrp="1"/>
           </p:cNvSpPr>
           <p:nvPr>
-            <p:ph type="body" idx="3" sz="quarter"/>
+            <p:ph type="body" sz="quarter" idx="3"/>
           </p:nvPr>
         </p:nvSpPr>
         <p:spPr/>
@@ -2594,7 +2519,7 @@
             <a:spLocks noGrp="1"/>
           </p:cNvSpPr>
           <p:nvPr>
-            <p:ph type="sldNum" idx="5" sz="quarter"/>
+            <p:ph type="sldNum" sz="quarter" idx="5"/>
           </p:nvPr>
         </p:nvSpPr>
         <p:spPr/>
@@ -2608,7 +2533,7 @@
 </file>
 
 <file path=ppt/notesSlides/notesSlide3.xml><?xml version="1.0" encoding="utf-8"?>
-<p:notes xmlns:a="http://schemas.openxmlformats.org/drawingml/2006/main" xmlns:p="http://schemas.openxmlformats.org/presentationml/2006/main" xmlns:r="http://schemas.openxmlformats.org/officeDocument/2006/relationships">
+<p:notes xmlns:a="http://schemas.openxmlformats.org/drawingml/2006/main" xmlns:r="http://schemas.openxmlformats.org/officeDocument/2006/relationships" xmlns:p="http://schemas.openxmlformats.org/presentationml/2006/main">
   <p:cSld>
     <p:spTree>
       <p:nvGrpSpPr>
@@ -2628,7 +2553,7 @@
         <p:nvSpPr>
           <p:cNvPr id="2" name="Slide Image Placeholder 1"/>
           <p:cNvSpPr>
-            <a:spLocks noGrp="1"/>
+            <a:spLocks noGrp="1" noRot="1" noChangeAspect="1"/>
           </p:cNvSpPr>
           <p:nvPr>
             <p:ph type="sldImg" idx="2"/>
@@ -2643,7 +2568,7 @@
             <a:spLocks noGrp="1"/>
           </p:cNvSpPr>
           <p:nvPr>
-            <p:ph type="body" idx="3" sz="quarter"/>
+            <p:ph type="body" sz="quarter" idx="3"/>
           </p:nvPr>
         </p:nvSpPr>
         <p:spPr/>
@@ -2652,36 +2577,43 @@
           <a:lstStyle/>
           <a:p>
             <a:r>
+              <a:rPr dirty="0"/>
               <a:t>So what is Dart? Dart is a language created at Google, first released in 2011.</a:t>
             </a:r>
           </a:p>
           <a:p>
             <a:r>
+              <a:rPr dirty="0"/>
               <a:t>It was originally designed by Lars Bak and Kasper Lund — two engineers famous for their work on the V8 JavaScript engine in Chrome.</a:t>
             </a:r>
           </a:p>
           <a:p>
             <a:r>
+              <a:rPr dirty="0"/>
               <a:t>"Statically typed" means every variable has a known type at compile time, catching mistakes before runtime.</a:t>
             </a:r>
           </a:p>
           <a:p>
             <a:r>
+              <a:rPr dirty="0"/>
               <a:t>"Multi-paradigm" means you mix object-oriented, functional, and imperative styles freely in the same file.</a:t>
             </a:r>
           </a:p>
           <a:p>
             <a:r>
+              <a:rPr dirty="0"/>
               <a:t>Dart is open source under a BSD license — a permissive open-source license that lets anyone use, modify, and redistribute the code — governed in the open on GitHub.</a:t>
             </a:r>
           </a:p>
           <a:p>
             <a:r>
+              <a:rPr dirty="0"/>
               <a:t>A key feature is dual compilation. AOT, ahead-of-time, produces fast native machine code you ship to users. JIT, just-in-time, compiles while you run — enabling hot reload that shows code changes in milliseconds.</a:t>
             </a:r>
           </a:p>
           <a:p>
             <a:r>
+              <a:rPr dirty="0"/>
               <a:t>Most developers meet Dart through Flutter, Google's framework for building mobile, web, desktop, and embedded apps from one codebase.</a:t>
             </a:r>
           </a:p>
@@ -2694,7 +2626,7 @@
             <a:spLocks noGrp="1"/>
           </p:cNvSpPr>
           <p:nvPr>
-            <p:ph type="sldNum" idx="5" sz="quarter"/>
+            <p:ph type="sldNum" sz="quarter" idx="5"/>
           </p:nvPr>
         </p:nvSpPr>
         <p:spPr/>
@@ -2708,7 +2640,7 @@
 </file>
 
 <file path=ppt/notesSlides/notesSlide30.xml><?xml version="1.0" encoding="utf-8"?>
-<p:notes xmlns:a="http://schemas.openxmlformats.org/drawingml/2006/main" xmlns:p="http://schemas.openxmlformats.org/presentationml/2006/main" xmlns:r="http://schemas.openxmlformats.org/officeDocument/2006/relationships">
+<p:notes xmlns:a="http://schemas.openxmlformats.org/drawingml/2006/main" xmlns:r="http://schemas.openxmlformats.org/officeDocument/2006/relationships" xmlns:p="http://schemas.openxmlformats.org/presentationml/2006/main">
   <p:cSld>
     <p:spTree>
       <p:nvGrpSpPr>
@@ -2728,7 +2660,7 @@
         <p:nvSpPr>
           <p:cNvPr id="2" name="Slide Image Placeholder 1"/>
           <p:cNvSpPr>
-            <a:spLocks noGrp="1"/>
+            <a:spLocks noGrp="1" noRot="1" noChangeAspect="1"/>
           </p:cNvSpPr>
           <p:nvPr>
             <p:ph type="sldImg" idx="2"/>
@@ -2743,7 +2675,7 @@
             <a:spLocks noGrp="1"/>
           </p:cNvSpPr>
           <p:nvPr>
-            <p:ph type="body" idx="3" sz="quarter"/>
+            <p:ph type="body" sz="quarter" idx="3"/>
           </p:nvPr>
         </p:nvSpPr>
         <p:spPr/>
@@ -2774,7 +2706,7 @@
             <a:spLocks noGrp="1"/>
           </p:cNvSpPr>
           <p:nvPr>
-            <p:ph type="sldNum" idx="5" sz="quarter"/>
+            <p:ph type="sldNum" sz="quarter" idx="5"/>
           </p:nvPr>
         </p:nvSpPr>
         <p:spPr/>
@@ -2788,7 +2720,7 @@
 </file>
 
 <file path=ppt/notesSlides/notesSlide31.xml><?xml version="1.0" encoding="utf-8"?>
-<p:notes xmlns:a="http://schemas.openxmlformats.org/drawingml/2006/main" xmlns:p="http://schemas.openxmlformats.org/presentationml/2006/main" xmlns:r="http://schemas.openxmlformats.org/officeDocument/2006/relationships">
+<p:notes xmlns:a="http://schemas.openxmlformats.org/drawingml/2006/main" xmlns:r="http://schemas.openxmlformats.org/officeDocument/2006/relationships" xmlns:p="http://schemas.openxmlformats.org/presentationml/2006/main">
   <p:cSld>
     <p:spTree>
       <p:nvGrpSpPr>
@@ -2808,7 +2740,7 @@
         <p:nvSpPr>
           <p:cNvPr id="2" name="Slide Image Placeholder 1"/>
           <p:cNvSpPr>
-            <a:spLocks noGrp="1"/>
+            <a:spLocks noGrp="1" noRot="1" noChangeAspect="1"/>
           </p:cNvSpPr>
           <p:nvPr>
             <p:ph type="sldImg" idx="2"/>
@@ -2823,7 +2755,7 @@
             <a:spLocks noGrp="1"/>
           </p:cNvSpPr>
           <p:nvPr>
-            <p:ph type="body" idx="3" sz="quarter"/>
+            <p:ph type="body" sz="quarter" idx="3"/>
           </p:nvPr>
         </p:nvSpPr>
         <p:spPr/>
@@ -2854,7 +2786,7 @@
             <a:spLocks noGrp="1"/>
           </p:cNvSpPr>
           <p:nvPr>
-            <p:ph type="sldNum" idx="5" sz="quarter"/>
+            <p:ph type="sldNum" sz="quarter" idx="5"/>
           </p:nvPr>
         </p:nvSpPr>
         <p:spPr/>
@@ -2868,7 +2800,7 @@
 </file>
 
 <file path=ppt/notesSlides/notesSlide32.xml><?xml version="1.0" encoding="utf-8"?>
-<p:notes xmlns:a="http://schemas.openxmlformats.org/drawingml/2006/main" xmlns:p="http://schemas.openxmlformats.org/presentationml/2006/main" xmlns:r="http://schemas.openxmlformats.org/officeDocument/2006/relationships">
+<p:notes xmlns:a="http://schemas.openxmlformats.org/drawingml/2006/main" xmlns:r="http://schemas.openxmlformats.org/officeDocument/2006/relationships" xmlns:p="http://schemas.openxmlformats.org/presentationml/2006/main">
   <p:cSld>
     <p:spTree>
       <p:nvGrpSpPr>
@@ -2888,7 +2820,7 @@
         <p:nvSpPr>
           <p:cNvPr id="2" name="Slide Image Placeholder 1"/>
           <p:cNvSpPr>
-            <a:spLocks noGrp="1"/>
+            <a:spLocks noGrp="1" noRot="1" noChangeAspect="1"/>
           </p:cNvSpPr>
           <p:nvPr>
             <p:ph type="sldImg" idx="2"/>
@@ -2903,7 +2835,7 @@
             <a:spLocks noGrp="1"/>
           </p:cNvSpPr>
           <p:nvPr>
-            <p:ph type="body" idx="3" sz="quarter"/>
+            <p:ph type="body" sz="quarter" idx="3"/>
           </p:nvPr>
         </p:nvSpPr>
         <p:spPr/>
@@ -2934,7 +2866,7 @@
             <a:spLocks noGrp="1"/>
           </p:cNvSpPr>
           <p:nvPr>
-            <p:ph type="sldNum" idx="5" sz="quarter"/>
+            <p:ph type="sldNum" sz="quarter" idx="5"/>
           </p:nvPr>
         </p:nvSpPr>
         <p:spPr/>
@@ -2948,7 +2880,7 @@
 </file>
 
 <file path=ppt/notesSlides/notesSlide33.xml><?xml version="1.0" encoding="utf-8"?>
-<p:notes xmlns:a="http://schemas.openxmlformats.org/drawingml/2006/main" xmlns:p="http://schemas.openxmlformats.org/presentationml/2006/main" xmlns:r="http://schemas.openxmlformats.org/officeDocument/2006/relationships">
+<p:notes xmlns:a="http://schemas.openxmlformats.org/drawingml/2006/main" xmlns:r="http://schemas.openxmlformats.org/officeDocument/2006/relationships" xmlns:p="http://schemas.openxmlformats.org/presentationml/2006/main">
   <p:cSld>
     <p:spTree>
       <p:nvGrpSpPr>
@@ -2968,7 +2900,7 @@
         <p:nvSpPr>
           <p:cNvPr id="2" name="Slide Image Placeholder 1"/>
           <p:cNvSpPr>
-            <a:spLocks noGrp="1"/>
+            <a:spLocks noGrp="1" noRot="1" noChangeAspect="1"/>
           </p:cNvSpPr>
           <p:nvPr>
             <p:ph type="sldImg" idx="2"/>
@@ -2983,7 +2915,7 @@
             <a:spLocks noGrp="1"/>
           </p:cNvSpPr>
           <p:nvPr>
-            <p:ph type="body" idx="3" sz="quarter"/>
+            <p:ph type="body" sz="quarter" idx="3"/>
           </p:nvPr>
         </p:nvSpPr>
         <p:spPr/>
@@ -3014,7 +2946,7 @@
             <a:spLocks noGrp="1"/>
           </p:cNvSpPr>
           <p:nvPr>
-            <p:ph type="sldNum" idx="5" sz="quarter"/>
+            <p:ph type="sldNum" sz="quarter" idx="5"/>
           </p:nvPr>
         </p:nvSpPr>
         <p:spPr/>
@@ -3028,7 +2960,7 @@
 </file>
 
 <file path=ppt/notesSlides/notesSlide34.xml><?xml version="1.0" encoding="utf-8"?>
-<p:notes xmlns:a="http://schemas.openxmlformats.org/drawingml/2006/main" xmlns:p="http://schemas.openxmlformats.org/presentationml/2006/main" xmlns:r="http://schemas.openxmlformats.org/officeDocument/2006/relationships">
+<p:notes xmlns:a="http://schemas.openxmlformats.org/drawingml/2006/main" xmlns:r="http://schemas.openxmlformats.org/officeDocument/2006/relationships" xmlns:p="http://schemas.openxmlformats.org/presentationml/2006/main">
   <p:cSld>
     <p:spTree>
       <p:nvGrpSpPr>
@@ -3048,7 +2980,7 @@
         <p:nvSpPr>
           <p:cNvPr id="2" name="Slide Image Placeholder 1"/>
           <p:cNvSpPr>
-            <a:spLocks noGrp="1"/>
+            <a:spLocks noGrp="1" noRot="1" noChangeAspect="1"/>
           </p:cNvSpPr>
           <p:nvPr>
             <p:ph type="sldImg" idx="2"/>
@@ -3063,7 +2995,7 @@
             <a:spLocks noGrp="1"/>
           </p:cNvSpPr>
           <p:nvPr>
-            <p:ph type="body" idx="3" sz="quarter"/>
+            <p:ph type="body" sz="quarter" idx="3"/>
           </p:nvPr>
         </p:nvSpPr>
         <p:spPr/>
@@ -3094,7 +3026,7 @@
             <a:spLocks noGrp="1"/>
           </p:cNvSpPr>
           <p:nvPr>
-            <p:ph type="sldNum" idx="5" sz="quarter"/>
+            <p:ph type="sldNum" sz="quarter" idx="5"/>
           </p:nvPr>
         </p:nvSpPr>
         <p:spPr/>
@@ -3108,7 +3040,7 @@
 </file>
 
 <file path=ppt/notesSlides/notesSlide35.xml><?xml version="1.0" encoding="utf-8"?>
-<p:notes xmlns:a="http://schemas.openxmlformats.org/drawingml/2006/main" xmlns:p="http://schemas.openxmlformats.org/presentationml/2006/main" xmlns:r="http://schemas.openxmlformats.org/officeDocument/2006/relationships">
+<p:notes xmlns:a="http://schemas.openxmlformats.org/drawingml/2006/main" xmlns:r="http://schemas.openxmlformats.org/officeDocument/2006/relationships" xmlns:p="http://schemas.openxmlformats.org/presentationml/2006/main">
   <p:cSld>
     <p:spTree>
       <p:nvGrpSpPr>
@@ -3128,7 +3060,7 @@
         <p:nvSpPr>
           <p:cNvPr id="2" name="Slide Image Placeholder 1"/>
           <p:cNvSpPr>
-            <a:spLocks noGrp="1"/>
+            <a:spLocks noGrp="1" noRot="1" noChangeAspect="1"/>
           </p:cNvSpPr>
           <p:nvPr>
             <p:ph type="sldImg" idx="2"/>
@@ -3143,7 +3075,7 @@
             <a:spLocks noGrp="1"/>
           </p:cNvSpPr>
           <p:nvPr>
-            <p:ph type="body" idx="3" sz="quarter"/>
+            <p:ph type="body" sz="quarter" idx="3"/>
           </p:nvPr>
         </p:nvSpPr>
         <p:spPr/>
@@ -3189,7 +3121,7 @@
             <a:spLocks noGrp="1"/>
           </p:cNvSpPr>
           <p:nvPr>
-            <p:ph type="sldNum" idx="5" sz="quarter"/>
+            <p:ph type="sldNum" sz="quarter" idx="5"/>
           </p:nvPr>
         </p:nvSpPr>
         <p:spPr/>
@@ -3203,7 +3135,7 @@
 </file>
 
 <file path=ppt/notesSlides/notesSlide4.xml><?xml version="1.0" encoding="utf-8"?>
-<p:notes xmlns:a="http://schemas.openxmlformats.org/drawingml/2006/main" xmlns:p="http://schemas.openxmlformats.org/presentationml/2006/main" xmlns:r="http://schemas.openxmlformats.org/officeDocument/2006/relationships">
+<p:notes xmlns:a="http://schemas.openxmlformats.org/drawingml/2006/main" xmlns:r="http://schemas.openxmlformats.org/officeDocument/2006/relationships" xmlns:p="http://schemas.openxmlformats.org/presentationml/2006/main">
   <p:cSld>
     <p:spTree>
       <p:nvGrpSpPr>
@@ -3223,7 +3155,7 @@
         <p:nvSpPr>
           <p:cNvPr id="2" name="Slide Image Placeholder 1"/>
           <p:cNvSpPr>
-            <a:spLocks noGrp="1"/>
+            <a:spLocks noGrp="1" noRot="1" noChangeAspect="1"/>
           </p:cNvSpPr>
           <p:nvPr>
             <p:ph type="sldImg" idx="2"/>
@@ -3238,7 +3170,7 @@
             <a:spLocks noGrp="1"/>
           </p:cNvSpPr>
           <p:nvPr>
-            <p:ph type="body" idx="3" sz="quarter"/>
+            <p:ph type="body" sz="quarter" idx="3"/>
           </p:nvPr>
         </p:nvSpPr>
         <p:spPr/>
@@ -3247,36 +3179,67 @@
           <a:lstStyle/>
           <a:p>
             <a:r>
+              <a:rPr dirty="0"/>
               <a:t>So why pick Dart? It is a genuine "write once, run almost anywhere" language.</a:t>
             </a:r>
           </a:p>
           <a:p>
             <a:r>
+              <a:rPr dirty="0"/>
               <a:t>For mobile, you build iOS and Android apps with Flutter from one shared codebase — saving enormous time over writing native apps separately.</a:t>
             </a:r>
           </a:p>
           <a:p>
             <a:r>
-              <a:t>For the web, you compile Dart to JavaScript, or to WebAssembly for closer-to-native browser performance.</a:t>
-            </a:r>
-          </a:p>
-          <a:p>
-            <a:r>
-              <a:t>For backend work, frameworks like Shelf, Dart Frog, and Serverpod power REST or gRPC — a fast Google-developed RPC protocol — APIs on the same Dart VM.</a:t>
-            </a:r>
-          </a:p>
-          <a:p>
-            <a:r>
+              <a:rPr dirty="0"/>
+              <a:t>For the web, you compile Dart to JavaScript, or to </a:t>
+            </a:r>
+            <a:r>
+              <a:rPr dirty="0" err="1"/>
+              <a:t>WebAssembly</a:t>
+            </a:r>
+            <a:r>
+              <a:rPr dirty="0"/>
+              <a:t> for closer-to-native browser performance.</a:t>
+            </a:r>
+          </a:p>
+          <a:p>
+            <a:r>
+              <a:rPr dirty="0"/>
+              <a:t>For backend work, frameworks like Shelf, Dart Frog, and </a:t>
+            </a:r>
+            <a:r>
+              <a:rPr dirty="0" err="1"/>
+              <a:t>Serverpod</a:t>
+            </a:r>
+            <a:r>
+              <a:rPr dirty="0"/>
+              <a:t> power REST or </a:t>
+            </a:r>
+            <a:r>
+              <a:rPr dirty="0" err="1"/>
+              <a:t>gRPC</a:t>
+            </a:r>
+            <a:r>
+              <a:rPr dirty="0"/>
+              <a:t> — a fast Google-developed RPC protocol — APIs on the same Dart VM.</a:t>
+            </a:r>
+          </a:p>
+          <a:p>
+            <a:r>
+              <a:rPr dirty="0"/>
               <a:t>For scripting, you compile command-line tools to a single native binary with no runtime to install.</a:t>
             </a:r>
           </a:p>
           <a:p>
             <a:r>
+              <a:rPr dirty="0"/>
               <a:t>Dart's strengths are sound null safety, instant hot reload, excellent tooling, and a syntax familiar to anyone who has used Java, JavaScript, TypeScript, C-sharp, or Swift.</a:t>
             </a:r>
           </a:p>
           <a:p>
             <a:r>
+              <a:rPr dirty="0"/>
               <a:t>Who is Dart for? Almost anyone. Approachable for first-timers, deep enough for seasoned engineers.</a:t>
             </a:r>
           </a:p>
@@ -3289,7 +3252,7 @@
             <a:spLocks noGrp="1"/>
           </p:cNvSpPr>
           <p:nvPr>
-            <p:ph type="sldNum" idx="5" sz="quarter"/>
+            <p:ph type="sldNum" sz="quarter" idx="5"/>
           </p:nvPr>
         </p:nvSpPr>
         <p:spPr/>
@@ -3303,7 +3266,7 @@
 </file>
 
 <file path=ppt/notesSlides/notesSlide5.xml><?xml version="1.0" encoding="utf-8"?>
-<p:notes xmlns:a="http://schemas.openxmlformats.org/drawingml/2006/main" xmlns:p="http://schemas.openxmlformats.org/presentationml/2006/main" xmlns:r="http://schemas.openxmlformats.org/officeDocument/2006/relationships">
+<p:notes xmlns:a="http://schemas.openxmlformats.org/drawingml/2006/main" xmlns:r="http://schemas.openxmlformats.org/officeDocument/2006/relationships" xmlns:p="http://schemas.openxmlformats.org/presentationml/2006/main">
   <p:cSld>
     <p:spTree>
       <p:nvGrpSpPr>
@@ -3323,7 +3286,7 @@
         <p:nvSpPr>
           <p:cNvPr id="2" name="Slide Image Placeholder 1"/>
           <p:cNvSpPr>
-            <a:spLocks noGrp="1"/>
+            <a:spLocks noGrp="1" noRot="1" noChangeAspect="1"/>
           </p:cNvSpPr>
           <p:nvPr>
             <p:ph type="sldImg" idx="2"/>
@@ -3338,7 +3301,7 @@
             <a:spLocks noGrp="1"/>
           </p:cNvSpPr>
           <p:nvPr>
-            <p:ph type="body" idx="3" sz="quarter"/>
+            <p:ph type="body" sz="quarter" idx="3"/>
           </p:nvPr>
         </p:nvSpPr>
         <p:spPr/>
@@ -3347,36 +3310,67 @@
           <a:lstStyle/>
           <a:p>
             <a:r>
+              <a:rPr dirty="0"/>
               <a:t>Installing Dart is straightforward across all three major OSes.</a:t>
             </a:r>
           </a:p>
           <a:p>
             <a:r>
+              <a:rPr dirty="0"/>
               <a:t>On macOS, use Homebrew. Tap the dart-lang formula and install dart.</a:t>
             </a:r>
           </a:p>
           <a:p>
             <a:r>
-              <a:t>On Windows, use Chocolatey with `choco install dart-sdk`, or grab the MSI installer from dart dot dev.</a:t>
-            </a:r>
-          </a:p>
-          <a:p>
-            <a:r>
-              <a:t>On Linux, add Google's APT repo and run `sudo apt install dart`. Similar packages exist for Fedora and Arch.</a:t>
-            </a:r>
-          </a:p>
-          <a:p>
-            <a:r>
+              <a:rPr dirty="0"/>
+              <a:t>On Windows, use Chocolatey with `</a:t>
+            </a:r>
+            <a:r>
+              <a:rPr dirty="0" err="1"/>
+              <a:t>choco</a:t>
+            </a:r>
+            <a:r>
+              <a:rPr dirty="0"/>
+              <a:t> install dart-</a:t>
+            </a:r>
+            <a:r>
+              <a:rPr dirty="0" err="1"/>
+              <a:t>sdk</a:t>
+            </a:r>
+            <a:r>
+              <a:rPr dirty="0"/>
+              <a:t>`, or grab the MSI installer from dart dot dev.</a:t>
+            </a:r>
+          </a:p>
+          <a:p>
+            <a:r>
+              <a:rPr dirty="0"/>
+              <a:t>On Linux, add Google's APT repo and run `</a:t>
+            </a:r>
+            <a:r>
+              <a:rPr dirty="0" err="1"/>
+              <a:t>sudo</a:t>
+            </a:r>
+            <a:r>
+              <a:rPr dirty="0"/>
+              <a:t> apt install dart`. Similar packages exist for Fedora and Arch.</a:t>
+            </a:r>
+          </a:p>
+          <a:p>
+            <a:r>
+              <a:rPr dirty="0"/>
               <a:t>After installing, run `dart --version` to confirm the SDK is on your PATH.</a:t>
             </a:r>
           </a:p>
           <a:p>
             <a:r>
+              <a:rPr dirty="0"/>
               <a:t>One shortcut: if you install the Flutter SDK, Dart comes bundled. So just install Flutter if you plan to do Flutter work.</a:t>
             </a:r>
           </a:p>
           <a:p>
             <a:r>
+              <a:rPr dirty="0"/>
               <a:t>For multiple projects with different Flutter SDK versions, FVM — the Flutter Version Manager — can pin a Dart version per project. This is optional, and only matters if you juggle multiple Flutter projects.</a:t>
             </a:r>
           </a:p>
@@ -3389,7 +3383,7 @@
             <a:spLocks noGrp="1"/>
           </p:cNvSpPr>
           <p:nvPr>
-            <p:ph type="sldNum" idx="5" sz="quarter"/>
+            <p:ph type="sldNum" sz="quarter" idx="5"/>
           </p:nvPr>
         </p:nvSpPr>
         <p:spPr/>
@@ -3403,7 +3397,7 @@
 </file>
 
 <file path=ppt/notesSlides/notesSlide6.xml><?xml version="1.0" encoding="utf-8"?>
-<p:notes xmlns:a="http://schemas.openxmlformats.org/drawingml/2006/main" xmlns:p="http://schemas.openxmlformats.org/presentationml/2006/main" xmlns:r="http://schemas.openxmlformats.org/officeDocument/2006/relationships">
+<p:notes xmlns:a="http://schemas.openxmlformats.org/drawingml/2006/main" xmlns:r="http://schemas.openxmlformats.org/officeDocument/2006/relationships" xmlns:p="http://schemas.openxmlformats.org/presentationml/2006/main">
   <p:cSld>
     <p:spTree>
       <p:nvGrpSpPr>
@@ -3423,7 +3417,7 @@
         <p:nvSpPr>
           <p:cNvPr id="2" name="Slide Image Placeholder 1"/>
           <p:cNvSpPr>
-            <a:spLocks noGrp="1"/>
+            <a:spLocks noGrp="1" noRot="1" noChangeAspect="1"/>
           </p:cNvSpPr>
           <p:nvPr>
             <p:ph type="sldImg" idx="2"/>
@@ -3438,7 +3432,7 @@
             <a:spLocks noGrp="1"/>
           </p:cNvSpPr>
           <p:nvPr>
-            <p:ph type="body" idx="3" sz="quarter"/>
+            <p:ph type="body" sz="quarter" idx="3"/>
           </p:nvPr>
         </p:nvSpPr>
         <p:spPr/>
@@ -3447,31 +3441,45 @@
           <a:lstStyle/>
           <a:p>
             <a:r>
+              <a:rPr dirty="0"/>
               <a:t>For your editor, you have great options.</a:t>
             </a:r>
           </a:p>
           <a:p>
             <a:r>
+              <a:rPr dirty="0"/>
               <a:t>VS Code with the official Dart extension is the most popular — fast, lightweight, with syntax highlighting, completion, diagnostics, and a debugger.</a:t>
             </a:r>
           </a:p>
           <a:p>
             <a:r>
+              <a:rPr dirty="0"/>
               <a:t>JetBrains users can pick IntelliJ IDEA or Android Studio with the Dart and Flutter plugins. Heavier but more feature-rich.</a:t>
             </a:r>
           </a:p>
           <a:p>
             <a:r>
-              <a:t>For zero-install, head to DartPad dot dev — a free official browser playground that runs Dart client-side.</a:t>
-            </a:r>
-          </a:p>
-          <a:p>
-            <a:r>
+              <a:rPr dirty="0"/>
+              <a:t>For zero-install, head to </a:t>
+            </a:r>
+            <a:r>
+              <a:rPr dirty="0" err="1"/>
+              <a:t>DartPad</a:t>
+            </a:r>
+            <a:r>
+              <a:rPr dirty="0"/>
+              <a:t> dot dev — a free official browser playground that runs Dart client-side.</a:t>
+            </a:r>
+          </a:p>
+          <a:p>
+            <a:r>
+              <a:rPr dirty="0"/>
               <a:t>The SDK ships with `dart format`, `dart analyze`, `dart test`, and `dart run` built in. No separate utilities needed.</a:t>
             </a:r>
           </a:p>
           <a:p>
             <a:r>
+              <a:rPr dirty="0"/>
               <a:t>The package manager is `dart pub`, and the public registry lives at pub dot dev. You will find packages for HTTP clients, JSON, databases, GUI widgets — anything you need.</a:t>
             </a:r>
           </a:p>
@@ -3484,7 +3492,7 @@
             <a:spLocks noGrp="1"/>
           </p:cNvSpPr>
           <p:nvPr>
-            <p:ph type="sldNum" idx="5" sz="quarter"/>
+            <p:ph type="sldNum" sz="quarter" idx="5"/>
           </p:nvPr>
         </p:nvSpPr>
         <p:spPr/>
@@ -3498,7 +3506,7 @@
 </file>
 
 <file path=ppt/notesSlides/notesSlide7.xml><?xml version="1.0" encoding="utf-8"?>
-<p:notes xmlns:a="http://schemas.openxmlformats.org/drawingml/2006/main" xmlns:p="http://schemas.openxmlformats.org/presentationml/2006/main" xmlns:r="http://schemas.openxmlformats.org/officeDocument/2006/relationships">
+<p:notes xmlns:a="http://schemas.openxmlformats.org/drawingml/2006/main" xmlns:r="http://schemas.openxmlformats.org/officeDocument/2006/relationships" xmlns:p="http://schemas.openxmlformats.org/presentationml/2006/main">
   <p:cSld>
     <p:spTree>
       <p:nvGrpSpPr>
@@ -3518,7 +3526,7 @@
         <p:nvSpPr>
           <p:cNvPr id="2" name="Slide Image Placeholder 1"/>
           <p:cNvSpPr>
-            <a:spLocks noGrp="1"/>
+            <a:spLocks noGrp="1" noRot="1" noChangeAspect="1"/>
           </p:cNvSpPr>
           <p:nvPr>
             <p:ph type="sldImg" idx="2"/>
@@ -3533,7 +3541,7 @@
             <a:spLocks noGrp="1"/>
           </p:cNvSpPr>
           <p:nvPr>
-            <p:ph type="body" idx="3" sz="quarter"/>
+            <p:ph type="body" sz="quarter" idx="3"/>
           </p:nvPr>
         </p:nvSpPr>
         <p:spPr/>
@@ -3542,26 +3550,31 @@
           <a:lstStyle/>
           <a:p>
             <a:r>
+              <a:rPr dirty="0"/>
               <a:t>Now we are getting into the core of the tutorial. The next chunk is all about data abstraction.</a:t>
             </a:r>
           </a:p>
           <a:p>
             <a:r>
+              <a:rPr dirty="0"/>
               <a:t>"Data abstraction" sounds intimidating, but it is really just a fancy phrase. It means how a language lets you name values, group them together, and give them meaning.</a:t>
             </a:r>
           </a:p>
           <a:p>
             <a:r>
+              <a:rPr dirty="0"/>
               <a:t>Over the next five slides we cover four big topics: variables and where they are visible, the built-in primitive types and arithmetic, how to convert between types, and finally Dart's collections and generics.</a:t>
             </a:r>
           </a:p>
           <a:p>
             <a:r>
+              <a:rPr dirty="0"/>
               <a:t>"Generics" — just to define the term up front — is a way to reuse the same code across many different element types. So one List class can store integers, strings, or anything else.</a:t>
             </a:r>
           </a:p>
           <a:p>
             <a:r>
+              <a:rPr dirty="0"/>
               <a:t>By the end of this section you should be confident modeling basic data in Dart programs. Let us begin.</a:t>
             </a:r>
           </a:p>
@@ -3574,7 +3587,7 @@
             <a:spLocks noGrp="1"/>
           </p:cNvSpPr>
           <p:nvPr>
-            <p:ph type="sldNum" idx="5" sz="quarter"/>
+            <p:ph type="sldNum" sz="quarter" idx="5"/>
           </p:nvPr>
         </p:nvSpPr>
         <p:spPr/>
@@ -3588,7 +3601,7 @@
 </file>
 
 <file path=ppt/notesSlides/notesSlide8.xml><?xml version="1.0" encoding="utf-8"?>
-<p:notes xmlns:a="http://schemas.openxmlformats.org/drawingml/2006/main" xmlns:p="http://schemas.openxmlformats.org/presentationml/2006/main" xmlns:r="http://schemas.openxmlformats.org/officeDocument/2006/relationships">
+<p:notes xmlns:a="http://schemas.openxmlformats.org/drawingml/2006/main" xmlns:r="http://schemas.openxmlformats.org/officeDocument/2006/relationships" xmlns:p="http://schemas.openxmlformats.org/presentationml/2006/main">
   <p:cSld>
     <p:spTree>
       <p:nvGrpSpPr>
@@ -3608,7 +3621,7 @@
         <p:nvSpPr>
           <p:cNvPr id="2" name="Slide Image Placeholder 1"/>
           <p:cNvSpPr>
-            <a:spLocks noGrp="1"/>
+            <a:spLocks noGrp="1" noRot="1" noChangeAspect="1"/>
           </p:cNvSpPr>
           <p:nvPr>
             <p:ph type="sldImg" idx="2"/>
@@ -3623,7 +3636,7 @@
             <a:spLocks noGrp="1"/>
           </p:cNvSpPr>
           <p:nvPr>
-            <p:ph type="body" idx="3" sz="quarter"/>
+            <p:ph type="body" sz="quarter" idx="3"/>
           </p:nvPr>
         </p:nvSpPr>
         <p:spPr/>
@@ -3632,36 +3645,43 @@
           <a:lstStyle/>
           <a:p>
             <a:r>
+              <a:rPr dirty="0"/>
               <a:t>Dart gives you five ways to declare a variable, each telling the compiler something different.</a:t>
             </a:r>
           </a:p>
           <a:p>
             <a:r>
+              <a:rPr dirty="0"/>
               <a:t>`var` infers the type from the initial value, and can be reassigned later. Your everyday workhorse.</a:t>
             </a:r>
           </a:p>
           <a:p>
             <a:r>
+              <a:rPr dirty="0"/>
               <a:t>`final` is assigned exactly once and frozen for life. But the value can be computed at runtime — great for a timestamp or a request ID.</a:t>
             </a:r>
           </a:p>
           <a:p>
             <a:r>
+              <a:rPr dirty="0"/>
               <a:t>`const` is stronger. The value must be known at compile time and gets baked into the binary. Two const-equal values share memory.</a:t>
             </a:r>
           </a:p>
           <a:p>
             <a:r>
+              <a:rPr dirty="0"/>
               <a:t>`late` says "I promise to assign before I read." Handy for fields initialized in a constructor body or computed lazily on first read.</a:t>
             </a:r>
           </a:p>
           <a:p>
             <a:r>
+              <a:rPr dirty="0"/>
               <a:t>`dynamic` opts out of static typing — powerful but risky. Use it sparingly, mostly when interfacing with untyped data like raw JSON.</a:t>
             </a:r>
           </a:p>
           <a:p>
             <a:r>
+              <a:rPr dirty="0"/>
               <a:t>Scope is lexical. A name is visible only inside the curly-brace block where declared, plus nested blocks, and goes out of scope when the block ends.</a:t>
             </a:r>
           </a:p>
@@ -3674,7 +3694,7 @@
             <a:spLocks noGrp="1"/>
           </p:cNvSpPr>
           <p:nvPr>
-            <p:ph type="sldNum" idx="5" sz="quarter"/>
+            <p:ph type="sldNum" sz="quarter" idx="5"/>
           </p:nvPr>
         </p:nvSpPr>
         <p:spPr/>
@@ -3688,7 +3708,7 @@
 </file>
 
 <file path=ppt/notesSlides/notesSlide9.xml><?xml version="1.0" encoding="utf-8"?>
-<p:notes xmlns:a="http://schemas.openxmlformats.org/drawingml/2006/main" xmlns:p="http://schemas.openxmlformats.org/presentationml/2006/main" xmlns:r="http://schemas.openxmlformats.org/officeDocument/2006/relationships">
+<p:notes xmlns:a="http://schemas.openxmlformats.org/drawingml/2006/main" xmlns:r="http://schemas.openxmlformats.org/officeDocument/2006/relationships" xmlns:p="http://schemas.openxmlformats.org/presentationml/2006/main">
   <p:cSld>
     <p:spTree>
       <p:nvGrpSpPr>
@@ -3708,7 +3728,7 @@
         <p:nvSpPr>
           <p:cNvPr id="2" name="Slide Image Placeholder 1"/>
           <p:cNvSpPr>
-            <a:spLocks noGrp="1"/>
+            <a:spLocks noGrp="1" noRot="1" noChangeAspect="1"/>
           </p:cNvSpPr>
           <p:nvPr>
             <p:ph type="sldImg" idx="2"/>
@@ -3723,7 +3743,7 @@
             <a:spLocks noGrp="1"/>
           </p:cNvSpPr>
           <p:nvPr>
-            <p:ph type="body" idx="3" sz="quarter"/>
+            <p:ph type="body" sz="quarter" idx="3"/>
           </p:nvPr>
         </p:nvSpPr>
         <p:spPr/>
@@ -3732,41 +3752,57 @@
           <a:lstStyle/>
           <a:p>
             <a:r>
+              <a:rPr dirty="0"/>
               <a:t>Dart's primitive types are clean.</a:t>
             </a:r>
           </a:p>
           <a:p>
             <a:r>
+              <a:rPr dirty="0"/>
               <a:t>`int` is whole numbers — sixty-four-bit signed integers on native platforms.</a:t>
             </a:r>
           </a:p>
           <a:p>
             <a:r>
+              <a:rPr dirty="0"/>
               <a:t>`double` is sixty-four-bit IEEE-754 floating-point values.</a:t>
             </a:r>
           </a:p>
           <a:p>
             <a:r>
+              <a:rPr dirty="0"/>
               <a:t>`num` is a parent type holding either an int or a double, useful when accepting either.</a:t>
             </a:r>
           </a:p>
           <a:p>
             <a:r>
-              <a:t>`bool` is strictly true or false. Unlike JavaScript, an empty string, zero, or null is not "falsy" — an `if` condition must be an actual bool.</a:t>
-            </a:r>
-          </a:p>
-          <a:p>
-            <a:r>
+              <a:rPr dirty="0"/>
+              <a:t>`bool` is strictly true or false. Unlike JavaScript, an empty string, zero, or null is not "</a:t>
+            </a:r>
+            <a:r>
+              <a:rPr dirty="0" err="1"/>
+              <a:t>falsy</a:t>
+            </a:r>
+            <a:r>
+              <a:rPr dirty="0"/>
+              <a:t>" — an `if` condition must be an actual bool.</a:t>
+            </a:r>
+          </a:p>
+          <a:p>
+            <a:r>
+              <a:rPr dirty="0"/>
               <a:t>`String` stores UTF-16 text. Single or double quotes work, and dollar-sign interpolation embeds expressions inside a string.</a:t>
             </a:r>
           </a:p>
           <a:p>
             <a:r>
+              <a:rPr dirty="0"/>
               <a:t>Arithmetic operators are familiar from C-style languages. But watch the tilde-slash — that is integer division, truncating toward zero and returning an int.</a:t>
             </a:r>
           </a:p>
           <a:p>
             <a:r>
+              <a:rPr dirty="0"/>
               <a:t>Regular slash always returns a double, even when dividing two integers. So seven divided by two is three point five, not three.</a:t>
             </a:r>
           </a:p>
@@ -3779,7 +3815,7 @@
             <a:spLocks noGrp="1"/>
           </p:cNvSpPr>
           <p:nvPr>
-            <p:ph type="sldNum" idx="5" sz="quarter"/>
+            <p:ph type="sldNum" sz="quarter" idx="5"/>
           </p:nvPr>
         </p:nvSpPr>
         <p:spPr/>
@@ -3830,10 +3866,9 @@
           <a:lstStyle/>
           <a:p>
             <a:r>
-              <a:rPr lang="en-US" smtClean="0"/>
+              <a:rPr lang="en-US"/>
               <a:t>Click to edit Master title style</a:t>
             </a:r>
-            <a:endParaRPr lang="en-US"/>
           </a:p>
         </p:txBody>
       </p:sp>
@@ -3949,10 +3984,9 @@
           </a:lstStyle>
           <a:p>
             <a:r>
-              <a:rPr lang="en-US" smtClean="0"/>
+              <a:rPr lang="en-US"/>
               <a:t>Click to edit Master subtitle style</a:t>
             </a:r>
-            <a:endParaRPr lang="en-US"/>
           </a:p>
         </p:txBody>
       </p:sp>
@@ -3973,7 +4007,7 @@
           <a:p>
             <a:fld id="{5BCAD085-E8A6-8845-BD4E-CB4CCA059FC4}" type="datetimeFigureOut">
               <a:rPr lang="en-US" smtClean="0"/>
-              <a:t>1/27/13</a:t>
+              <a:t>5/2/26</a:t>
             </a:fld>
             <a:endParaRPr lang="en-US"/>
           </a:p>
@@ -4067,10 +4101,9 @@
           <a:lstStyle/>
           <a:p>
             <a:r>
-              <a:rPr lang="en-US" smtClean="0"/>
+              <a:rPr lang="en-US"/>
               <a:t>Click to edit Master title style</a:t>
             </a:r>
-            <a:endParaRPr lang="en-US"/>
           </a:p>
         </p:txBody>
       </p:sp>
@@ -4091,38 +4124,37 @@
           <a:p>
             <a:pPr lvl="0"/>
             <a:r>
-              <a:rPr lang="en-US" smtClean="0"/>
+              <a:rPr lang="en-US"/>
               <a:t>Click to edit Master text styles</a:t>
             </a:r>
           </a:p>
           <a:p>
             <a:pPr lvl="1"/>
             <a:r>
-              <a:rPr lang="en-US" smtClean="0"/>
+              <a:rPr lang="en-US"/>
               <a:t>Second level</a:t>
             </a:r>
           </a:p>
           <a:p>
             <a:pPr lvl="2"/>
             <a:r>
-              <a:rPr lang="en-US" smtClean="0"/>
+              <a:rPr lang="en-US"/>
               <a:t>Third level</a:t>
             </a:r>
           </a:p>
           <a:p>
             <a:pPr lvl="3"/>
             <a:r>
-              <a:rPr lang="en-US" smtClean="0"/>
+              <a:rPr lang="en-US"/>
               <a:t>Fourth level</a:t>
             </a:r>
           </a:p>
           <a:p>
             <a:pPr lvl="4"/>
             <a:r>
-              <a:rPr lang="en-US" smtClean="0"/>
+              <a:rPr lang="en-US"/>
               <a:t>Fifth level</a:t>
             </a:r>
-            <a:endParaRPr lang="en-US"/>
           </a:p>
         </p:txBody>
       </p:sp>
@@ -4143,7 +4175,7 @@
           <a:p>
             <a:fld id="{5BCAD085-E8A6-8845-BD4E-CB4CCA059FC4}" type="datetimeFigureOut">
               <a:rPr lang="en-US" smtClean="0"/>
-              <a:t>1/27/13</a:t>
+              <a:t>5/2/26</a:t>
             </a:fld>
             <a:endParaRPr lang="en-US"/>
           </a:p>
@@ -4242,10 +4274,9 @@
           <a:lstStyle/>
           <a:p>
             <a:r>
-              <a:rPr lang="en-US" smtClean="0"/>
+              <a:rPr lang="en-US"/>
               <a:t>Click to edit Master title style</a:t>
             </a:r>
-            <a:endParaRPr lang="en-US"/>
           </a:p>
         </p:txBody>
       </p:sp>
@@ -4271,38 +4302,37 @@
           <a:p>
             <a:pPr lvl="0"/>
             <a:r>
-              <a:rPr lang="en-US" smtClean="0"/>
+              <a:rPr lang="en-US"/>
               <a:t>Click to edit Master text styles</a:t>
             </a:r>
           </a:p>
           <a:p>
             <a:pPr lvl="1"/>
             <a:r>
-              <a:rPr lang="en-US" smtClean="0"/>
+              <a:rPr lang="en-US"/>
               <a:t>Second level</a:t>
             </a:r>
           </a:p>
           <a:p>
             <a:pPr lvl="2"/>
             <a:r>
-              <a:rPr lang="en-US" smtClean="0"/>
+              <a:rPr lang="en-US"/>
               <a:t>Third level</a:t>
             </a:r>
           </a:p>
           <a:p>
             <a:pPr lvl="3"/>
             <a:r>
-              <a:rPr lang="en-US" smtClean="0"/>
+              <a:rPr lang="en-US"/>
               <a:t>Fourth level</a:t>
             </a:r>
           </a:p>
           <a:p>
             <a:pPr lvl="4"/>
             <a:r>
-              <a:rPr lang="en-US" smtClean="0"/>
+              <a:rPr lang="en-US"/>
               <a:t>Fifth level</a:t>
             </a:r>
-            <a:endParaRPr lang="en-US"/>
           </a:p>
         </p:txBody>
       </p:sp>
@@ -4323,7 +4353,7 @@
           <a:p>
             <a:fld id="{5BCAD085-E8A6-8845-BD4E-CB4CCA059FC4}" type="datetimeFigureOut">
               <a:rPr lang="en-US" smtClean="0"/>
-              <a:t>1/27/13</a:t>
+              <a:t>5/2/26</a:t>
             </a:fld>
             <a:endParaRPr lang="en-US"/>
           </a:p>
@@ -4417,10 +4447,9 @@
           <a:lstStyle/>
           <a:p>
             <a:r>
-              <a:rPr lang="en-US" smtClean="0"/>
+              <a:rPr lang="en-US"/>
               <a:t>Click to edit Master title style</a:t>
             </a:r>
-            <a:endParaRPr lang="en-US"/>
           </a:p>
         </p:txBody>
       </p:sp>
@@ -4441,38 +4470,37 @@
           <a:p>
             <a:pPr lvl="0"/>
             <a:r>
-              <a:rPr lang="en-US" smtClean="0"/>
+              <a:rPr lang="en-US"/>
               <a:t>Click to edit Master text styles</a:t>
             </a:r>
           </a:p>
           <a:p>
             <a:pPr lvl="1"/>
             <a:r>
-              <a:rPr lang="en-US" smtClean="0"/>
+              <a:rPr lang="en-US"/>
               <a:t>Second level</a:t>
             </a:r>
           </a:p>
           <a:p>
             <a:pPr lvl="2"/>
             <a:r>
-              <a:rPr lang="en-US" smtClean="0"/>
+              <a:rPr lang="en-US"/>
               <a:t>Third level</a:t>
             </a:r>
           </a:p>
           <a:p>
             <a:pPr lvl="3"/>
             <a:r>
-              <a:rPr lang="en-US" smtClean="0"/>
+              <a:rPr lang="en-US"/>
               <a:t>Fourth level</a:t>
             </a:r>
           </a:p>
           <a:p>
             <a:pPr lvl="4"/>
             <a:r>
-              <a:rPr lang="en-US" smtClean="0"/>
+              <a:rPr lang="en-US"/>
               <a:t>Fifth level</a:t>
             </a:r>
-            <a:endParaRPr lang="en-US"/>
           </a:p>
         </p:txBody>
       </p:sp>
@@ -4493,7 +4521,7 @@
           <a:p>
             <a:fld id="{5BCAD085-E8A6-8845-BD4E-CB4CCA059FC4}" type="datetimeFigureOut">
               <a:rPr lang="en-US" smtClean="0"/>
-              <a:t>1/27/13</a:t>
+              <a:t>5/2/26</a:t>
             </a:fld>
             <a:endParaRPr lang="en-US"/>
           </a:p>
@@ -4596,10 +4624,9 @@
           </a:lstStyle>
           <a:p>
             <a:r>
-              <a:rPr lang="en-US" smtClean="0"/>
+              <a:rPr lang="en-US"/>
               <a:t>Click to edit Master title style</a:t>
             </a:r>
-            <a:endParaRPr lang="en-US"/>
           </a:p>
         </p:txBody>
       </p:sp>
@@ -4716,7 +4743,7 @@
           <a:p>
             <a:pPr lvl="0"/>
             <a:r>
-              <a:rPr lang="en-US" smtClean="0"/>
+              <a:rPr lang="en-US"/>
               <a:t>Click to edit Master text styles</a:t>
             </a:r>
           </a:p>
@@ -4739,7 +4766,7 @@
           <a:p>
             <a:fld id="{5BCAD085-E8A6-8845-BD4E-CB4CCA059FC4}" type="datetimeFigureOut">
               <a:rPr lang="en-US" smtClean="0"/>
-              <a:t>1/27/13</a:t>
+              <a:t>5/2/26</a:t>
             </a:fld>
             <a:endParaRPr lang="en-US"/>
           </a:p>
@@ -4833,10 +4860,9 @@
           <a:lstStyle/>
           <a:p>
             <a:r>
-              <a:rPr lang="en-US" smtClean="0"/>
+              <a:rPr lang="en-US"/>
               <a:t>Click to edit Master title style</a:t>
             </a:r>
-            <a:endParaRPr lang="en-US"/>
           </a:p>
         </p:txBody>
       </p:sp>
@@ -4890,38 +4916,37 @@
           <a:p>
             <a:pPr lvl="0"/>
             <a:r>
-              <a:rPr lang="en-US" smtClean="0"/>
+              <a:rPr lang="en-US"/>
               <a:t>Click to edit Master text styles</a:t>
             </a:r>
           </a:p>
           <a:p>
             <a:pPr lvl="1"/>
             <a:r>
-              <a:rPr lang="en-US" smtClean="0"/>
+              <a:rPr lang="en-US"/>
               <a:t>Second level</a:t>
             </a:r>
           </a:p>
           <a:p>
             <a:pPr lvl="2"/>
             <a:r>
-              <a:rPr lang="en-US" smtClean="0"/>
+              <a:rPr lang="en-US"/>
               <a:t>Third level</a:t>
             </a:r>
           </a:p>
           <a:p>
             <a:pPr lvl="3"/>
             <a:r>
-              <a:rPr lang="en-US" smtClean="0"/>
+              <a:rPr lang="en-US"/>
               <a:t>Fourth level</a:t>
             </a:r>
           </a:p>
           <a:p>
             <a:pPr lvl="4"/>
             <a:r>
-              <a:rPr lang="en-US" smtClean="0"/>
+              <a:rPr lang="en-US"/>
               <a:t>Fifth level</a:t>
             </a:r>
-            <a:endParaRPr lang="en-US"/>
           </a:p>
         </p:txBody>
       </p:sp>
@@ -4975,38 +5000,37 @@
           <a:p>
             <a:pPr lvl="0"/>
             <a:r>
-              <a:rPr lang="en-US" smtClean="0"/>
+              <a:rPr lang="en-US"/>
               <a:t>Click to edit Master text styles</a:t>
             </a:r>
           </a:p>
           <a:p>
             <a:pPr lvl="1"/>
             <a:r>
-              <a:rPr lang="en-US" smtClean="0"/>
+              <a:rPr lang="en-US"/>
               <a:t>Second level</a:t>
             </a:r>
           </a:p>
           <a:p>
             <a:pPr lvl="2"/>
             <a:r>
-              <a:rPr lang="en-US" smtClean="0"/>
+              <a:rPr lang="en-US"/>
               <a:t>Third level</a:t>
             </a:r>
           </a:p>
           <a:p>
             <a:pPr lvl="3"/>
             <a:r>
-              <a:rPr lang="en-US" smtClean="0"/>
+              <a:rPr lang="en-US"/>
               <a:t>Fourth level</a:t>
             </a:r>
           </a:p>
           <a:p>
             <a:pPr lvl="4"/>
             <a:r>
-              <a:rPr lang="en-US" smtClean="0"/>
+              <a:rPr lang="en-US"/>
               <a:t>Fifth level</a:t>
             </a:r>
-            <a:endParaRPr lang="en-US"/>
           </a:p>
         </p:txBody>
       </p:sp>
@@ -5027,7 +5051,7 @@
           <a:p>
             <a:fld id="{5BCAD085-E8A6-8845-BD4E-CB4CCA059FC4}" type="datetimeFigureOut">
               <a:rPr lang="en-US" smtClean="0"/>
-              <a:t>1/27/13</a:t>
+              <a:t>5/2/26</a:t>
             </a:fld>
             <a:endParaRPr lang="en-US"/>
           </a:p>
@@ -5125,10 +5149,9 @@
           </a:lstStyle>
           <a:p>
             <a:r>
-              <a:rPr lang="en-US" smtClean="0"/>
+              <a:rPr lang="en-US"/>
               <a:t>Click to edit Master title style</a:t>
             </a:r>
-            <a:endParaRPr lang="en-US"/>
           </a:p>
         </p:txBody>
       </p:sp>
@@ -5191,7 +5214,7 @@
           <a:p>
             <a:pPr lvl="0"/>
             <a:r>
-              <a:rPr lang="en-US" smtClean="0"/>
+              <a:rPr lang="en-US"/>
               <a:t>Click to edit Master text styles</a:t>
             </a:r>
           </a:p>
@@ -5247,38 +5270,37 @@
           <a:p>
             <a:pPr lvl="0"/>
             <a:r>
-              <a:rPr lang="en-US" smtClean="0"/>
+              <a:rPr lang="en-US"/>
               <a:t>Click to edit Master text styles</a:t>
             </a:r>
           </a:p>
           <a:p>
             <a:pPr lvl="1"/>
             <a:r>
-              <a:rPr lang="en-US" smtClean="0"/>
+              <a:rPr lang="en-US"/>
               <a:t>Second level</a:t>
             </a:r>
           </a:p>
           <a:p>
             <a:pPr lvl="2"/>
             <a:r>
-              <a:rPr lang="en-US" smtClean="0"/>
+              <a:rPr lang="en-US"/>
               <a:t>Third level</a:t>
             </a:r>
           </a:p>
           <a:p>
             <a:pPr lvl="3"/>
             <a:r>
-              <a:rPr lang="en-US" smtClean="0"/>
+              <a:rPr lang="en-US"/>
               <a:t>Fourth level</a:t>
             </a:r>
           </a:p>
           <a:p>
             <a:pPr lvl="4"/>
             <a:r>
-              <a:rPr lang="en-US" smtClean="0"/>
+              <a:rPr lang="en-US"/>
               <a:t>Fifth level</a:t>
             </a:r>
-            <a:endParaRPr lang="en-US"/>
           </a:p>
         </p:txBody>
       </p:sp>
@@ -5341,7 +5363,7 @@
           <a:p>
             <a:pPr lvl="0"/>
             <a:r>
-              <a:rPr lang="en-US" smtClean="0"/>
+              <a:rPr lang="en-US"/>
               <a:t>Click to edit Master text styles</a:t>
             </a:r>
           </a:p>
@@ -5397,38 +5419,37 @@
           <a:p>
             <a:pPr lvl="0"/>
             <a:r>
-              <a:rPr lang="en-US" smtClean="0"/>
+              <a:rPr lang="en-US"/>
               <a:t>Click to edit Master text styles</a:t>
             </a:r>
           </a:p>
           <a:p>
             <a:pPr lvl="1"/>
             <a:r>
-              <a:rPr lang="en-US" smtClean="0"/>
+              <a:rPr lang="en-US"/>
               <a:t>Second level</a:t>
             </a:r>
           </a:p>
           <a:p>
             <a:pPr lvl="2"/>
             <a:r>
-              <a:rPr lang="en-US" smtClean="0"/>
+              <a:rPr lang="en-US"/>
               <a:t>Third level</a:t>
             </a:r>
           </a:p>
           <a:p>
             <a:pPr lvl="3"/>
             <a:r>
-              <a:rPr lang="en-US" smtClean="0"/>
+              <a:rPr lang="en-US"/>
               <a:t>Fourth level</a:t>
             </a:r>
           </a:p>
           <a:p>
             <a:pPr lvl="4"/>
             <a:r>
-              <a:rPr lang="en-US" smtClean="0"/>
+              <a:rPr lang="en-US"/>
               <a:t>Fifth level</a:t>
             </a:r>
-            <a:endParaRPr lang="en-US"/>
           </a:p>
         </p:txBody>
       </p:sp>
@@ -5449,7 +5470,7 @@
           <a:p>
             <a:fld id="{5BCAD085-E8A6-8845-BD4E-CB4CCA059FC4}" type="datetimeFigureOut">
               <a:rPr lang="en-US" smtClean="0"/>
-              <a:t>1/27/13</a:t>
+              <a:t>5/2/26</a:t>
             </a:fld>
             <a:endParaRPr lang="en-US"/>
           </a:p>
@@ -5543,10 +5564,9 @@
           <a:lstStyle/>
           <a:p>
             <a:r>
-              <a:rPr lang="en-US" smtClean="0"/>
+              <a:rPr lang="en-US"/>
               <a:t>Click to edit Master title style</a:t>
             </a:r>
-            <a:endParaRPr lang="en-US"/>
           </a:p>
         </p:txBody>
       </p:sp>
@@ -5567,7 +5587,7 @@
           <a:p>
             <a:fld id="{5BCAD085-E8A6-8845-BD4E-CB4CCA059FC4}" type="datetimeFigureOut">
               <a:rPr lang="en-US" smtClean="0"/>
-              <a:t>1/27/13</a:t>
+              <a:t>5/2/26</a:t>
             </a:fld>
             <a:endParaRPr lang="en-US"/>
           </a:p>
@@ -5662,7 +5682,7 @@
           <a:p>
             <a:fld id="{5BCAD085-E8A6-8845-BD4E-CB4CCA059FC4}" type="datetimeFigureOut">
               <a:rPr lang="en-US" smtClean="0"/>
-              <a:t>1/27/13</a:t>
+              <a:t>5/2/26</a:t>
             </a:fld>
             <a:endParaRPr lang="en-US"/>
           </a:p>
@@ -5765,10 +5785,9 @@
           </a:lstStyle>
           <a:p>
             <a:r>
-              <a:rPr lang="en-US" smtClean="0"/>
+              <a:rPr lang="en-US"/>
               <a:t>Click to edit Master title style</a:t>
             </a:r>
-            <a:endParaRPr lang="en-US"/>
           </a:p>
         </p:txBody>
       </p:sp>
@@ -5822,38 +5841,37 @@
           <a:p>
             <a:pPr lvl="0"/>
             <a:r>
-              <a:rPr lang="en-US" smtClean="0"/>
+              <a:rPr lang="en-US"/>
               <a:t>Click to edit Master text styles</a:t>
             </a:r>
           </a:p>
           <a:p>
             <a:pPr lvl="1"/>
             <a:r>
-              <a:rPr lang="en-US" smtClean="0"/>
+              <a:rPr lang="en-US"/>
               <a:t>Second level</a:t>
             </a:r>
           </a:p>
           <a:p>
             <a:pPr lvl="2"/>
             <a:r>
-              <a:rPr lang="en-US" smtClean="0"/>
+              <a:rPr lang="en-US"/>
               <a:t>Third level</a:t>
             </a:r>
           </a:p>
           <a:p>
             <a:pPr lvl="3"/>
             <a:r>
-              <a:rPr lang="en-US" smtClean="0"/>
+              <a:rPr lang="en-US"/>
               <a:t>Fourth level</a:t>
             </a:r>
           </a:p>
           <a:p>
             <a:pPr lvl="4"/>
             <a:r>
-              <a:rPr lang="en-US" smtClean="0"/>
+              <a:rPr lang="en-US"/>
               <a:t>Fifth level</a:t>
             </a:r>
-            <a:endParaRPr lang="en-US"/>
           </a:p>
         </p:txBody>
       </p:sp>
@@ -5916,7 +5934,7 @@
           <a:p>
             <a:pPr lvl="0"/>
             <a:r>
-              <a:rPr lang="en-US" smtClean="0"/>
+              <a:rPr lang="en-US"/>
               <a:t>Click to edit Master text styles</a:t>
             </a:r>
           </a:p>
@@ -5939,7 +5957,7 @@
           <a:p>
             <a:fld id="{5BCAD085-E8A6-8845-BD4E-CB4CCA059FC4}" type="datetimeFigureOut">
               <a:rPr lang="en-US" smtClean="0"/>
-              <a:t>1/27/13</a:t>
+              <a:t>5/2/26</a:t>
             </a:fld>
             <a:endParaRPr lang="en-US"/>
           </a:p>
@@ -6042,10 +6060,9 @@
           </a:lstStyle>
           <a:p>
             <a:r>
-              <a:rPr lang="en-US" smtClean="0"/>
+              <a:rPr lang="en-US"/>
               <a:t>Click to edit Master title style</a:t>
             </a:r>
-            <a:endParaRPr lang="en-US"/>
           </a:p>
         </p:txBody>
       </p:sp>
@@ -6169,7 +6186,7 @@
           <a:p>
             <a:pPr lvl="0"/>
             <a:r>
-              <a:rPr lang="en-US" smtClean="0"/>
+              <a:rPr lang="en-US"/>
               <a:t>Click to edit Master text styles</a:t>
             </a:r>
           </a:p>
@@ -6192,7 +6209,7 @@
           <a:p>
             <a:fld id="{5BCAD085-E8A6-8845-BD4E-CB4CCA059FC4}" type="datetimeFigureOut">
               <a:rPr lang="en-US" smtClean="0"/>
-              <a:t>1/27/13</a:t>
+              <a:t>5/2/26</a:t>
             </a:fld>
             <a:endParaRPr lang="en-US"/>
           </a:p>
@@ -6301,10 +6318,9 @@
           <a:lstStyle/>
           <a:p>
             <a:r>
-              <a:rPr lang="en-US" smtClean="0"/>
+              <a:rPr lang="en-US"/>
               <a:t>Click to edit Master title style</a:t>
             </a:r>
-            <a:endParaRPr lang="en-US"/>
           </a:p>
         </p:txBody>
       </p:sp>
@@ -6335,38 +6351,37 @@
           <a:p>
             <a:pPr lvl="0"/>
             <a:r>
-              <a:rPr lang="en-US" smtClean="0"/>
+              <a:rPr lang="en-US"/>
               <a:t>Click to edit Master text styles</a:t>
             </a:r>
           </a:p>
           <a:p>
             <a:pPr lvl="1"/>
             <a:r>
-              <a:rPr lang="en-US" smtClean="0"/>
+              <a:rPr lang="en-US"/>
               <a:t>Second level</a:t>
             </a:r>
           </a:p>
           <a:p>
             <a:pPr lvl="2"/>
             <a:r>
-              <a:rPr lang="en-US" smtClean="0"/>
+              <a:rPr lang="en-US"/>
               <a:t>Third level</a:t>
             </a:r>
           </a:p>
           <a:p>
             <a:pPr lvl="3"/>
             <a:r>
-              <a:rPr lang="en-US" smtClean="0"/>
+              <a:rPr lang="en-US"/>
               <a:t>Fourth level</a:t>
             </a:r>
           </a:p>
           <a:p>
             <a:pPr lvl="4"/>
             <a:r>
-              <a:rPr lang="en-US" smtClean="0"/>
+              <a:rPr lang="en-US"/>
               <a:t>Fifth level</a:t>
             </a:r>
-            <a:endParaRPr lang="en-US"/>
           </a:p>
         </p:txBody>
       </p:sp>
@@ -6405,7 +6420,7 @@
           <a:p>
             <a:fld id="{5BCAD085-E8A6-8845-BD4E-CB4CCA059FC4}" type="datetimeFigureOut">
               <a:rPr lang="en-US" smtClean="0"/>
-              <a:t>1/27/13</a:t>
+              <a:t>5/2/26</a:t>
             </a:fld>
             <a:endParaRPr lang="en-US"/>
           </a:p>
@@ -6764,7 +6779,7 @@
 </file>
 
 <file path=ppt/slides/slide1.xml><?xml version="1.0" encoding="utf-8"?>
-<p:sld xmlns:a="http://schemas.openxmlformats.org/drawingml/2006/main" xmlns:p="http://schemas.openxmlformats.org/presentationml/2006/main" xmlns:r="http://schemas.openxmlformats.org/officeDocument/2006/relationships">
+<p:sld xmlns:a="http://schemas.openxmlformats.org/drawingml/2006/main" xmlns:r="http://schemas.openxmlformats.org/officeDocument/2006/relationships" xmlns:p="http://schemas.openxmlformats.org/presentationml/2006/main">
   <p:cSld>
     <p:spTree>
       <p:nvGrpSpPr>
@@ -6772,7 +6787,14 @@
         <p:cNvGrpSpPr/>
         <p:nvPr/>
       </p:nvGrpSpPr>
-      <p:grpSpPr/>
+      <p:grpSpPr>
+        <a:xfrm>
+          <a:off x="0" y="0"/>
+          <a:ext cx="0" cy="0"/>
+          <a:chOff x="0" y="0"/>
+          <a:chExt cx="0" cy="0"/>
+        </a:xfrm>
+      </p:grpSpPr>
       <p:sp>
         <p:nvSpPr>
           <p:cNvPr id="2" name="Rectangle 1"/>
@@ -6781,7 +6803,7 @@
         </p:nvSpPr>
         <p:spPr>
           <a:xfrm>
-            <a:off x="0" y="0"/>
+            <a:off x="0" y="161364"/>
             <a:ext cx="12191695" cy="6858000"/>
           </a:xfrm>
           <a:prstGeom prst="rect">
@@ -6814,6 +6836,7 @@
           <a:lstStyle/>
           <a:p>
             <a:pPr algn="ctr"/>
+            <a:endParaRPr/>
           </a:p>
         </p:txBody>
       </p:sp>
@@ -6858,6 +6881,7 @@
           <a:lstStyle/>
           <a:p>
             <a:pPr algn="ctr"/>
+            <a:endParaRPr/>
           </a:p>
         </p:txBody>
       </p:sp>
@@ -6870,7 +6894,7 @@
           <p:nvPr/>
         </p:nvPicPr>
         <p:blipFill>
-          <a:blip r:embed="rId2"/>
+          <a:blip r:embed="rId3"/>
           <a:stretch>
             <a:fillRect/>
           </a:stretch>
@@ -6928,8 +6952,8 @@
         </p:nvSpPr>
         <p:spPr>
           <a:xfrm>
-            <a:off x="457200" y="4114800"/>
-            <a:ext cx="11247120" cy="640080"/>
+            <a:off x="3791191" y="4114800"/>
+            <a:ext cx="4579138" cy="461665"/>
           </a:xfrm>
           <a:prstGeom prst="rect">
             <a:avLst/>
@@ -6944,13 +6968,13 @@
           <a:p>
             <a:pPr algn="ctr"/>
             <a:r>
-              <a:rPr sz="2400">
+              <a:rPr sz="2400" dirty="0">
                 <a:solidFill>
                   <a:srgbClr val="6B7280"/>
                 </a:solidFill>
                 <a:latin typeface="Calibri"/>
               </a:rPr>
-              <a:t>ICS 410 — Programming Languages   |   Spring 2026</a:t>
+              <a:t>ICS 410 — Programming Languages</a:t>
             </a:r>
           </a:p>
         </p:txBody>
@@ -6963,8 +6987,8 @@
         </p:nvSpPr>
         <p:spPr>
           <a:xfrm>
-            <a:off x="457200" y="4937760"/>
-            <a:ext cx="11247120" cy="457200"/>
+            <a:off x="826258" y="4937760"/>
+            <a:ext cx="10509032" cy="369332"/>
           </a:xfrm>
           <a:prstGeom prst="rect">
             <a:avLst/>
@@ -6979,49 +7003,65 @@
           <a:p>
             <a:pPr algn="ctr"/>
             <a:r>
-              <a:rPr sz="1800" i="1">
+              <a:rPr sz="1800" i="1" dirty="0">
                 <a:solidFill>
                   <a:srgbClr val="6B7280"/>
                 </a:solidFill>
                 <a:latin typeface="Calibri"/>
               </a:rPr>
-              <a:t>Produced by [Team Member 1], [Team Member 2], [Team Member 3]</a:t>
-            </a:r>
-          </a:p>
-        </p:txBody>
-      </p:sp>
-      <p:sp>
-        <p:nvSpPr>
-          <p:cNvPr id="8" name="TextBox 7"/>
-          <p:cNvSpPr txBox="1"/>
-          <p:nvPr/>
-        </p:nvSpPr>
-        <p:spPr>
-          <a:xfrm>
-            <a:off x="457200" y="5486400"/>
-            <a:ext cx="11247120" cy="457200"/>
-          </a:xfrm>
-          <a:prstGeom prst="rect">
-            <a:avLst/>
-          </a:prstGeom>
-          <a:noFill/>
-        </p:spPr>
-        <p:txBody>
-          <a:bodyPr wrap="none">
-            <a:spAutoFit/>
-          </a:bodyPr>
-          <a:lstStyle/>
-          <a:p>
-            <a:pPr algn="ctr"/>
-            <a:r>
-              <a:rPr sz="1400">
+              <a:t>Produced by </a:t>
+            </a:r>
+            <a:r>
+              <a:rPr lang="en-US" sz="1800" i="1" dirty="0">
                 <a:solidFill>
                   <a:srgbClr val="6B7280"/>
                 </a:solidFill>
                 <a:latin typeface="Calibri"/>
               </a:rPr>
-              <a:t>Slides CC BY 4.0  •  Code MIT  •  Companion repo: &lt;repo-link-placeholder&gt;</a:t>
-            </a:r>
+              <a:t>Alhussain Yamani – 202173530</a:t>
+            </a:r>
+            <a:r>
+              <a:rPr sz="1800" i="1" dirty="0">
+                <a:solidFill>
+                  <a:srgbClr val="6B7280"/>
+                </a:solidFill>
+                <a:latin typeface="Calibri"/>
+              </a:rPr>
+              <a:t>, </a:t>
+            </a:r>
+            <a:r>
+              <a:rPr lang="en-US" sz="1800" i="1" dirty="0">
+                <a:solidFill>
+                  <a:srgbClr val="6B7280"/>
+                </a:solidFill>
+                <a:latin typeface="Calibri"/>
+              </a:rPr>
+              <a:t>Abdulaziz Alarifi - 202158910</a:t>
+            </a:r>
+            <a:r>
+              <a:rPr sz="1800" i="1" dirty="0">
+                <a:solidFill>
+                  <a:srgbClr val="6B7280"/>
+                </a:solidFill>
+                <a:latin typeface="Calibri"/>
+              </a:rPr>
+              <a:t>, </a:t>
+            </a:r>
+            <a:r>
+              <a:rPr lang="en-US" sz="1800" i="1" dirty="0">
+                <a:solidFill>
+                  <a:srgbClr val="6B7280"/>
+                </a:solidFill>
+                <a:latin typeface="Calibri"/>
+              </a:rPr>
+              <a:t>Mohammed Murtada - 202152970</a:t>
+            </a:r>
+            <a:endParaRPr sz="1800" i="1" dirty="0">
+              <a:solidFill>
+                <a:srgbClr val="6B7280"/>
+              </a:solidFill>
+              <a:latin typeface="Calibri"/>
+            </a:endParaRPr>
           </a:p>
         </p:txBody>
       </p:sp>
@@ -7104,7 +7144,7 @@
 </file>
 
 <file path=ppt/slides/slide10.xml><?xml version="1.0" encoding="utf-8"?>
-<p:sld xmlns:a="http://schemas.openxmlformats.org/drawingml/2006/main" xmlns:p="http://schemas.openxmlformats.org/presentationml/2006/main" xmlns:r="http://schemas.openxmlformats.org/officeDocument/2006/relationships">
+<p:sld xmlns:a="http://schemas.openxmlformats.org/drawingml/2006/main" xmlns:r="http://schemas.openxmlformats.org/officeDocument/2006/relationships" xmlns:p="http://schemas.openxmlformats.org/presentationml/2006/main">
   <p:cSld>
     <p:spTree>
       <p:nvGrpSpPr>
@@ -7112,7 +7152,14 @@
         <p:cNvGrpSpPr/>
         <p:nvPr/>
       </p:nvGrpSpPr>
-      <p:grpSpPr/>
+      <p:grpSpPr>
+        <a:xfrm>
+          <a:off x="0" y="0"/>
+          <a:ext cx="0" cy="0"/>
+          <a:chOff x="0" y="0"/>
+          <a:chExt cx="0" cy="0"/>
+        </a:xfrm>
+      </p:grpSpPr>
       <p:sp>
         <p:nvSpPr>
           <p:cNvPr id="2" name="Rectangle 1"/>
@@ -7154,6 +7201,7 @@
           <a:lstStyle/>
           <a:p>
             <a:pPr algn="ctr"/>
+            <a:endParaRPr/>
           </a:p>
         </p:txBody>
       </p:sp>
@@ -7320,7 +7368,7 @@
           <p:nvPr/>
         </p:nvPicPr>
         <p:blipFill>
-          <a:blip r:embed="rId2"/>
+          <a:blip r:embed="rId3"/>
           <a:stretch>
             <a:fillRect/>
           </a:stretch>
@@ -7414,7 +7462,7 @@
 </file>
 
 <file path=ppt/slides/slide11.xml><?xml version="1.0" encoding="utf-8"?>
-<p:sld xmlns:a="http://schemas.openxmlformats.org/drawingml/2006/main" xmlns:p="http://schemas.openxmlformats.org/presentationml/2006/main" xmlns:r="http://schemas.openxmlformats.org/officeDocument/2006/relationships">
+<p:sld xmlns:a="http://schemas.openxmlformats.org/drawingml/2006/main" xmlns:r="http://schemas.openxmlformats.org/officeDocument/2006/relationships" xmlns:p="http://schemas.openxmlformats.org/presentationml/2006/main">
   <p:cSld>
     <p:spTree>
       <p:nvGrpSpPr>
@@ -7422,7 +7470,14 @@
         <p:cNvGrpSpPr/>
         <p:nvPr/>
       </p:nvGrpSpPr>
-      <p:grpSpPr/>
+      <p:grpSpPr>
+        <a:xfrm>
+          <a:off x="0" y="0"/>
+          <a:ext cx="0" cy="0"/>
+          <a:chOff x="0" y="0"/>
+          <a:chExt cx="0" cy="0"/>
+        </a:xfrm>
+      </p:grpSpPr>
       <p:sp>
         <p:nvSpPr>
           <p:cNvPr id="2" name="Rectangle 1"/>
@@ -7464,6 +7519,7 @@
           <a:lstStyle/>
           <a:p>
             <a:pPr algn="ctr"/>
+            <a:endParaRPr/>
           </a:p>
         </p:txBody>
       </p:sp>
@@ -7664,6 +7720,7 @@
           <a:lstStyle/>
           <a:p>
             <a:pPr algn="ctr"/>
+            <a:endParaRPr/>
           </a:p>
         </p:txBody>
       </p:sp>
@@ -7710,124 +7767,79 @@
                 </a:solidFill>
                 <a:latin typeface="Menlo"/>
               </a:rPr>
+              <a:t> n </a:t>
+            </a:r>
+            <a:r>
+              <a:rPr sz="1400">
+                <a:solidFill>
+                  <a:srgbClr val="4A4A4A"/>
+                </a:solidFill>
+                <a:latin typeface="Menlo"/>
+              </a:rPr>
+              <a:t>=</a:t>
+            </a:r>
+            <a:r>
+              <a:rPr sz="1400">
+                <a:solidFill>
+                  <a:srgbClr val="24292E"/>
+                </a:solidFill>
+                <a:latin typeface="Menlo"/>
+              </a:rPr>
               <a:t> </a:t>
             </a:r>
             <a:r>
               <a:rPr sz="1400">
                 <a:solidFill>
+                  <a:srgbClr val="0766C2"/>
+                </a:solidFill>
+                <a:latin typeface="Menlo"/>
+              </a:rPr>
+              <a:t>int</a:t>
+            </a:r>
+            <a:r>
+              <a:rPr sz="1400">
+                <a:solidFill>
+                  <a:srgbClr val="4A4A4A"/>
+                </a:solidFill>
+                <a:latin typeface="Menlo"/>
+              </a:rPr>
+              <a:t>.</a:t>
+            </a:r>
+            <a:r>
+              <a:rPr sz="1400">
+                <a:solidFill>
                   <a:srgbClr val="24292E"/>
                 </a:solidFill>
                 <a:latin typeface="Menlo"/>
               </a:rPr>
-              <a:t>n</a:t>
+              <a:t>parse</a:t>
             </a:r>
             <a:r>
               <a:rPr sz="1400">
                 <a:solidFill>
-                  <a:srgbClr val="24292E"/>
+                  <a:srgbClr val="4A4A4A"/>
                 </a:solidFill>
                 <a:latin typeface="Menlo"/>
               </a:rPr>
-              <a:t> </a:t>
+              <a:t>(</a:t>
             </a:r>
             <a:r>
               <a:rPr sz="1400">
                 <a:solidFill>
+                  <a:srgbClr val="038837"/>
+                </a:solidFill>
+                <a:latin typeface="Menlo"/>
+              </a:rPr>
+              <a:t>'42'</a:t>
+            </a:r>
+            <a:r>
+              <a:rPr sz="1400">
+                <a:solidFill>
                   <a:srgbClr val="4A4A4A"/>
                 </a:solidFill>
                 <a:latin typeface="Menlo"/>
               </a:rPr>
-              <a:t>=</a:t>
-            </a:r>
-            <a:r>
-              <a:rPr sz="1400">
-                <a:solidFill>
-                  <a:srgbClr val="24292E"/>
-                </a:solidFill>
-                <a:latin typeface="Menlo"/>
-              </a:rPr>
-              <a:t> </a:t>
-            </a:r>
-            <a:r>
-              <a:rPr sz="1400">
-                <a:solidFill>
-                  <a:srgbClr val="0766C2"/>
-                </a:solidFill>
-                <a:latin typeface="Menlo"/>
-              </a:rPr>
-              <a:t>int</a:t>
-            </a:r>
-            <a:r>
-              <a:rPr sz="1400">
-                <a:solidFill>
-                  <a:srgbClr val="4A4A4A"/>
-                </a:solidFill>
-                <a:latin typeface="Menlo"/>
-              </a:rPr>
-              <a:t>.</a:t>
-            </a:r>
-            <a:r>
-              <a:rPr sz="1400">
-                <a:solidFill>
-                  <a:srgbClr val="24292E"/>
-                </a:solidFill>
-                <a:latin typeface="Menlo"/>
-              </a:rPr>
-              <a:t>parse</a:t>
-            </a:r>
-            <a:r>
-              <a:rPr sz="1400">
-                <a:solidFill>
-                  <a:srgbClr val="4A4A4A"/>
-                </a:solidFill>
-                <a:latin typeface="Menlo"/>
-              </a:rPr>
-              <a:t>(</a:t>
-            </a:r>
-            <a:r>
-              <a:rPr sz="1400">
-                <a:solidFill>
-                  <a:srgbClr val="038837"/>
-                </a:solidFill>
-                <a:latin typeface="Menlo"/>
-              </a:rPr>
-              <a:t>'</a:t>
-            </a:r>
-            <a:r>
-              <a:rPr sz="1400">
-                <a:solidFill>
-                  <a:srgbClr val="038837"/>
-                </a:solidFill>
-                <a:latin typeface="Menlo"/>
-              </a:rPr>
-              <a:t>42</a:t>
-            </a:r>
-            <a:r>
-              <a:rPr sz="1400">
-                <a:solidFill>
-                  <a:srgbClr val="038837"/>
-                </a:solidFill>
-                <a:latin typeface="Menlo"/>
-              </a:rPr>
-              <a:t>'</a:t>
-            </a:r>
-            <a:r>
-              <a:rPr sz="1400">
-                <a:solidFill>
-                  <a:srgbClr val="4A4A4A"/>
-                </a:solidFill>
-                <a:latin typeface="Menlo"/>
-              </a:rPr>
-              <a:t>)</a:t>
-            </a:r>
-            <a:r>
-              <a:rPr sz="1400">
-                <a:solidFill>
-                  <a:srgbClr val="4A4A4A"/>
-                </a:solidFill>
-                <a:latin typeface="Menlo"/>
-              </a:rPr>
-              <a:t>;</a:t>
+              <a:t>);</a:t>
             </a:r>
           </a:p>
           <a:p>
@@ -7870,25 +7882,34 @@
                 </a:solidFill>
                 <a:latin typeface="Menlo"/>
               </a:rPr>
-              <a:t>animal</a:t>
+              <a:t>animal </a:t>
             </a:r>
             <a:r>
               <a:rPr sz="1400">
                 <a:solidFill>
+                  <a:srgbClr val="0766C2"/>
+                </a:solidFill>
+                <a:latin typeface="Menlo"/>
+              </a:rPr>
+              <a:t>is</a:t>
+            </a:r>
+            <a:r>
+              <a:rPr sz="1400">
+                <a:solidFill>
                   <a:srgbClr val="24292E"/>
                 </a:solidFill>
                 <a:latin typeface="Menlo"/>
               </a:rPr>
-              <a:t> </a:t>
+              <a:t> Dog</a:t>
             </a:r>
             <a:r>
               <a:rPr sz="1400">
                 <a:solidFill>
-                  <a:srgbClr val="0766C2"/>
+                  <a:srgbClr val="4A4A4A"/>
                 </a:solidFill>
                 <a:latin typeface="Menlo"/>
               </a:rPr>
-              <a:t>is</a:t>
+              <a:t>)</a:t>
             </a:r>
             <a:r>
               <a:rPr sz="1400">
@@ -7897,16 +7918,25 @@
                 </a:solidFill>
                 <a:latin typeface="Menlo"/>
               </a:rPr>
-              <a:t> </a:t>
+              <a:t> animal</a:t>
             </a:r>
             <a:r>
               <a:rPr sz="1400">
                 <a:solidFill>
+                  <a:srgbClr val="4A4A4A"/>
+                </a:solidFill>
+                <a:latin typeface="Menlo"/>
+              </a:rPr>
+              <a:t>.</a:t>
+            </a:r>
+            <a:r>
+              <a:rPr sz="1400">
+                <a:solidFill>
                   <a:srgbClr val="24292E"/>
                 </a:solidFill>
                 <a:latin typeface="Menlo"/>
               </a:rPr>
-              <a:t>Dog</a:t>
+              <a:t>bark</a:t>
             </a:r>
             <a:r>
               <a:rPr sz="1400">
@@ -7915,70 +7945,7 @@
                 </a:solidFill>
                 <a:latin typeface="Menlo"/>
               </a:rPr>
-              <a:t>)</a:t>
-            </a:r>
-            <a:r>
-              <a:rPr sz="1400">
-                <a:solidFill>
-                  <a:srgbClr val="24292E"/>
-                </a:solidFill>
-                <a:latin typeface="Menlo"/>
-              </a:rPr>
-              <a:t> </a:t>
-            </a:r>
-            <a:r>
-              <a:rPr sz="1400">
-                <a:solidFill>
-                  <a:srgbClr val="24292E"/>
-                </a:solidFill>
-                <a:latin typeface="Menlo"/>
-              </a:rPr>
-              <a:t>animal</a:t>
-            </a:r>
-            <a:r>
-              <a:rPr sz="1400">
-                <a:solidFill>
-                  <a:srgbClr val="4A4A4A"/>
-                </a:solidFill>
-                <a:latin typeface="Menlo"/>
-              </a:rPr>
-              <a:t>.</a:t>
-            </a:r>
-            <a:r>
-              <a:rPr sz="1400">
-                <a:solidFill>
-                  <a:srgbClr val="24292E"/>
-                </a:solidFill>
-                <a:latin typeface="Menlo"/>
-              </a:rPr>
-              <a:t>bark</a:t>
-            </a:r>
-            <a:r>
-              <a:rPr sz="1400">
-                <a:solidFill>
-                  <a:srgbClr val="4A4A4A"/>
-                </a:solidFill>
-                <a:latin typeface="Menlo"/>
-              </a:rPr>
-              <a:t>(</a:t>
-            </a:r>
-            <a:r>
-              <a:rPr sz="1400">
-                <a:solidFill>
-                  <a:srgbClr val="4A4A4A"/>
-                </a:solidFill>
-                <a:latin typeface="Menlo"/>
-              </a:rPr>
-              <a:t>)</a:t>
-            </a:r>
-            <a:r>
-              <a:rPr sz="1400">
-                <a:solidFill>
-                  <a:srgbClr val="4A4A4A"/>
-                </a:solidFill>
-                <a:latin typeface="Menlo"/>
-              </a:rPr>
-              <a:t>;</a:t>
+              <a:t>();</a:t>
             </a:r>
             <a:r>
               <a:rPr sz="1400">
@@ -8080,7 +8047,7 @@
 </file>
 
 <file path=ppt/slides/slide12.xml><?xml version="1.0" encoding="utf-8"?>
-<p:sld xmlns:a="http://schemas.openxmlformats.org/drawingml/2006/main" xmlns:p="http://schemas.openxmlformats.org/presentationml/2006/main" xmlns:r="http://schemas.openxmlformats.org/officeDocument/2006/relationships">
+<p:sld xmlns:a="http://schemas.openxmlformats.org/drawingml/2006/main" xmlns:r="http://schemas.openxmlformats.org/officeDocument/2006/relationships" xmlns:p="http://schemas.openxmlformats.org/presentationml/2006/main">
   <p:cSld>
     <p:spTree>
       <p:nvGrpSpPr>
@@ -8088,7 +8055,14 @@
         <p:cNvGrpSpPr/>
         <p:nvPr/>
       </p:nvGrpSpPr>
-      <p:grpSpPr/>
+      <p:grpSpPr>
+        <a:xfrm>
+          <a:off x="0" y="0"/>
+          <a:ext cx="0" cy="0"/>
+          <a:chOff x="0" y="0"/>
+          <a:chExt cx="0" cy="0"/>
+        </a:xfrm>
+      </p:grpSpPr>
       <p:sp>
         <p:nvSpPr>
           <p:cNvPr id="2" name="Rectangle 1"/>
@@ -8130,6 +8104,7 @@
           <a:lstStyle/>
           <a:p>
             <a:pPr algn="ctr"/>
+            <a:endParaRPr/>
           </a:p>
         </p:txBody>
       </p:sp>
@@ -8280,7 +8255,7 @@
           <p:nvPr/>
         </p:nvPicPr>
         <p:blipFill>
-          <a:blip r:embed="rId2"/>
+          <a:blip r:embed="rId3"/>
           <a:stretch>
             <a:fillRect/>
           </a:stretch>
@@ -8374,7 +8349,7 @@
 </file>
 
 <file path=ppt/slides/slide13.xml><?xml version="1.0" encoding="utf-8"?>
-<p:sld xmlns:a="http://schemas.openxmlformats.org/drawingml/2006/main" xmlns:p="http://schemas.openxmlformats.org/presentationml/2006/main" xmlns:r="http://schemas.openxmlformats.org/officeDocument/2006/relationships">
+<p:sld xmlns:a="http://schemas.openxmlformats.org/drawingml/2006/main" xmlns:r="http://schemas.openxmlformats.org/officeDocument/2006/relationships" xmlns:p="http://schemas.openxmlformats.org/presentationml/2006/main">
   <p:cSld>
     <p:spTree>
       <p:nvGrpSpPr>
@@ -8382,7 +8357,14 @@
         <p:cNvGrpSpPr/>
         <p:nvPr/>
       </p:nvGrpSpPr>
-      <p:grpSpPr/>
+      <p:grpSpPr>
+        <a:xfrm>
+          <a:off x="0" y="0"/>
+          <a:ext cx="0" cy="0"/>
+          <a:chOff x="0" y="0"/>
+          <a:chExt cx="0" cy="0"/>
+        </a:xfrm>
+      </p:grpSpPr>
       <p:sp>
         <p:nvSpPr>
           <p:cNvPr id="2" name="Rectangle 1"/>
@@ -8424,6 +8406,7 @@
           <a:lstStyle/>
           <a:p>
             <a:pPr algn="ctr"/>
+            <a:endParaRPr/>
           </a:p>
         </p:txBody>
       </p:sp>
@@ -8468,6 +8451,7 @@
           <a:lstStyle/>
           <a:p>
             <a:pPr algn="ctr"/>
+            <a:endParaRPr/>
           </a:p>
         </p:txBody>
       </p:sp>
@@ -8585,7 +8569,7 @@
 </file>
 
 <file path=ppt/slides/slide14.xml><?xml version="1.0" encoding="utf-8"?>
-<p:sld xmlns:a="http://schemas.openxmlformats.org/drawingml/2006/main" xmlns:p="http://schemas.openxmlformats.org/presentationml/2006/main" xmlns:r="http://schemas.openxmlformats.org/officeDocument/2006/relationships">
+<p:sld xmlns:a="http://schemas.openxmlformats.org/drawingml/2006/main" xmlns:r="http://schemas.openxmlformats.org/officeDocument/2006/relationships" xmlns:p="http://schemas.openxmlformats.org/presentationml/2006/main">
   <p:cSld>
     <p:spTree>
       <p:nvGrpSpPr>
@@ -8593,7 +8577,14 @@
         <p:cNvGrpSpPr/>
         <p:nvPr/>
       </p:nvGrpSpPr>
-      <p:grpSpPr/>
+      <p:grpSpPr>
+        <a:xfrm>
+          <a:off x="0" y="0"/>
+          <a:ext cx="0" cy="0"/>
+          <a:chOff x="0" y="0"/>
+          <a:chExt cx="0" cy="0"/>
+        </a:xfrm>
+      </p:grpSpPr>
       <p:sp>
         <p:nvSpPr>
           <p:cNvPr id="2" name="Rectangle 1"/>
@@ -8635,6 +8626,7 @@
           <a:lstStyle/>
           <a:p>
             <a:pPr algn="ctr"/>
+            <a:endParaRPr/>
           </a:p>
         </p:txBody>
       </p:sp>
@@ -8871,7 +8863,7 @@
 </file>
 
 <file path=ppt/slides/slide15.xml><?xml version="1.0" encoding="utf-8"?>
-<p:sld xmlns:a="http://schemas.openxmlformats.org/drawingml/2006/main" xmlns:p="http://schemas.openxmlformats.org/presentationml/2006/main" xmlns:r="http://schemas.openxmlformats.org/officeDocument/2006/relationships">
+<p:sld xmlns:a="http://schemas.openxmlformats.org/drawingml/2006/main" xmlns:r="http://schemas.openxmlformats.org/officeDocument/2006/relationships" xmlns:p="http://schemas.openxmlformats.org/presentationml/2006/main">
   <p:cSld>
     <p:spTree>
       <p:nvGrpSpPr>
@@ -8879,7 +8871,14 @@
         <p:cNvGrpSpPr/>
         <p:nvPr/>
       </p:nvGrpSpPr>
-      <p:grpSpPr/>
+      <p:grpSpPr>
+        <a:xfrm>
+          <a:off x="0" y="0"/>
+          <a:ext cx="0" cy="0"/>
+          <a:chOff x="0" y="0"/>
+          <a:chExt cx="0" cy="0"/>
+        </a:xfrm>
+      </p:grpSpPr>
       <p:sp>
         <p:nvSpPr>
           <p:cNvPr id="2" name="Rectangle 1"/>
@@ -8921,6 +8920,7 @@
           <a:lstStyle/>
           <a:p>
             <a:pPr algn="ctr"/>
+            <a:endParaRPr/>
           </a:p>
         </p:txBody>
       </p:sp>
@@ -9071,7 +9071,7 @@
           <p:nvPr/>
         </p:nvPicPr>
         <p:blipFill>
-          <a:blip r:embed="rId2"/>
+          <a:blip r:embed="rId3"/>
           <a:stretch>
             <a:fillRect/>
           </a:stretch>
@@ -9165,7 +9165,7 @@
 </file>
 
 <file path=ppt/slides/slide16.xml><?xml version="1.0" encoding="utf-8"?>
-<p:sld xmlns:a="http://schemas.openxmlformats.org/drawingml/2006/main" xmlns:p="http://schemas.openxmlformats.org/presentationml/2006/main" xmlns:r="http://schemas.openxmlformats.org/officeDocument/2006/relationships">
+<p:sld xmlns:a="http://schemas.openxmlformats.org/drawingml/2006/main" xmlns:r="http://schemas.openxmlformats.org/officeDocument/2006/relationships" xmlns:p="http://schemas.openxmlformats.org/presentationml/2006/main">
   <p:cSld>
     <p:spTree>
       <p:nvGrpSpPr>
@@ -9173,7 +9173,14 @@
         <p:cNvGrpSpPr/>
         <p:nvPr/>
       </p:nvGrpSpPr>
-      <p:grpSpPr/>
+      <p:grpSpPr>
+        <a:xfrm>
+          <a:off x="0" y="0"/>
+          <a:ext cx="0" cy="0"/>
+          <a:chOff x="0" y="0"/>
+          <a:chExt cx="0" cy="0"/>
+        </a:xfrm>
+      </p:grpSpPr>
       <p:sp>
         <p:nvSpPr>
           <p:cNvPr id="2" name="Rectangle 1"/>
@@ -9215,6 +9222,7 @@
           <a:lstStyle/>
           <a:p>
             <a:pPr algn="ctr"/>
+            <a:endParaRPr/>
           </a:p>
         </p:txBody>
       </p:sp>
@@ -9365,7 +9373,7 @@
           <p:nvPr/>
         </p:nvPicPr>
         <p:blipFill>
-          <a:blip r:embed="rId2"/>
+          <a:blip r:embed="rId3"/>
           <a:stretch>
             <a:fillRect/>
           </a:stretch>
@@ -9459,7 +9467,7 @@
 </file>
 
 <file path=ppt/slides/slide17.xml><?xml version="1.0" encoding="utf-8"?>
-<p:sld xmlns:a="http://schemas.openxmlformats.org/drawingml/2006/main" xmlns:p="http://schemas.openxmlformats.org/presentationml/2006/main" xmlns:r="http://schemas.openxmlformats.org/officeDocument/2006/relationships">
+<p:sld xmlns:a="http://schemas.openxmlformats.org/drawingml/2006/main" xmlns:r="http://schemas.openxmlformats.org/officeDocument/2006/relationships" xmlns:p="http://schemas.openxmlformats.org/presentationml/2006/main">
   <p:cSld>
     <p:spTree>
       <p:nvGrpSpPr>
@@ -9467,7 +9475,14 @@
         <p:cNvGrpSpPr/>
         <p:nvPr/>
       </p:nvGrpSpPr>
-      <p:grpSpPr/>
+      <p:grpSpPr>
+        <a:xfrm>
+          <a:off x="0" y="0"/>
+          <a:ext cx="0" cy="0"/>
+          <a:chOff x="0" y="0"/>
+          <a:chExt cx="0" cy="0"/>
+        </a:xfrm>
+      </p:grpSpPr>
       <p:sp>
         <p:nvSpPr>
           <p:cNvPr id="2" name="Rectangle 1"/>
@@ -9509,6 +9524,7 @@
           <a:lstStyle/>
           <a:p>
             <a:pPr algn="ctr"/>
+            <a:endParaRPr/>
           </a:p>
         </p:txBody>
       </p:sp>
@@ -9709,6 +9725,7 @@
           <a:lstStyle/>
           <a:p>
             <a:pPr algn="ctr"/>
+            <a:endParaRPr/>
           </a:p>
         </p:txBody>
       </p:sp>
@@ -9755,20 +9772,83 @@
                 </a:solidFill>
                 <a:latin typeface="Menlo"/>
               </a:rPr>
+              <a:t> nums </a:t>
+            </a:r>
+            <a:r>
+              <a:rPr sz="1400">
+                <a:solidFill>
+                  <a:srgbClr val="4A4A4A"/>
+                </a:solidFill>
+                <a:latin typeface="Menlo"/>
+              </a:rPr>
+              <a:t>=</a:t>
+            </a:r>
+            <a:r>
+              <a:rPr sz="1400">
+                <a:solidFill>
+                  <a:srgbClr val="24292E"/>
+                </a:solidFill>
+                <a:latin typeface="Menlo"/>
+              </a:rPr>
               <a:t> </a:t>
             </a:r>
             <a:r>
               <a:rPr sz="1400">
                 <a:solidFill>
+                  <a:srgbClr val="4A4A4A"/>
+                </a:solidFill>
+                <a:latin typeface="Menlo"/>
+              </a:rPr>
+              <a:t>[</a:t>
+            </a:r>
+            <a:r>
+              <a:rPr sz="1400">
+                <a:solidFill>
+                  <a:srgbClr val="E36009"/>
+                </a:solidFill>
+                <a:latin typeface="Menlo"/>
+              </a:rPr>
+              <a:t>1</a:t>
+            </a:r>
+            <a:r>
+              <a:rPr sz="1400">
+                <a:solidFill>
+                  <a:srgbClr val="4A4A4A"/>
+                </a:solidFill>
+                <a:latin typeface="Menlo"/>
+              </a:rPr>
+              <a:t>,</a:t>
+            </a:r>
+            <a:r>
+              <a:rPr sz="1400">
+                <a:solidFill>
                   <a:srgbClr val="24292E"/>
                 </a:solidFill>
                 <a:latin typeface="Menlo"/>
               </a:rPr>
-              <a:t>nums</a:t>
+              <a:t> </a:t>
             </a:r>
             <a:r>
               <a:rPr sz="1400">
                 <a:solidFill>
+                  <a:srgbClr val="E36009"/>
+                </a:solidFill>
+                <a:latin typeface="Menlo"/>
+              </a:rPr>
+              <a:t>2</a:t>
+            </a:r>
+            <a:r>
+              <a:rPr sz="1400">
+                <a:solidFill>
+                  <a:srgbClr val="4A4A4A"/>
+                </a:solidFill>
+                <a:latin typeface="Menlo"/>
+              </a:rPr>
+              <a:t>,</a:t>
+            </a:r>
+            <a:r>
+              <a:rPr sz="1400">
+                <a:solidFill>
                   <a:srgbClr val="24292E"/>
                 </a:solidFill>
                 <a:latin typeface="Menlo"/>
@@ -9778,11 +9858,20 @@
             <a:r>
               <a:rPr sz="1400">
                 <a:solidFill>
+                  <a:srgbClr val="E36009"/>
+                </a:solidFill>
+                <a:latin typeface="Menlo"/>
+              </a:rPr>
+              <a:t>3</a:t>
+            </a:r>
+            <a:r>
+              <a:rPr sz="1400">
+                <a:solidFill>
                   <a:srgbClr val="4A4A4A"/>
                 </a:solidFill>
                 <a:latin typeface="Menlo"/>
               </a:rPr>
-              <a:t>=</a:t>
+              <a:t>].</a:t>
             </a:r>
             <a:r>
               <a:rPr sz="1400">
@@ -9791,6 +9880,42 @@
                 </a:solidFill>
                 <a:latin typeface="Menlo"/>
               </a:rPr>
+              <a:t>map</a:t>
+            </a:r>
+            <a:r>
+              <a:rPr sz="1400">
+                <a:solidFill>
+                  <a:srgbClr val="4A4A4A"/>
+                </a:solidFill>
+                <a:latin typeface="Menlo"/>
+              </a:rPr>
+              <a:t>((</a:t>
+            </a:r>
+            <a:r>
+              <a:rPr sz="1400">
+                <a:solidFill>
+                  <a:srgbClr val="24292E"/>
+                </a:solidFill>
+                <a:latin typeface="Menlo"/>
+              </a:rPr>
+              <a:t>n</a:t>
+            </a:r>
+            <a:r>
+              <a:rPr sz="1400">
+                <a:solidFill>
+                  <a:srgbClr val="4A4A4A"/>
+                </a:solidFill>
+                <a:latin typeface="Menlo"/>
+              </a:rPr>
+              <a:t>)</a:t>
+            </a:r>
+            <a:r>
+              <a:rPr sz="1400">
+                <a:solidFill>
+                  <a:srgbClr val="24292E"/>
+                </a:solidFill>
+                <a:latin typeface="Menlo"/>
+              </a:rPr>
               <a:t> </a:t>
             </a:r>
             <a:r>
@@ -9800,16 +9925,43 @@
                 </a:solidFill>
                 <a:latin typeface="Menlo"/>
               </a:rPr>
-              <a:t>[</a:t>
+              <a:t>=&gt;</a:t>
             </a:r>
             <a:r>
               <a:rPr sz="1400">
                 <a:solidFill>
+                  <a:srgbClr val="24292E"/>
+                </a:solidFill>
+                <a:latin typeface="Menlo"/>
+              </a:rPr>
+              <a:t> n </a:t>
+            </a:r>
+            <a:r>
+              <a:rPr sz="1400">
+                <a:solidFill>
+                  <a:srgbClr val="4A4A4A"/>
+                </a:solidFill>
+                <a:latin typeface="Menlo"/>
+              </a:rPr>
+              <a:t>*</a:t>
+            </a:r>
+            <a:r>
+              <a:rPr sz="1400">
+                <a:solidFill>
+                  <a:srgbClr val="24292E"/>
+                </a:solidFill>
+                <a:latin typeface="Menlo"/>
+              </a:rPr>
+              <a:t> </a:t>
+            </a:r>
+            <a:r>
+              <a:rPr sz="1400">
+                <a:solidFill>
                   <a:srgbClr val="E36009"/>
                 </a:solidFill>
                 <a:latin typeface="Menlo"/>
               </a:rPr>
-              <a:t>1</a:t>
+              <a:t>2</a:t>
             </a:r>
             <a:r>
               <a:rPr sz="1400">
@@ -9818,7 +9970,7 @@
                 </a:solidFill>
                 <a:latin typeface="Menlo"/>
               </a:rPr>
-              <a:t>,</a:t>
+              <a:t>).</a:t>
             </a:r>
             <a:r>
               <a:rPr sz="1400">
@@ -9827,241 +9979,16 @@
                 </a:solidFill>
                 <a:latin typeface="Menlo"/>
               </a:rPr>
-              <a:t> </a:t>
+              <a:t>toList</a:t>
             </a:r>
             <a:r>
               <a:rPr sz="1400">
                 <a:solidFill>
-                  <a:srgbClr val="E36009"/>
+                  <a:srgbClr val="4A4A4A"/>
                 </a:solidFill>
                 <a:latin typeface="Menlo"/>
               </a:rPr>
-              <a:t>2</a:t>
-            </a:r>
-            <a:r>
-              <a:rPr sz="1400">
-                <a:solidFill>
-                  <a:srgbClr val="4A4A4A"/>
-                </a:solidFill>
-                <a:latin typeface="Menlo"/>
-              </a:rPr>
-              <a:t>,</a:t>
-            </a:r>
-            <a:r>
-              <a:rPr sz="1400">
-                <a:solidFill>
-                  <a:srgbClr val="24292E"/>
-                </a:solidFill>
-                <a:latin typeface="Menlo"/>
-              </a:rPr>
-              <a:t> </a:t>
-            </a:r>
-            <a:r>
-              <a:rPr sz="1400">
-                <a:solidFill>
-                  <a:srgbClr val="E36009"/>
-                </a:solidFill>
-                <a:latin typeface="Menlo"/>
-              </a:rPr>
-              <a:t>3</a:t>
-            </a:r>
-            <a:r>
-              <a:rPr sz="1400">
-                <a:solidFill>
-                  <a:srgbClr val="4A4A4A"/>
-                </a:solidFill>
-                <a:latin typeface="Menlo"/>
-              </a:rPr>
-              <a:t>]</a:t>
-            </a:r>
-            <a:r>
-              <a:rPr sz="1400">
-                <a:solidFill>
-                  <a:srgbClr val="4A4A4A"/>
-                </a:solidFill>
-                <a:latin typeface="Menlo"/>
-              </a:rPr>
-              <a:t>.</a:t>
-            </a:r>
-            <a:r>
-              <a:rPr sz="1400">
-                <a:solidFill>
-                  <a:srgbClr val="24292E"/>
-                </a:solidFill>
-                <a:latin typeface="Menlo"/>
-              </a:rPr>
-              <a:t>map</a:t>
-            </a:r>
-            <a:r>
-              <a:rPr sz="1400">
-                <a:solidFill>
-                  <a:srgbClr val="4A4A4A"/>
-                </a:solidFill>
-                <a:latin typeface="Menlo"/>
-              </a:rPr>
-              <a:t>(</a:t>
-            </a:r>
-            <a:r>
-              <a:rPr sz="1400">
-                <a:solidFill>
-                  <a:srgbClr val="4A4A4A"/>
-                </a:solidFill>
-                <a:latin typeface="Menlo"/>
-              </a:rPr>
-              <a:t>(</a:t>
-            </a:r>
-            <a:r>
-              <a:rPr sz="1400">
-                <a:solidFill>
-                  <a:srgbClr val="24292E"/>
-                </a:solidFill>
-                <a:latin typeface="Menlo"/>
-              </a:rPr>
-              <a:t>n</a:t>
-            </a:r>
-            <a:r>
-              <a:rPr sz="1400">
-                <a:solidFill>
-                  <a:srgbClr val="4A4A4A"/>
-                </a:solidFill>
-                <a:latin typeface="Menlo"/>
-              </a:rPr>
-              <a:t>)</a:t>
-            </a:r>
-            <a:r>
-              <a:rPr sz="1400">
-                <a:solidFill>
-                  <a:srgbClr val="24292E"/>
-                </a:solidFill>
-                <a:latin typeface="Menlo"/>
-              </a:rPr>
-              <a:t> </a:t>
-            </a:r>
-            <a:r>
-              <a:rPr sz="1400">
-                <a:solidFill>
-                  <a:srgbClr val="4A4A4A"/>
-                </a:solidFill>
-                <a:latin typeface="Menlo"/>
-              </a:rPr>
-              <a:t>=</a:t>
-            </a:r>
-            <a:r>
-              <a:rPr sz="1400">
-                <a:solidFill>
-                  <a:srgbClr val="4A4A4A"/>
-                </a:solidFill>
-                <a:latin typeface="Menlo"/>
-              </a:rPr>
-              <a:t>&gt;</a:t>
-            </a:r>
-            <a:r>
-              <a:rPr sz="1400">
-                <a:solidFill>
-                  <a:srgbClr val="24292E"/>
-                </a:solidFill>
-                <a:latin typeface="Menlo"/>
-              </a:rPr>
-              <a:t> </a:t>
-            </a:r>
-            <a:r>
-              <a:rPr sz="1400">
-                <a:solidFill>
-                  <a:srgbClr val="24292E"/>
-                </a:solidFill>
-                <a:latin typeface="Menlo"/>
-              </a:rPr>
-              <a:t>n</a:t>
-            </a:r>
-            <a:r>
-              <a:rPr sz="1400">
-                <a:solidFill>
-                  <a:srgbClr val="24292E"/>
-                </a:solidFill>
-                <a:latin typeface="Menlo"/>
-              </a:rPr>
-              <a:t> </a:t>
-            </a:r>
-            <a:r>
-              <a:rPr sz="1400">
-                <a:solidFill>
-                  <a:srgbClr val="4A4A4A"/>
-                </a:solidFill>
-                <a:latin typeface="Menlo"/>
-              </a:rPr>
-              <a:t>*</a:t>
-            </a:r>
-            <a:r>
-              <a:rPr sz="1400">
-                <a:solidFill>
-                  <a:srgbClr val="24292E"/>
-                </a:solidFill>
-                <a:latin typeface="Menlo"/>
-              </a:rPr>
-              <a:t> </a:t>
-            </a:r>
-            <a:r>
-              <a:rPr sz="1400">
-                <a:solidFill>
-                  <a:srgbClr val="E36009"/>
-                </a:solidFill>
-                <a:latin typeface="Menlo"/>
-              </a:rPr>
-              <a:t>2</a:t>
-            </a:r>
-            <a:r>
-              <a:rPr sz="1400">
-                <a:solidFill>
-                  <a:srgbClr val="4A4A4A"/>
-                </a:solidFill>
-                <a:latin typeface="Menlo"/>
-              </a:rPr>
-              <a:t>)</a:t>
-            </a:r>
-            <a:r>
-              <a:rPr sz="1400">
-                <a:solidFill>
-                  <a:srgbClr val="4A4A4A"/>
-                </a:solidFill>
-                <a:latin typeface="Menlo"/>
-              </a:rPr>
-              <a:t>.</a:t>
-            </a:r>
-            <a:r>
-              <a:rPr sz="1400">
-                <a:solidFill>
-                  <a:srgbClr val="24292E"/>
-                </a:solidFill>
-                <a:latin typeface="Menlo"/>
-              </a:rPr>
-              <a:t>toList</a:t>
-            </a:r>
-            <a:r>
-              <a:rPr sz="1400">
-                <a:solidFill>
-                  <a:srgbClr val="4A4A4A"/>
-                </a:solidFill>
-                <a:latin typeface="Menlo"/>
-              </a:rPr>
-              <a:t>(</a:t>
-            </a:r>
-            <a:r>
-              <a:rPr sz="1400">
-                <a:solidFill>
-                  <a:srgbClr val="4A4A4A"/>
-                </a:solidFill>
-                <a:latin typeface="Menlo"/>
-              </a:rPr>
-              <a:t>)</a:t>
-            </a:r>
-            <a:r>
-              <a:rPr sz="1400">
-                <a:solidFill>
-                  <a:srgbClr val="4A4A4A"/>
-                </a:solidFill>
-                <a:latin typeface="Menlo"/>
-              </a:rPr>
-              <a:t>;</a:t>
+              <a:t>();</a:t>
             </a:r>
           </a:p>
         </p:txBody>
@@ -10145,7 +10072,7 @@
 </file>
 
 <file path=ppt/slides/slide18.xml><?xml version="1.0" encoding="utf-8"?>
-<p:sld xmlns:a="http://schemas.openxmlformats.org/drawingml/2006/main" xmlns:p="http://schemas.openxmlformats.org/presentationml/2006/main" xmlns:r="http://schemas.openxmlformats.org/officeDocument/2006/relationships">
+<p:sld xmlns:a="http://schemas.openxmlformats.org/drawingml/2006/main" xmlns:r="http://schemas.openxmlformats.org/officeDocument/2006/relationships" xmlns:p="http://schemas.openxmlformats.org/presentationml/2006/main">
   <p:cSld>
     <p:spTree>
       <p:nvGrpSpPr>
@@ -10153,7 +10080,14 @@
         <p:cNvGrpSpPr/>
         <p:nvPr/>
       </p:nvGrpSpPr>
-      <p:grpSpPr/>
+      <p:grpSpPr>
+        <a:xfrm>
+          <a:off x="0" y="0"/>
+          <a:ext cx="0" cy="0"/>
+          <a:chOff x="0" y="0"/>
+          <a:chExt cx="0" cy="0"/>
+        </a:xfrm>
+      </p:grpSpPr>
       <p:sp>
         <p:nvSpPr>
           <p:cNvPr id="2" name="Rectangle 1"/>
@@ -10195,6 +10129,7 @@
           <a:lstStyle/>
           <a:p>
             <a:pPr algn="ctr"/>
+            <a:endParaRPr/>
           </a:p>
         </p:txBody>
       </p:sp>
@@ -10345,7 +10280,7 @@
           <p:nvPr/>
         </p:nvPicPr>
         <p:blipFill>
-          <a:blip r:embed="rId2"/>
+          <a:blip r:embed="rId3"/>
           <a:stretch>
             <a:fillRect/>
           </a:stretch>
@@ -10439,7 +10374,7 @@
 </file>
 
 <file path=ppt/slides/slide19.xml><?xml version="1.0" encoding="utf-8"?>
-<p:sld xmlns:a="http://schemas.openxmlformats.org/drawingml/2006/main" xmlns:p="http://schemas.openxmlformats.org/presentationml/2006/main" xmlns:r="http://schemas.openxmlformats.org/officeDocument/2006/relationships">
+<p:sld xmlns:a="http://schemas.openxmlformats.org/drawingml/2006/main" xmlns:r="http://schemas.openxmlformats.org/officeDocument/2006/relationships" xmlns:p="http://schemas.openxmlformats.org/presentationml/2006/main">
   <p:cSld>
     <p:spTree>
       <p:nvGrpSpPr>
@@ -10447,7 +10382,14 @@
         <p:cNvGrpSpPr/>
         <p:nvPr/>
       </p:nvGrpSpPr>
-      <p:grpSpPr/>
+      <p:grpSpPr>
+        <a:xfrm>
+          <a:off x="0" y="0"/>
+          <a:ext cx="0" cy="0"/>
+          <a:chOff x="0" y="0"/>
+          <a:chExt cx="0" cy="0"/>
+        </a:xfrm>
+      </p:grpSpPr>
       <p:sp>
         <p:nvSpPr>
           <p:cNvPr id="2" name="Rectangle 1"/>
@@ -10489,6 +10431,7 @@
           <a:lstStyle/>
           <a:p>
             <a:pPr algn="ctr"/>
+            <a:endParaRPr/>
           </a:p>
         </p:txBody>
       </p:sp>
@@ -10533,6 +10476,7 @@
           <a:lstStyle/>
           <a:p>
             <a:pPr algn="ctr"/>
+            <a:endParaRPr/>
           </a:p>
         </p:txBody>
       </p:sp>
@@ -10650,7 +10594,7 @@
 </file>
 
 <file path=ppt/slides/slide2.xml><?xml version="1.0" encoding="utf-8"?>
-<p:sld xmlns:a="http://schemas.openxmlformats.org/drawingml/2006/main" xmlns:p="http://schemas.openxmlformats.org/presentationml/2006/main" xmlns:r="http://schemas.openxmlformats.org/officeDocument/2006/relationships">
+<p:sld xmlns:a="http://schemas.openxmlformats.org/drawingml/2006/main" xmlns:r="http://schemas.openxmlformats.org/officeDocument/2006/relationships" xmlns:p="http://schemas.openxmlformats.org/presentationml/2006/main">
   <p:cSld>
     <p:spTree>
       <p:nvGrpSpPr>
@@ -10658,7 +10602,14 @@
         <p:cNvGrpSpPr/>
         <p:nvPr/>
       </p:nvGrpSpPr>
-      <p:grpSpPr/>
+      <p:grpSpPr>
+        <a:xfrm>
+          <a:off x="0" y="0"/>
+          <a:ext cx="0" cy="0"/>
+          <a:chOff x="0" y="0"/>
+          <a:chExt cx="0" cy="0"/>
+        </a:xfrm>
+      </p:grpSpPr>
       <p:sp>
         <p:nvSpPr>
           <p:cNvPr id="2" name="Rectangle 1"/>
@@ -10700,6 +10651,7 @@
           <a:lstStyle/>
           <a:p>
             <a:pPr algn="ctr"/>
+            <a:endParaRPr/>
           </a:p>
         </p:txBody>
       </p:sp>
@@ -10952,7 +10904,7 @@
 </file>
 
 <file path=ppt/slides/slide20.xml><?xml version="1.0" encoding="utf-8"?>
-<p:sld xmlns:a="http://schemas.openxmlformats.org/drawingml/2006/main" xmlns:p="http://schemas.openxmlformats.org/presentationml/2006/main" xmlns:r="http://schemas.openxmlformats.org/officeDocument/2006/relationships">
+<p:sld xmlns:a="http://schemas.openxmlformats.org/drawingml/2006/main" xmlns:r="http://schemas.openxmlformats.org/officeDocument/2006/relationships" xmlns:p="http://schemas.openxmlformats.org/presentationml/2006/main">
   <p:cSld>
     <p:spTree>
       <p:nvGrpSpPr>
@@ -10960,7 +10912,14 @@
         <p:cNvGrpSpPr/>
         <p:nvPr/>
       </p:nvGrpSpPr>
-      <p:grpSpPr/>
+      <p:grpSpPr>
+        <a:xfrm>
+          <a:off x="0" y="0"/>
+          <a:ext cx="0" cy="0"/>
+          <a:chOff x="0" y="0"/>
+          <a:chExt cx="0" cy="0"/>
+        </a:xfrm>
+      </p:grpSpPr>
       <p:sp>
         <p:nvSpPr>
           <p:cNvPr id="2" name="Rectangle 1"/>
@@ -11002,6 +10961,7 @@
           <a:lstStyle/>
           <a:p>
             <a:pPr algn="ctr"/>
+            <a:endParaRPr/>
           </a:p>
         </p:txBody>
       </p:sp>
@@ -11222,7 +11182,7 @@
 </file>
 
 <file path=ppt/slides/slide21.xml><?xml version="1.0" encoding="utf-8"?>
-<p:sld xmlns:a="http://schemas.openxmlformats.org/drawingml/2006/main" xmlns:p="http://schemas.openxmlformats.org/presentationml/2006/main" xmlns:r="http://schemas.openxmlformats.org/officeDocument/2006/relationships">
+<p:sld xmlns:a="http://schemas.openxmlformats.org/drawingml/2006/main" xmlns:r="http://schemas.openxmlformats.org/officeDocument/2006/relationships" xmlns:p="http://schemas.openxmlformats.org/presentationml/2006/main">
   <p:cSld>
     <p:spTree>
       <p:nvGrpSpPr>
@@ -11230,7 +11190,14 @@
         <p:cNvGrpSpPr/>
         <p:nvPr/>
       </p:nvGrpSpPr>
-      <p:grpSpPr/>
+      <p:grpSpPr>
+        <a:xfrm>
+          <a:off x="0" y="0"/>
+          <a:ext cx="0" cy="0"/>
+          <a:chOff x="0" y="0"/>
+          <a:chExt cx="0" cy="0"/>
+        </a:xfrm>
+      </p:grpSpPr>
       <p:sp>
         <p:nvSpPr>
           <p:cNvPr id="2" name="Rectangle 1"/>
@@ -11272,6 +11239,7 @@
           <a:lstStyle/>
           <a:p>
             <a:pPr algn="ctr"/>
+            <a:endParaRPr/>
           </a:p>
         </p:txBody>
       </p:sp>
@@ -11422,7 +11390,7 @@
           <p:nvPr/>
         </p:nvPicPr>
         <p:blipFill>
-          <a:blip r:embed="rId2"/>
+          <a:blip r:embed="rId3"/>
           <a:stretch>
             <a:fillRect/>
           </a:stretch>
@@ -11516,7 +11484,7 @@
 </file>
 
 <file path=ppt/slides/slide22.xml><?xml version="1.0" encoding="utf-8"?>
-<p:sld xmlns:a="http://schemas.openxmlformats.org/drawingml/2006/main" xmlns:p="http://schemas.openxmlformats.org/presentationml/2006/main" xmlns:r="http://schemas.openxmlformats.org/officeDocument/2006/relationships">
+<p:sld xmlns:a="http://schemas.openxmlformats.org/drawingml/2006/main" xmlns:r="http://schemas.openxmlformats.org/officeDocument/2006/relationships" xmlns:p="http://schemas.openxmlformats.org/presentationml/2006/main">
   <p:cSld>
     <p:spTree>
       <p:nvGrpSpPr>
@@ -11524,7 +11492,14 @@
         <p:cNvGrpSpPr/>
         <p:nvPr/>
       </p:nvGrpSpPr>
-      <p:grpSpPr/>
+      <p:grpSpPr>
+        <a:xfrm>
+          <a:off x="0" y="0"/>
+          <a:ext cx="0" cy="0"/>
+          <a:chOff x="0" y="0"/>
+          <a:chExt cx="0" cy="0"/>
+        </a:xfrm>
+      </p:grpSpPr>
       <p:sp>
         <p:nvSpPr>
           <p:cNvPr id="2" name="Rectangle 1"/>
@@ -11566,6 +11541,7 @@
           <a:lstStyle/>
           <a:p>
             <a:pPr algn="ctr"/>
+            <a:endParaRPr/>
           </a:p>
         </p:txBody>
       </p:sp>
@@ -11716,7 +11692,7 @@
           <p:nvPr/>
         </p:nvPicPr>
         <p:blipFill>
-          <a:blip r:embed="rId2"/>
+          <a:blip r:embed="rId3"/>
           <a:stretch>
             <a:fillRect/>
           </a:stretch>
@@ -11810,7 +11786,7 @@
 </file>
 
 <file path=ppt/slides/slide23.xml><?xml version="1.0" encoding="utf-8"?>
-<p:sld xmlns:a="http://schemas.openxmlformats.org/drawingml/2006/main" xmlns:p="http://schemas.openxmlformats.org/presentationml/2006/main" xmlns:r="http://schemas.openxmlformats.org/officeDocument/2006/relationships">
+<p:sld xmlns:a="http://schemas.openxmlformats.org/drawingml/2006/main" xmlns:r="http://schemas.openxmlformats.org/officeDocument/2006/relationships" xmlns:p="http://schemas.openxmlformats.org/presentationml/2006/main">
   <p:cSld>
     <p:spTree>
       <p:nvGrpSpPr>
@@ -11818,7 +11794,14 @@
         <p:cNvGrpSpPr/>
         <p:nvPr/>
       </p:nvGrpSpPr>
-      <p:grpSpPr/>
+      <p:grpSpPr>
+        <a:xfrm>
+          <a:off x="0" y="0"/>
+          <a:ext cx="0" cy="0"/>
+          <a:chOff x="0" y="0"/>
+          <a:chExt cx="0" cy="0"/>
+        </a:xfrm>
+      </p:grpSpPr>
       <p:sp>
         <p:nvSpPr>
           <p:cNvPr id="2" name="Rectangle 1"/>
@@ -11860,6 +11843,7 @@
           <a:lstStyle/>
           <a:p>
             <a:pPr algn="ctr"/>
+            <a:endParaRPr/>
           </a:p>
         </p:txBody>
       </p:sp>
@@ -12010,7 +11994,7 @@
           <p:nvPr/>
         </p:nvPicPr>
         <p:blipFill>
-          <a:blip r:embed="rId2"/>
+          <a:blip r:embed="rId3"/>
           <a:stretch>
             <a:fillRect/>
           </a:stretch>
@@ -12104,7 +12088,7 @@
 </file>
 
 <file path=ppt/slides/slide24.xml><?xml version="1.0" encoding="utf-8"?>
-<p:sld xmlns:a="http://schemas.openxmlformats.org/drawingml/2006/main" xmlns:p="http://schemas.openxmlformats.org/presentationml/2006/main" xmlns:r="http://schemas.openxmlformats.org/officeDocument/2006/relationships">
+<p:sld xmlns:a="http://schemas.openxmlformats.org/drawingml/2006/main" xmlns:r="http://schemas.openxmlformats.org/officeDocument/2006/relationships" xmlns:p="http://schemas.openxmlformats.org/presentationml/2006/main">
   <p:cSld>
     <p:spTree>
       <p:nvGrpSpPr>
@@ -12112,7 +12096,14 @@
         <p:cNvGrpSpPr/>
         <p:nvPr/>
       </p:nvGrpSpPr>
-      <p:grpSpPr/>
+      <p:grpSpPr>
+        <a:xfrm>
+          <a:off x="0" y="0"/>
+          <a:ext cx="0" cy="0"/>
+          <a:chOff x="0" y="0"/>
+          <a:chExt cx="0" cy="0"/>
+        </a:xfrm>
+      </p:grpSpPr>
       <p:sp>
         <p:nvSpPr>
           <p:cNvPr id="2" name="Rectangle 1"/>
@@ -12154,6 +12145,7 @@
           <a:lstStyle/>
           <a:p>
             <a:pPr algn="ctr"/>
+            <a:endParaRPr/>
           </a:p>
         </p:txBody>
       </p:sp>
@@ -12198,6 +12190,7 @@
           <a:lstStyle/>
           <a:p>
             <a:pPr algn="ctr"/>
+            <a:endParaRPr/>
           </a:p>
         </p:txBody>
       </p:sp>
@@ -12315,7 +12308,7 @@
 </file>
 
 <file path=ppt/slides/slide25.xml><?xml version="1.0" encoding="utf-8"?>
-<p:sld xmlns:a="http://schemas.openxmlformats.org/drawingml/2006/main" xmlns:p="http://schemas.openxmlformats.org/presentationml/2006/main" xmlns:r="http://schemas.openxmlformats.org/officeDocument/2006/relationships">
+<p:sld xmlns:a="http://schemas.openxmlformats.org/drawingml/2006/main" xmlns:r="http://schemas.openxmlformats.org/officeDocument/2006/relationships" xmlns:p="http://schemas.openxmlformats.org/presentationml/2006/main">
   <p:cSld>
     <p:spTree>
       <p:nvGrpSpPr>
@@ -12323,7 +12316,14 @@
         <p:cNvGrpSpPr/>
         <p:nvPr/>
       </p:nvGrpSpPr>
-      <p:grpSpPr/>
+      <p:grpSpPr>
+        <a:xfrm>
+          <a:off x="0" y="0"/>
+          <a:ext cx="0" cy="0"/>
+          <a:chOff x="0" y="0"/>
+          <a:chExt cx="0" cy="0"/>
+        </a:xfrm>
+      </p:grpSpPr>
       <p:sp>
         <p:nvSpPr>
           <p:cNvPr id="2" name="Rectangle 1"/>
@@ -12365,6 +12365,7 @@
           <a:lstStyle/>
           <a:p>
             <a:pPr algn="ctr"/>
+            <a:endParaRPr/>
           </a:p>
         </p:txBody>
       </p:sp>
@@ -12565,6 +12566,7 @@
           <a:lstStyle/>
           <a:p>
             <a:pPr algn="ctr"/>
+            <a:endParaRPr/>
           </a:p>
         </p:txBody>
       </p:sp>
@@ -12611,25 +12613,7 @@
                 </a:solidFill>
                 <a:latin typeface="Menlo"/>
               </a:rPr>
-              <a:t> </a:t>
-            </a:r>
-            <a:r>
-              <a:rPr sz="1400">
-                <a:solidFill>
-                  <a:srgbClr val="24292E"/>
-                </a:solidFill>
-                <a:latin typeface="Menlo"/>
-              </a:rPr>
-              <a:t>sumOfSquares</a:t>
-            </a:r>
-            <a:r>
-              <a:rPr sz="1400">
-                <a:solidFill>
-                  <a:srgbClr val="24292E"/>
-                </a:solidFill>
-                <a:latin typeface="Menlo"/>
-              </a:rPr>
-              <a:t> </a:t>
+              <a:t> sumOfSquares </a:t>
             </a:r>
             <a:r>
               <a:rPr sz="1400">
@@ -12771,16 +12755,25 @@
                 </a:solidFill>
                 <a:latin typeface="Menlo"/>
               </a:rPr>
-              <a:t>(</a:t>
+              <a:t>((</a:t>
             </a:r>
             <a:r>
               <a:rPr sz="1400">
                 <a:solidFill>
+                  <a:srgbClr val="24292E"/>
+                </a:solidFill>
+                <a:latin typeface="Menlo"/>
+              </a:rPr>
+              <a:t>n</a:t>
+            </a:r>
+            <a:r>
+              <a:rPr sz="1400">
+                <a:solidFill>
                   <a:srgbClr val="4A4A4A"/>
                 </a:solidFill>
                 <a:latin typeface="Menlo"/>
               </a:rPr>
-              <a:t>(</a:t>
+              <a:t>)</a:t>
             </a:r>
             <a:r>
               <a:rPr sz="1400">
@@ -12789,7 +12782,7 @@
                 </a:solidFill>
                 <a:latin typeface="Menlo"/>
               </a:rPr>
-              <a:t>n</a:t>
+              <a:t> </a:t>
             </a:r>
             <a:r>
               <a:rPr sz="1400">
@@ -12798,7 +12791,7 @@
                 </a:solidFill>
                 <a:latin typeface="Menlo"/>
               </a:rPr>
-              <a:t>)</a:t>
+              <a:t>=&gt;</a:t>
             </a:r>
             <a:r>
               <a:rPr sz="1400">
@@ -12807,7 +12800,7 @@
                 </a:solidFill>
                 <a:latin typeface="Menlo"/>
               </a:rPr>
-              <a:t> </a:t>
+              <a:t> n </a:t>
             </a:r>
             <a:r>
               <a:rPr sz="1400">
@@ -12816,70 +12809,16 @@
                 </a:solidFill>
                 <a:latin typeface="Menlo"/>
               </a:rPr>
-              <a:t>=</a:t>
+              <a:t>*</a:t>
             </a:r>
             <a:r>
               <a:rPr sz="1400">
                 <a:solidFill>
-                  <a:srgbClr val="4A4A4A"/>
+                  <a:srgbClr val="24292E"/>
                 </a:solidFill>
                 <a:latin typeface="Menlo"/>
               </a:rPr>
-              <a:t>&gt;</a:t>
-            </a:r>
-            <a:r>
-              <a:rPr sz="1400">
-                <a:solidFill>
-                  <a:srgbClr val="24292E"/>
-                </a:solidFill>
-                <a:latin typeface="Menlo"/>
-              </a:rPr>
-              <a:t> </a:t>
-            </a:r>
-            <a:r>
-              <a:rPr sz="1400">
-                <a:solidFill>
-                  <a:srgbClr val="24292E"/>
-                </a:solidFill>
-                <a:latin typeface="Menlo"/>
-              </a:rPr>
-              <a:t>n</a:t>
-            </a:r>
-            <a:r>
-              <a:rPr sz="1400">
-                <a:solidFill>
-                  <a:srgbClr val="24292E"/>
-                </a:solidFill>
-                <a:latin typeface="Menlo"/>
-              </a:rPr>
-              <a:t> </a:t>
-            </a:r>
-            <a:r>
-              <a:rPr sz="1400">
-                <a:solidFill>
-                  <a:srgbClr val="4A4A4A"/>
-                </a:solidFill>
-                <a:latin typeface="Menlo"/>
-              </a:rPr>
-              <a:t>*</a:t>
-            </a:r>
-            <a:r>
-              <a:rPr sz="1400">
-                <a:solidFill>
-                  <a:srgbClr val="24292E"/>
-                </a:solidFill>
-                <a:latin typeface="Menlo"/>
-              </a:rPr>
-              <a:t> </a:t>
-            </a:r>
-            <a:r>
-              <a:rPr sz="1400">
-                <a:solidFill>
-                  <a:srgbClr val="24292E"/>
-                </a:solidFill>
-                <a:latin typeface="Menlo"/>
-              </a:rPr>
-              <a:t>n</a:t>
+              <a:t> n</a:t>
             </a:r>
             <a:r>
               <a:rPr sz="1400">
@@ -12931,16 +12870,25 @@
                 </a:solidFill>
                 <a:latin typeface="Menlo"/>
               </a:rPr>
-              <a:t>(</a:t>
+              <a:t>((</a:t>
             </a:r>
             <a:r>
               <a:rPr sz="1400">
                 <a:solidFill>
+                  <a:srgbClr val="24292E"/>
+                </a:solidFill>
+                <a:latin typeface="Menlo"/>
+              </a:rPr>
+              <a:t>a</a:t>
+            </a:r>
+            <a:r>
+              <a:rPr sz="1400">
+                <a:solidFill>
                   <a:srgbClr val="4A4A4A"/>
                 </a:solidFill>
                 <a:latin typeface="Menlo"/>
               </a:rPr>
-              <a:t>(</a:t>
+              <a:t>,</a:t>
             </a:r>
             <a:r>
               <a:rPr sz="1400">
@@ -12949,7 +12897,7 @@
                 </a:solidFill>
                 <a:latin typeface="Menlo"/>
               </a:rPr>
-              <a:t>a</a:t>
+              <a:t> b</a:t>
             </a:r>
             <a:r>
               <a:rPr sz="1400">
@@ -12958,7 +12906,7 @@
                 </a:solidFill>
                 <a:latin typeface="Menlo"/>
               </a:rPr>
-              <a:t>,</a:t>
+              <a:t>)</a:t>
             </a:r>
             <a:r>
               <a:rPr sz="1400">
@@ -12972,11 +12920,20 @@
             <a:r>
               <a:rPr sz="1400">
                 <a:solidFill>
+                  <a:srgbClr val="4A4A4A"/>
+                </a:solidFill>
+                <a:latin typeface="Menlo"/>
+              </a:rPr>
+              <a:t>=&gt;</a:t>
+            </a:r>
+            <a:r>
+              <a:rPr sz="1400">
+                <a:solidFill>
                   <a:srgbClr val="24292E"/>
                 </a:solidFill>
                 <a:latin typeface="Menlo"/>
               </a:rPr>
-              <a:t>b</a:t>
+              <a:t> a </a:t>
             </a:r>
             <a:r>
               <a:rPr sz="1400">
@@ -12985,7 +12942,7 @@
                 </a:solidFill>
                 <a:latin typeface="Menlo"/>
               </a:rPr>
-              <a:t>)</a:t>
+              <a:t>+</a:t>
             </a:r>
             <a:r>
               <a:rPr sz="1400">
@@ -12994,7 +12951,7 @@
                 </a:solidFill>
                 <a:latin typeface="Menlo"/>
               </a:rPr>
-              <a:t> </a:t>
+              <a:t> b</a:t>
             </a:r>
             <a:r>
               <a:rPr sz="1400">
@@ -13003,88 +12960,7 @@
                 </a:solidFill>
                 <a:latin typeface="Menlo"/>
               </a:rPr>
-              <a:t>=</a:t>
-            </a:r>
-            <a:r>
-              <a:rPr sz="1400">
-                <a:solidFill>
-                  <a:srgbClr val="4A4A4A"/>
-                </a:solidFill>
-                <a:latin typeface="Menlo"/>
-              </a:rPr>
-              <a:t>&gt;</a:t>
-            </a:r>
-            <a:r>
-              <a:rPr sz="1400">
-                <a:solidFill>
-                  <a:srgbClr val="24292E"/>
-                </a:solidFill>
-                <a:latin typeface="Menlo"/>
-              </a:rPr>
-              <a:t> </a:t>
-            </a:r>
-            <a:r>
-              <a:rPr sz="1400">
-                <a:solidFill>
-                  <a:srgbClr val="24292E"/>
-                </a:solidFill>
-                <a:latin typeface="Menlo"/>
-              </a:rPr>
-              <a:t>a</a:t>
-            </a:r>
-            <a:r>
-              <a:rPr sz="1400">
-                <a:solidFill>
-                  <a:srgbClr val="24292E"/>
-                </a:solidFill>
-                <a:latin typeface="Menlo"/>
-              </a:rPr>
-              <a:t> </a:t>
-            </a:r>
-            <a:r>
-              <a:rPr sz="1400">
-                <a:solidFill>
-                  <a:srgbClr val="4A4A4A"/>
-                </a:solidFill>
-                <a:latin typeface="Menlo"/>
-              </a:rPr>
-              <a:t>+</a:t>
-            </a:r>
-            <a:r>
-              <a:rPr sz="1400">
-                <a:solidFill>
-                  <a:srgbClr val="24292E"/>
-                </a:solidFill>
-                <a:latin typeface="Menlo"/>
-              </a:rPr>
-              <a:t> </a:t>
-            </a:r>
-            <a:r>
-              <a:rPr sz="1400">
-                <a:solidFill>
-                  <a:srgbClr val="24292E"/>
-                </a:solidFill>
-                <a:latin typeface="Menlo"/>
-              </a:rPr>
-              <a:t>b</a:t>
-            </a:r>
-            <a:r>
-              <a:rPr sz="1400">
-                <a:solidFill>
-                  <a:srgbClr val="4A4A4A"/>
-                </a:solidFill>
-                <a:latin typeface="Menlo"/>
-              </a:rPr>
-              <a:t>)</a:t>
-            </a:r>
-            <a:r>
-              <a:rPr sz="1400">
-                <a:solidFill>
-                  <a:srgbClr val="4A4A4A"/>
-                </a:solidFill>
-                <a:latin typeface="Menlo"/>
-              </a:rPr>
-              <a:t>;</a:t>
+              <a:t>);</a:t>
             </a:r>
             <a:r>
               <a:rPr sz="1400">
@@ -13186,7 +13062,7 @@
 </file>
 
 <file path=ppt/slides/slide26.xml><?xml version="1.0" encoding="utf-8"?>
-<p:sld xmlns:a="http://schemas.openxmlformats.org/drawingml/2006/main" xmlns:p="http://schemas.openxmlformats.org/presentationml/2006/main" xmlns:r="http://schemas.openxmlformats.org/officeDocument/2006/relationships">
+<p:sld xmlns:a="http://schemas.openxmlformats.org/drawingml/2006/main" xmlns:r="http://schemas.openxmlformats.org/officeDocument/2006/relationships" xmlns:p="http://schemas.openxmlformats.org/presentationml/2006/main">
   <p:cSld>
     <p:spTree>
       <p:nvGrpSpPr>
@@ -13194,7 +13070,14 @@
         <p:cNvGrpSpPr/>
         <p:nvPr/>
       </p:nvGrpSpPr>
-      <p:grpSpPr/>
+      <p:grpSpPr>
+        <a:xfrm>
+          <a:off x="0" y="0"/>
+          <a:ext cx="0" cy="0"/>
+          <a:chOff x="0" y="0"/>
+          <a:chExt cx="0" cy="0"/>
+        </a:xfrm>
+      </p:grpSpPr>
       <p:sp>
         <p:nvSpPr>
           <p:cNvPr id="2" name="Rectangle 1"/>
@@ -13236,6 +13119,7 @@
           <a:lstStyle/>
           <a:p>
             <a:pPr algn="ctr"/>
+            <a:endParaRPr/>
           </a:p>
         </p:txBody>
       </p:sp>
@@ -13420,6 +13304,7 @@
           <a:lstStyle/>
           <a:p>
             <a:pPr algn="ctr"/>
+            <a:endParaRPr/>
           </a:p>
         </p:txBody>
       </p:sp>
@@ -13493,52 +13378,34 @@
                 </a:solidFill>
                 <a:latin typeface="Menlo"/>
               </a:rPr>
-              <a:t> </a:t>
+              <a:t> evens</a:t>
             </a:r>
             <a:r>
               <a:rPr sz="1400">
                 <a:solidFill>
+                  <a:srgbClr val="4A4A4A"/>
+                </a:solidFill>
+                <a:latin typeface="Menlo"/>
+              </a:rPr>
+              <a:t>(</a:t>
+            </a:r>
+            <a:r>
+              <a:rPr sz="1400">
+                <a:solidFill>
+                  <a:srgbClr val="0766C2"/>
+                </a:solidFill>
+                <a:latin typeface="Menlo"/>
+              </a:rPr>
+              <a:t>int</a:t>
+            </a:r>
+            <a:r>
+              <a:rPr sz="1400">
+                <a:solidFill>
                   <a:srgbClr val="24292E"/>
                 </a:solidFill>
                 <a:latin typeface="Menlo"/>
               </a:rPr>
-              <a:t>evens</a:t>
-            </a:r>
-            <a:r>
-              <a:rPr sz="1400">
-                <a:solidFill>
-                  <a:srgbClr val="4A4A4A"/>
-                </a:solidFill>
-                <a:latin typeface="Menlo"/>
-              </a:rPr>
-              <a:t>(</a:t>
-            </a:r>
-            <a:r>
-              <a:rPr sz="1400">
-                <a:solidFill>
-                  <a:srgbClr val="0766C2"/>
-                </a:solidFill>
-                <a:latin typeface="Menlo"/>
-              </a:rPr>
-              <a:t>int</a:t>
-            </a:r>
-            <a:r>
-              <a:rPr sz="1400">
-                <a:solidFill>
-                  <a:srgbClr val="24292E"/>
-                </a:solidFill>
-                <a:latin typeface="Menlo"/>
-              </a:rPr>
-              <a:t> </a:t>
-            </a:r>
-            <a:r>
-              <a:rPr sz="1400">
-                <a:solidFill>
-                  <a:srgbClr val="24292E"/>
-                </a:solidFill>
-                <a:latin typeface="Menlo"/>
-              </a:rPr>
-              <a:t>n</a:t>
+              <a:t> n</a:t>
             </a:r>
             <a:r>
               <a:rPr sz="1400">
@@ -13653,34 +13520,205 @@
                 </a:solidFill>
                 <a:latin typeface="Menlo"/>
               </a:rPr>
+              <a:t> i </a:t>
+            </a:r>
+            <a:r>
+              <a:rPr sz="1400">
+                <a:solidFill>
+                  <a:srgbClr val="4A4A4A"/>
+                </a:solidFill>
+                <a:latin typeface="Menlo"/>
+              </a:rPr>
+              <a:t>=</a:t>
+            </a:r>
+            <a:r>
+              <a:rPr sz="1400">
+                <a:solidFill>
+                  <a:srgbClr val="24292E"/>
+                </a:solidFill>
+                <a:latin typeface="Menlo"/>
+              </a:rPr>
               <a:t> </a:t>
             </a:r>
             <a:r>
               <a:rPr sz="1400">
                 <a:solidFill>
+                  <a:srgbClr val="E36009"/>
+                </a:solidFill>
+                <a:latin typeface="Menlo"/>
+              </a:rPr>
+              <a:t>0</a:t>
+            </a:r>
+            <a:r>
+              <a:rPr sz="1400">
+                <a:solidFill>
+                  <a:srgbClr val="4A4A4A"/>
+                </a:solidFill>
+                <a:latin typeface="Menlo"/>
+              </a:rPr>
+              <a:t>;</a:t>
+            </a:r>
+            <a:r>
+              <a:rPr sz="1400">
+                <a:solidFill>
                   <a:srgbClr val="24292E"/>
                 </a:solidFill>
                 <a:latin typeface="Menlo"/>
               </a:rPr>
+              <a:t> i </a:t>
+            </a:r>
+            <a:r>
+              <a:rPr sz="1400">
+                <a:solidFill>
+                  <a:srgbClr val="4A4A4A"/>
+                </a:solidFill>
+                <a:latin typeface="Menlo"/>
+              </a:rPr>
+              <a:t>&lt;</a:t>
+            </a:r>
+            <a:r>
+              <a:rPr sz="1400">
+                <a:solidFill>
+                  <a:srgbClr val="24292E"/>
+                </a:solidFill>
+                <a:latin typeface="Menlo"/>
+              </a:rPr>
+              <a:t> n</a:t>
+            </a:r>
+            <a:r>
+              <a:rPr sz="1400">
+                <a:solidFill>
+                  <a:srgbClr val="4A4A4A"/>
+                </a:solidFill>
+                <a:latin typeface="Menlo"/>
+              </a:rPr>
+              <a:t>;</a:t>
+            </a:r>
+            <a:r>
+              <a:rPr sz="1400">
+                <a:solidFill>
+                  <a:srgbClr val="24292E"/>
+                </a:solidFill>
+                <a:latin typeface="Menlo"/>
+              </a:rPr>
+              <a:t> i</a:t>
+            </a:r>
+            <a:r>
+              <a:rPr sz="1400">
+                <a:solidFill>
+                  <a:srgbClr val="4A4A4A"/>
+                </a:solidFill>
+                <a:latin typeface="Menlo"/>
+              </a:rPr>
+              <a:t>++)</a:t>
+            </a:r>
+            <a:r>
+              <a:rPr sz="1400">
+                <a:solidFill>
+                  <a:srgbClr val="24292E"/>
+                </a:solidFill>
+                <a:latin typeface="Menlo"/>
+              </a:rPr>
+              <a:t> </a:t>
+            </a:r>
+            <a:r>
+              <a:rPr sz="1400">
+                <a:solidFill>
+                  <a:srgbClr val="4A4A4A"/>
+                </a:solidFill>
+                <a:latin typeface="Menlo"/>
+              </a:rPr>
+              <a:t>{</a:t>
+            </a:r>
+            <a:r>
+              <a:rPr sz="1400">
+                <a:solidFill>
+                  <a:srgbClr val="24292E"/>
+                </a:solidFill>
+                <a:latin typeface="Menlo"/>
+              </a:rPr>
+              <a:t> </a:t>
+            </a:r>
+            <a:r>
+              <a:rPr sz="1400">
+                <a:solidFill>
+                  <a:srgbClr val="0766C2"/>
+                </a:solidFill>
+                <a:latin typeface="Menlo"/>
+              </a:rPr>
+              <a:t>if</a:t>
+            </a:r>
+            <a:r>
+              <a:rPr sz="1400">
+                <a:solidFill>
+                  <a:srgbClr val="24292E"/>
+                </a:solidFill>
+                <a:latin typeface="Menlo"/>
+              </a:rPr>
+              <a:t> </a:t>
+            </a:r>
+            <a:r>
+              <a:rPr sz="1400">
+                <a:solidFill>
+                  <a:srgbClr val="4A4A4A"/>
+                </a:solidFill>
+                <a:latin typeface="Menlo"/>
+              </a:rPr>
+              <a:t>(</a:t>
+            </a:r>
+            <a:r>
+              <a:rPr sz="1400">
+                <a:solidFill>
+                  <a:srgbClr val="24292E"/>
+                </a:solidFill>
+                <a:latin typeface="Menlo"/>
+              </a:rPr>
               <a:t>i</a:t>
             </a:r>
             <a:r>
               <a:rPr sz="1400">
                 <a:solidFill>
+                  <a:srgbClr val="4A4A4A"/>
+                </a:solidFill>
+                <a:latin typeface="Menlo"/>
+              </a:rPr>
+              <a:t>.</a:t>
+            </a:r>
+            <a:r>
+              <a:rPr sz="1400">
+                <a:solidFill>
                   <a:srgbClr val="24292E"/>
                 </a:solidFill>
                 <a:latin typeface="Menlo"/>
               </a:rPr>
+              <a:t>isEven</a:t>
+            </a:r>
+            <a:r>
+              <a:rPr sz="1400">
+                <a:solidFill>
+                  <a:srgbClr val="4A4A4A"/>
+                </a:solidFill>
+                <a:latin typeface="Menlo"/>
+              </a:rPr>
+              <a:t>)</a:t>
+            </a:r>
+            <a:r>
+              <a:rPr sz="1400">
+                <a:solidFill>
+                  <a:srgbClr val="24292E"/>
+                </a:solidFill>
+                <a:latin typeface="Menlo"/>
+              </a:rPr>
               <a:t> </a:t>
             </a:r>
             <a:r>
               <a:rPr sz="1400">
                 <a:solidFill>
-                  <a:srgbClr val="4A4A4A"/>
+                  <a:srgbClr val="0766C2"/>
                 </a:solidFill>
                 <a:latin typeface="Menlo"/>
               </a:rPr>
-              <a:t>=</a:t>
+              <a:t>yield</a:t>
             </a:r>
             <a:r>
               <a:rPr sz="1400">
@@ -13689,259 +13727,7 @@
                 </a:solidFill>
                 <a:latin typeface="Menlo"/>
               </a:rPr>
-              <a:t> </a:t>
-            </a:r>
-            <a:r>
-              <a:rPr sz="1400">
-                <a:solidFill>
-                  <a:srgbClr val="E36009"/>
-                </a:solidFill>
-                <a:latin typeface="Menlo"/>
-              </a:rPr>
-              <a:t>0</a:t>
-            </a:r>
-            <a:r>
-              <a:rPr sz="1400">
-                <a:solidFill>
-                  <a:srgbClr val="4A4A4A"/>
-                </a:solidFill>
-                <a:latin typeface="Menlo"/>
-              </a:rPr>
-              <a:t>;</a:t>
-            </a:r>
-            <a:r>
-              <a:rPr sz="1400">
-                <a:solidFill>
-                  <a:srgbClr val="24292E"/>
-                </a:solidFill>
-                <a:latin typeface="Menlo"/>
-              </a:rPr>
-              <a:t> </a:t>
-            </a:r>
-            <a:r>
-              <a:rPr sz="1400">
-                <a:solidFill>
-                  <a:srgbClr val="24292E"/>
-                </a:solidFill>
-                <a:latin typeface="Menlo"/>
-              </a:rPr>
-              <a:t>i</a:t>
-            </a:r>
-            <a:r>
-              <a:rPr sz="1400">
-                <a:solidFill>
-                  <a:srgbClr val="24292E"/>
-                </a:solidFill>
-                <a:latin typeface="Menlo"/>
-              </a:rPr>
-              <a:t> </a:t>
-            </a:r>
-            <a:r>
-              <a:rPr sz="1400">
-                <a:solidFill>
-                  <a:srgbClr val="4A4A4A"/>
-                </a:solidFill>
-                <a:latin typeface="Menlo"/>
-              </a:rPr>
-              <a:t>&lt;</a:t>
-            </a:r>
-            <a:r>
-              <a:rPr sz="1400">
-                <a:solidFill>
-                  <a:srgbClr val="24292E"/>
-                </a:solidFill>
-                <a:latin typeface="Menlo"/>
-              </a:rPr>
-              <a:t> </a:t>
-            </a:r>
-            <a:r>
-              <a:rPr sz="1400">
-                <a:solidFill>
-                  <a:srgbClr val="24292E"/>
-                </a:solidFill>
-                <a:latin typeface="Menlo"/>
-              </a:rPr>
-              <a:t>n</a:t>
-            </a:r>
-            <a:r>
-              <a:rPr sz="1400">
-                <a:solidFill>
-                  <a:srgbClr val="4A4A4A"/>
-                </a:solidFill>
-                <a:latin typeface="Menlo"/>
-              </a:rPr>
-              <a:t>;</a:t>
-            </a:r>
-            <a:r>
-              <a:rPr sz="1400">
-                <a:solidFill>
-                  <a:srgbClr val="24292E"/>
-                </a:solidFill>
-                <a:latin typeface="Menlo"/>
-              </a:rPr>
-              <a:t> </a:t>
-            </a:r>
-            <a:r>
-              <a:rPr sz="1400">
-                <a:solidFill>
-                  <a:srgbClr val="24292E"/>
-                </a:solidFill>
-                <a:latin typeface="Menlo"/>
-              </a:rPr>
-              <a:t>i</a:t>
-            </a:r>
-            <a:r>
-              <a:rPr sz="1400">
-                <a:solidFill>
-                  <a:srgbClr val="4A4A4A"/>
-                </a:solidFill>
-                <a:latin typeface="Menlo"/>
-              </a:rPr>
-              <a:t>+</a:t>
-            </a:r>
-            <a:r>
-              <a:rPr sz="1400">
-                <a:solidFill>
-                  <a:srgbClr val="4A4A4A"/>
-                </a:solidFill>
-                <a:latin typeface="Menlo"/>
-              </a:rPr>
-              <a:t>+</a:t>
-            </a:r>
-            <a:r>
-              <a:rPr sz="1400">
-                <a:solidFill>
-                  <a:srgbClr val="4A4A4A"/>
-                </a:solidFill>
-                <a:latin typeface="Menlo"/>
-              </a:rPr>
-              <a:t>)</a:t>
-            </a:r>
-            <a:r>
-              <a:rPr sz="1400">
-                <a:solidFill>
-                  <a:srgbClr val="24292E"/>
-                </a:solidFill>
-                <a:latin typeface="Menlo"/>
-              </a:rPr>
-              <a:t> </a:t>
-            </a:r>
-            <a:r>
-              <a:rPr sz="1400">
-                <a:solidFill>
-                  <a:srgbClr val="4A4A4A"/>
-                </a:solidFill>
-                <a:latin typeface="Menlo"/>
-              </a:rPr>
-              <a:t>{</a:t>
-            </a:r>
-            <a:r>
-              <a:rPr sz="1400">
-                <a:solidFill>
-                  <a:srgbClr val="24292E"/>
-                </a:solidFill>
-                <a:latin typeface="Menlo"/>
-              </a:rPr>
-              <a:t> </a:t>
-            </a:r>
-            <a:r>
-              <a:rPr sz="1400">
-                <a:solidFill>
-                  <a:srgbClr val="0766C2"/>
-                </a:solidFill>
-                <a:latin typeface="Menlo"/>
-              </a:rPr>
-              <a:t>if</a:t>
-            </a:r>
-            <a:r>
-              <a:rPr sz="1400">
-                <a:solidFill>
-                  <a:srgbClr val="24292E"/>
-                </a:solidFill>
-                <a:latin typeface="Menlo"/>
-              </a:rPr>
-              <a:t> </a:t>
-            </a:r>
-            <a:r>
-              <a:rPr sz="1400">
-                <a:solidFill>
-                  <a:srgbClr val="4A4A4A"/>
-                </a:solidFill>
-                <a:latin typeface="Menlo"/>
-              </a:rPr>
-              <a:t>(</a:t>
-            </a:r>
-            <a:r>
-              <a:rPr sz="1400">
-                <a:solidFill>
-                  <a:srgbClr val="24292E"/>
-                </a:solidFill>
-                <a:latin typeface="Menlo"/>
-              </a:rPr>
-              <a:t>i</a:t>
-            </a:r>
-            <a:r>
-              <a:rPr sz="1400">
-                <a:solidFill>
-                  <a:srgbClr val="4A4A4A"/>
-                </a:solidFill>
-                <a:latin typeface="Menlo"/>
-              </a:rPr>
-              <a:t>.</a:t>
-            </a:r>
-            <a:r>
-              <a:rPr sz="1400">
-                <a:solidFill>
-                  <a:srgbClr val="24292E"/>
-                </a:solidFill>
-                <a:latin typeface="Menlo"/>
-              </a:rPr>
-              <a:t>isEven</a:t>
-            </a:r>
-            <a:r>
-              <a:rPr sz="1400">
-                <a:solidFill>
-                  <a:srgbClr val="4A4A4A"/>
-                </a:solidFill>
-                <a:latin typeface="Menlo"/>
-              </a:rPr>
-              <a:t>)</a:t>
-            </a:r>
-            <a:r>
-              <a:rPr sz="1400">
-                <a:solidFill>
-                  <a:srgbClr val="24292E"/>
-                </a:solidFill>
-                <a:latin typeface="Menlo"/>
-              </a:rPr>
-              <a:t> </a:t>
-            </a:r>
-            <a:r>
-              <a:rPr sz="1400">
-                <a:solidFill>
-                  <a:srgbClr val="0766C2"/>
-                </a:solidFill>
-                <a:latin typeface="Menlo"/>
-              </a:rPr>
-              <a:t>yield</a:t>
-            </a:r>
-            <a:r>
-              <a:rPr sz="1400">
-                <a:solidFill>
-                  <a:srgbClr val="24292E"/>
-                </a:solidFill>
-                <a:latin typeface="Menlo"/>
-              </a:rPr>
-              <a:t> </a:t>
-            </a:r>
-            <a:r>
-              <a:rPr sz="1400">
-                <a:solidFill>
-                  <a:srgbClr val="24292E"/>
-                </a:solidFill>
-                <a:latin typeface="Menlo"/>
-              </a:rPr>
-              <a:t>i</a:t>
+              <a:t> i</a:t>
             </a:r>
             <a:r>
               <a:rPr sz="1400">
@@ -14068,7 +13854,7 @@
 </file>
 
 <file path=ppt/slides/slide27.xml><?xml version="1.0" encoding="utf-8"?>
-<p:sld xmlns:a="http://schemas.openxmlformats.org/drawingml/2006/main" xmlns:p="http://schemas.openxmlformats.org/presentationml/2006/main" xmlns:r="http://schemas.openxmlformats.org/officeDocument/2006/relationships">
+<p:sld xmlns:a="http://schemas.openxmlformats.org/drawingml/2006/main" xmlns:r="http://schemas.openxmlformats.org/officeDocument/2006/relationships" xmlns:p="http://schemas.openxmlformats.org/presentationml/2006/main">
   <p:cSld>
     <p:spTree>
       <p:nvGrpSpPr>
@@ -14076,7 +13862,14 @@
         <p:cNvGrpSpPr/>
         <p:nvPr/>
       </p:nvGrpSpPr>
-      <p:grpSpPr/>
+      <p:grpSpPr>
+        <a:xfrm>
+          <a:off x="0" y="0"/>
+          <a:ext cx="0" cy="0"/>
+          <a:chOff x="0" y="0"/>
+          <a:chExt cx="0" cy="0"/>
+        </a:xfrm>
+      </p:grpSpPr>
       <p:sp>
         <p:nvSpPr>
           <p:cNvPr id="2" name="Rectangle 1"/>
@@ -14118,6 +13911,7 @@
           <a:lstStyle/>
           <a:p>
             <a:pPr algn="ctr"/>
+            <a:endParaRPr/>
           </a:p>
         </p:txBody>
       </p:sp>
@@ -14162,6 +13956,7 @@
           <a:lstStyle/>
           <a:p>
             <a:pPr algn="ctr"/>
+            <a:endParaRPr/>
           </a:p>
         </p:txBody>
       </p:sp>
@@ -14279,7 +14074,7 @@
 </file>
 
 <file path=ppt/slides/slide28.xml><?xml version="1.0" encoding="utf-8"?>
-<p:sld xmlns:a="http://schemas.openxmlformats.org/drawingml/2006/main" xmlns:p="http://schemas.openxmlformats.org/presentationml/2006/main" xmlns:r="http://schemas.openxmlformats.org/officeDocument/2006/relationships">
+<p:sld xmlns:a="http://schemas.openxmlformats.org/drawingml/2006/main" xmlns:r="http://schemas.openxmlformats.org/officeDocument/2006/relationships" xmlns:p="http://schemas.openxmlformats.org/presentationml/2006/main">
   <p:cSld>
     <p:spTree>
       <p:nvGrpSpPr>
@@ -14287,7 +14082,14 @@
         <p:cNvGrpSpPr/>
         <p:nvPr/>
       </p:nvGrpSpPr>
-      <p:grpSpPr/>
+      <p:grpSpPr>
+        <a:xfrm>
+          <a:off x="0" y="0"/>
+          <a:ext cx="0" cy="0"/>
+          <a:chOff x="0" y="0"/>
+          <a:chExt cx="0" cy="0"/>
+        </a:xfrm>
+      </p:grpSpPr>
       <p:sp>
         <p:nvSpPr>
           <p:cNvPr id="2" name="Rectangle 1"/>
@@ -14329,6 +14131,7 @@
           <a:lstStyle/>
           <a:p>
             <a:pPr algn="ctr"/>
+            <a:endParaRPr/>
           </a:p>
         </p:txBody>
       </p:sp>
@@ -14511,7 +14314,7 @@
           <p:nvPr/>
         </p:nvPicPr>
         <p:blipFill>
-          <a:blip r:embed="rId2"/>
+          <a:blip r:embed="rId3"/>
           <a:stretch>
             <a:fillRect/>
           </a:stretch>
@@ -14605,7 +14408,7 @@
 </file>
 
 <file path=ppt/slides/slide29.xml><?xml version="1.0" encoding="utf-8"?>
-<p:sld xmlns:a="http://schemas.openxmlformats.org/drawingml/2006/main" xmlns:p="http://schemas.openxmlformats.org/presentationml/2006/main" xmlns:r="http://schemas.openxmlformats.org/officeDocument/2006/relationships">
+<p:sld xmlns:a="http://schemas.openxmlformats.org/drawingml/2006/main" xmlns:r="http://schemas.openxmlformats.org/officeDocument/2006/relationships" xmlns:p="http://schemas.openxmlformats.org/presentationml/2006/main">
   <p:cSld>
     <p:spTree>
       <p:nvGrpSpPr>
@@ -14613,7 +14416,14 @@
         <p:cNvGrpSpPr/>
         <p:nvPr/>
       </p:nvGrpSpPr>
-      <p:grpSpPr/>
+      <p:grpSpPr>
+        <a:xfrm>
+          <a:off x="0" y="0"/>
+          <a:ext cx="0" cy="0"/>
+          <a:chOff x="0" y="0"/>
+          <a:chExt cx="0" cy="0"/>
+        </a:xfrm>
+      </p:grpSpPr>
       <p:sp>
         <p:nvSpPr>
           <p:cNvPr id="2" name="Rectangle 1"/>
@@ -14655,6 +14465,7 @@
           <a:lstStyle/>
           <a:p>
             <a:pPr algn="ctr"/>
+            <a:endParaRPr/>
           </a:p>
         </p:txBody>
       </p:sp>
@@ -14821,7 +14632,7 @@
           <p:nvPr/>
         </p:nvPicPr>
         <p:blipFill>
-          <a:blip r:embed="rId2"/>
+          <a:blip r:embed="rId3"/>
           <a:stretch>
             <a:fillRect/>
           </a:stretch>
@@ -14915,7 +14726,7 @@
 </file>
 
 <file path=ppt/slides/slide3.xml><?xml version="1.0" encoding="utf-8"?>
-<p:sld xmlns:a="http://schemas.openxmlformats.org/drawingml/2006/main" xmlns:p="http://schemas.openxmlformats.org/presentationml/2006/main" xmlns:r="http://schemas.openxmlformats.org/officeDocument/2006/relationships">
+<p:sld xmlns:a="http://schemas.openxmlformats.org/drawingml/2006/main" xmlns:r="http://schemas.openxmlformats.org/officeDocument/2006/relationships" xmlns:p="http://schemas.openxmlformats.org/presentationml/2006/main">
   <p:cSld>
     <p:spTree>
       <p:nvGrpSpPr>
@@ -14923,7 +14734,14 @@
         <p:cNvGrpSpPr/>
         <p:nvPr/>
       </p:nvGrpSpPr>
-      <p:grpSpPr/>
+      <p:grpSpPr>
+        <a:xfrm>
+          <a:off x="0" y="0"/>
+          <a:ext cx="0" cy="0"/>
+          <a:chOff x="0" y="0"/>
+          <a:chExt cx="0" cy="0"/>
+        </a:xfrm>
+      </p:grpSpPr>
       <p:sp>
         <p:nvSpPr>
           <p:cNvPr id="2" name="Rectangle 1"/>
@@ -14965,6 +14783,7 @@
           <a:lstStyle/>
           <a:p>
             <a:pPr algn="ctr"/>
+            <a:endParaRPr/>
           </a:p>
         </p:txBody>
       </p:sp>
@@ -15131,7 +14950,7 @@
           <p:nvPr/>
         </p:nvPicPr>
         <p:blipFill>
-          <a:blip r:embed="rId2"/>
+          <a:blip r:embed="rId3"/>
           <a:stretch>
             <a:fillRect/>
           </a:stretch>
@@ -15225,7 +15044,7 @@
 </file>
 
 <file path=ppt/slides/slide30.xml><?xml version="1.0" encoding="utf-8"?>
-<p:sld xmlns:a="http://schemas.openxmlformats.org/drawingml/2006/main" xmlns:p="http://schemas.openxmlformats.org/presentationml/2006/main" xmlns:r="http://schemas.openxmlformats.org/officeDocument/2006/relationships">
+<p:sld xmlns:a="http://schemas.openxmlformats.org/drawingml/2006/main" xmlns:r="http://schemas.openxmlformats.org/officeDocument/2006/relationships" xmlns:p="http://schemas.openxmlformats.org/presentationml/2006/main">
   <p:cSld>
     <p:spTree>
       <p:nvGrpSpPr>
@@ -15233,7 +15052,14 @@
         <p:cNvGrpSpPr/>
         <p:nvPr/>
       </p:nvGrpSpPr>
-      <p:grpSpPr/>
+      <p:grpSpPr>
+        <a:xfrm>
+          <a:off x="0" y="0"/>
+          <a:ext cx="0" cy="0"/>
+          <a:chOff x="0" y="0"/>
+          <a:chExt cx="0" cy="0"/>
+        </a:xfrm>
+      </p:grpSpPr>
       <p:sp>
         <p:nvSpPr>
           <p:cNvPr id="2" name="Rectangle 1"/>
@@ -15275,6 +15101,7 @@
           <a:lstStyle/>
           <a:p>
             <a:pPr algn="ctr"/>
+            <a:endParaRPr/>
           </a:p>
         </p:txBody>
       </p:sp>
@@ -15425,7 +15252,7 @@
           <p:nvPr/>
         </p:nvPicPr>
         <p:blipFill>
-          <a:blip r:embed="rId2"/>
+          <a:blip r:embed="rId3"/>
           <a:stretch>
             <a:fillRect/>
           </a:stretch>
@@ -15519,7 +15346,7 @@
 </file>
 
 <file path=ppt/slides/slide31.xml><?xml version="1.0" encoding="utf-8"?>
-<p:sld xmlns:a="http://schemas.openxmlformats.org/drawingml/2006/main" xmlns:p="http://schemas.openxmlformats.org/presentationml/2006/main" xmlns:r="http://schemas.openxmlformats.org/officeDocument/2006/relationships">
+<p:sld xmlns:a="http://schemas.openxmlformats.org/drawingml/2006/main" xmlns:r="http://schemas.openxmlformats.org/officeDocument/2006/relationships" xmlns:p="http://schemas.openxmlformats.org/presentationml/2006/main">
   <p:cSld>
     <p:spTree>
       <p:nvGrpSpPr>
@@ -15527,7 +15354,14 @@
         <p:cNvGrpSpPr/>
         <p:nvPr/>
       </p:nvGrpSpPr>
-      <p:grpSpPr/>
+      <p:grpSpPr>
+        <a:xfrm>
+          <a:off x="0" y="0"/>
+          <a:ext cx="0" cy="0"/>
+          <a:chOff x="0" y="0"/>
+          <a:chExt cx="0" cy="0"/>
+        </a:xfrm>
+      </p:grpSpPr>
       <p:sp>
         <p:nvSpPr>
           <p:cNvPr id="2" name="Rectangle 1"/>
@@ -15569,6 +15403,7 @@
           <a:lstStyle/>
           <a:p>
             <a:pPr algn="ctr"/>
+            <a:endParaRPr/>
           </a:p>
         </p:txBody>
       </p:sp>
@@ -15719,7 +15554,7 @@
           <p:nvPr/>
         </p:nvPicPr>
         <p:blipFill>
-          <a:blip r:embed="rId2"/>
+          <a:blip r:embed="rId3"/>
           <a:stretch>
             <a:fillRect/>
           </a:stretch>
@@ -15813,7 +15648,7 @@
 </file>
 
 <file path=ppt/slides/slide32.xml><?xml version="1.0" encoding="utf-8"?>
-<p:sld xmlns:a="http://schemas.openxmlformats.org/drawingml/2006/main" xmlns:p="http://schemas.openxmlformats.org/presentationml/2006/main" xmlns:r="http://schemas.openxmlformats.org/officeDocument/2006/relationships">
+<p:sld xmlns:a="http://schemas.openxmlformats.org/drawingml/2006/main" xmlns:r="http://schemas.openxmlformats.org/officeDocument/2006/relationships" xmlns:p="http://schemas.openxmlformats.org/presentationml/2006/main">
   <p:cSld>
     <p:spTree>
       <p:nvGrpSpPr>
@@ -15821,7 +15656,14 @@
         <p:cNvGrpSpPr/>
         <p:nvPr/>
       </p:nvGrpSpPr>
-      <p:grpSpPr/>
+      <p:grpSpPr>
+        <a:xfrm>
+          <a:off x="0" y="0"/>
+          <a:ext cx="0" cy="0"/>
+          <a:chOff x="0" y="0"/>
+          <a:chExt cx="0" cy="0"/>
+        </a:xfrm>
+      </p:grpSpPr>
       <p:sp>
         <p:nvSpPr>
           <p:cNvPr id="2" name="Rectangle 1"/>
@@ -15863,6 +15705,7 @@
           <a:lstStyle/>
           <a:p>
             <a:pPr algn="ctr"/>
+            <a:endParaRPr/>
           </a:p>
         </p:txBody>
       </p:sp>
@@ -16047,6 +15890,7 @@
           <a:lstStyle/>
           <a:p>
             <a:pPr algn="ctr"/>
+            <a:endParaRPr/>
           </a:p>
         </p:txBody>
       </p:sp>
@@ -16190,142 +16034,79 @@
                 </a:solidFill>
                 <a:latin typeface="Menlo"/>
               </a:rPr>
+              <a:t> shout</a:t>
+            </a:r>
+            <a:r>
+              <a:rPr sz="1400">
+                <a:solidFill>
+                  <a:srgbClr val="4A4A4A"/>
+                </a:solidFill>
+                <a:latin typeface="Menlo"/>
+              </a:rPr>
+              <a:t>()</a:t>
+            </a:r>
+            <a:r>
+              <a:rPr sz="1400">
+                <a:solidFill>
+                  <a:srgbClr val="24292E"/>
+                </a:solidFill>
+                <a:latin typeface="Menlo"/>
+              </a:rPr>
               <a:t> </a:t>
             </a:r>
             <a:r>
               <a:rPr sz="1400">
                 <a:solidFill>
+                  <a:srgbClr val="4A4A4A"/>
+                </a:solidFill>
+                <a:latin typeface="Menlo"/>
+              </a:rPr>
+              <a:t>=&gt;</a:t>
+            </a:r>
+            <a:r>
+              <a:rPr sz="1400">
+                <a:solidFill>
                   <a:srgbClr val="24292E"/>
                 </a:solidFill>
                 <a:latin typeface="Menlo"/>
               </a:rPr>
-              <a:t>shout</a:t>
+              <a:t> </a:t>
             </a:r>
             <a:r>
               <a:rPr sz="1400">
                 <a:solidFill>
+                  <a:srgbClr val="038837"/>
+                </a:solidFill>
+                <a:latin typeface="Menlo"/>
+              </a:rPr>
+              <a:t>'${</a:t>
+            </a:r>
+            <a:r>
+              <a:rPr sz="1400">
+                <a:solidFill>
+                  <a:srgbClr val="24292E"/>
+                </a:solidFill>
+                <a:latin typeface="Menlo"/>
+              </a:rPr>
+              <a:t>toUpperCase</a:t>
+            </a:r>
+            <a:r>
+              <a:rPr sz="1400">
+                <a:solidFill>
                   <a:srgbClr val="4A4A4A"/>
                 </a:solidFill>
                 <a:latin typeface="Menlo"/>
               </a:rPr>
-              <a:t>(</a:t>
+              <a:t>()</a:t>
             </a:r>
             <a:r>
               <a:rPr sz="1400">
                 <a:solidFill>
-                  <a:srgbClr val="4A4A4A"/>
+                  <a:srgbClr val="038837"/>
                 </a:solidFill>
                 <a:latin typeface="Menlo"/>
               </a:rPr>
-              <a:t>)</a:t>
-            </a:r>
-            <a:r>
-              <a:rPr sz="1400">
-                <a:solidFill>
-                  <a:srgbClr val="24292E"/>
-                </a:solidFill>
-                <a:latin typeface="Menlo"/>
-              </a:rPr>
-              <a:t> </a:t>
-            </a:r>
-            <a:r>
-              <a:rPr sz="1400">
-                <a:solidFill>
-                  <a:srgbClr val="4A4A4A"/>
-                </a:solidFill>
-                <a:latin typeface="Menlo"/>
-              </a:rPr>
-              <a:t>=</a:t>
-            </a:r>
-            <a:r>
-              <a:rPr sz="1400">
-                <a:solidFill>
-                  <a:srgbClr val="4A4A4A"/>
-                </a:solidFill>
-                <a:latin typeface="Menlo"/>
-              </a:rPr>
-              <a:t>&gt;</a:t>
-            </a:r>
-            <a:r>
-              <a:rPr sz="1400">
-                <a:solidFill>
-                  <a:srgbClr val="24292E"/>
-                </a:solidFill>
-                <a:latin typeface="Menlo"/>
-              </a:rPr>
-              <a:t> </a:t>
-            </a:r>
-            <a:r>
-              <a:rPr sz="1400">
-                <a:solidFill>
-                  <a:srgbClr val="038837"/>
-                </a:solidFill>
-                <a:latin typeface="Menlo"/>
-              </a:rPr>
-              <a:t>'</a:t>
-            </a:r>
-            <a:r>
-              <a:rPr sz="1400">
-                <a:solidFill>
-                  <a:srgbClr val="038837"/>
-                </a:solidFill>
-                <a:latin typeface="Menlo"/>
-              </a:rPr>
-              <a:t>${</a:t>
-            </a:r>
-            <a:r>
-              <a:rPr sz="1400">
-                <a:solidFill>
-                  <a:srgbClr val="24292E"/>
-                </a:solidFill>
-                <a:latin typeface="Menlo"/>
-              </a:rPr>
-              <a:t>toUpperCase</a:t>
-            </a:r>
-            <a:r>
-              <a:rPr sz="1400">
-                <a:solidFill>
-                  <a:srgbClr val="4A4A4A"/>
-                </a:solidFill>
-                <a:latin typeface="Menlo"/>
-              </a:rPr>
-              <a:t>(</a:t>
-            </a:r>
-            <a:r>
-              <a:rPr sz="1400">
-                <a:solidFill>
-                  <a:srgbClr val="4A4A4A"/>
-                </a:solidFill>
-                <a:latin typeface="Menlo"/>
-              </a:rPr>
-              <a:t>)</a:t>
-            </a:r>
-            <a:r>
-              <a:rPr sz="1400">
-                <a:solidFill>
-                  <a:srgbClr val="038837"/>
-                </a:solidFill>
-                <a:latin typeface="Menlo"/>
-              </a:rPr>
-              <a:t>}</a:t>
-            </a:r>
-            <a:r>
-              <a:rPr sz="1400">
-                <a:solidFill>
-                  <a:srgbClr val="038837"/>
-                </a:solidFill>
-                <a:latin typeface="Menlo"/>
-              </a:rPr>
-              <a:t>!</a:t>
-            </a:r>
-            <a:r>
-              <a:rPr sz="1400">
-                <a:solidFill>
-                  <a:srgbClr val="038837"/>
-                </a:solidFill>
-                <a:latin typeface="Menlo"/>
-              </a:rPr>
-              <a:t>'</a:t>
+              <a:t>}!'</a:t>
             </a:r>
             <a:r>
               <a:rPr sz="1400">
@@ -16366,25 +16147,25 @@
                 </a:solidFill>
                 <a:latin typeface="Menlo"/>
               </a:rPr>
-              <a:t>'</a:t>
+              <a:t>'hello'</a:t>
             </a:r>
             <a:r>
               <a:rPr sz="1400">
                 <a:solidFill>
-                  <a:srgbClr val="038837"/>
+                  <a:srgbClr val="4A4A4A"/>
                 </a:solidFill>
                 <a:latin typeface="Menlo"/>
               </a:rPr>
-              <a:t>hello</a:t>
+              <a:t>.</a:t>
             </a:r>
             <a:r>
               <a:rPr sz="1400">
                 <a:solidFill>
-                  <a:srgbClr val="038837"/>
+                  <a:srgbClr val="24292E"/>
                 </a:solidFill>
                 <a:latin typeface="Menlo"/>
               </a:rPr>
-              <a:t>'</a:t>
+              <a:t>shout</a:t>
             </a:r>
             <a:r>
               <a:rPr sz="1400">
@@ -16393,43 +16174,7 @@
                 </a:solidFill>
                 <a:latin typeface="Menlo"/>
               </a:rPr>
-              <a:t>.</a:t>
-            </a:r>
-            <a:r>
-              <a:rPr sz="1400">
-                <a:solidFill>
-                  <a:srgbClr val="24292E"/>
-                </a:solidFill>
-                <a:latin typeface="Menlo"/>
-              </a:rPr>
-              <a:t>shout</a:t>
-            </a:r>
-            <a:r>
-              <a:rPr sz="1400">
-                <a:solidFill>
-                  <a:srgbClr val="4A4A4A"/>
-                </a:solidFill>
-                <a:latin typeface="Menlo"/>
-              </a:rPr>
-              <a:t>(</a:t>
-            </a:r>
-            <a:r>
-              <a:rPr sz="1400">
-                <a:solidFill>
-                  <a:srgbClr val="4A4A4A"/>
-                </a:solidFill>
-                <a:latin typeface="Menlo"/>
-              </a:rPr>
-              <a:t>)</a:t>
-            </a:r>
-            <a:r>
-              <a:rPr sz="1400">
-                <a:solidFill>
-                  <a:srgbClr val="4A4A4A"/>
-                </a:solidFill>
-                <a:latin typeface="Menlo"/>
-              </a:rPr>
-              <a:t>;</a:t>
+              <a:t>();</a:t>
             </a:r>
             <a:r>
               <a:rPr sz="1400">
@@ -16531,7 +16276,7 @@
 </file>
 
 <file path=ppt/slides/slide33.xml><?xml version="1.0" encoding="utf-8"?>
-<p:sld xmlns:a="http://schemas.openxmlformats.org/drawingml/2006/main" xmlns:p="http://schemas.openxmlformats.org/presentationml/2006/main" xmlns:r="http://schemas.openxmlformats.org/officeDocument/2006/relationships">
+<p:sld xmlns:a="http://schemas.openxmlformats.org/drawingml/2006/main" xmlns:r="http://schemas.openxmlformats.org/officeDocument/2006/relationships" xmlns:p="http://schemas.openxmlformats.org/presentationml/2006/main">
   <p:cSld>
     <p:spTree>
       <p:nvGrpSpPr>
@@ -16539,7 +16284,14 @@
         <p:cNvGrpSpPr/>
         <p:nvPr/>
       </p:nvGrpSpPr>
-      <p:grpSpPr/>
+      <p:grpSpPr>
+        <a:xfrm>
+          <a:off x="0" y="0"/>
+          <a:ext cx="0" cy="0"/>
+          <a:chOff x="0" y="0"/>
+          <a:chExt cx="0" cy="0"/>
+        </a:xfrm>
+      </p:grpSpPr>
       <p:sp>
         <p:nvSpPr>
           <p:cNvPr id="2" name="Rectangle 1"/>
@@ -16581,6 +16333,7 @@
           <a:lstStyle/>
           <a:p>
             <a:pPr algn="ctr"/>
+            <a:endParaRPr/>
           </a:p>
         </p:txBody>
       </p:sp>
@@ -16625,6 +16378,7 @@
           <a:lstStyle/>
           <a:p>
             <a:pPr algn="ctr"/>
+            <a:endParaRPr/>
           </a:p>
         </p:txBody>
       </p:sp>
@@ -16742,7 +16496,7 @@
 </file>
 
 <file path=ppt/slides/slide34.xml><?xml version="1.0" encoding="utf-8"?>
-<p:sld xmlns:a="http://schemas.openxmlformats.org/drawingml/2006/main" xmlns:p="http://schemas.openxmlformats.org/presentationml/2006/main" xmlns:r="http://schemas.openxmlformats.org/officeDocument/2006/relationships">
+<p:sld xmlns:a="http://schemas.openxmlformats.org/drawingml/2006/main" xmlns:r="http://schemas.openxmlformats.org/officeDocument/2006/relationships" xmlns:p="http://schemas.openxmlformats.org/presentationml/2006/main">
   <p:cSld>
     <p:spTree>
       <p:nvGrpSpPr>
@@ -16750,7 +16504,14 @@
         <p:cNvGrpSpPr/>
         <p:nvPr/>
       </p:nvGrpSpPr>
-      <p:grpSpPr/>
+      <p:grpSpPr>
+        <a:xfrm>
+          <a:off x="0" y="0"/>
+          <a:ext cx="0" cy="0"/>
+          <a:chOff x="0" y="0"/>
+          <a:chExt cx="0" cy="0"/>
+        </a:xfrm>
+      </p:grpSpPr>
       <p:sp>
         <p:nvSpPr>
           <p:cNvPr id="2" name="Rectangle 1"/>
@@ -16792,6 +16553,7 @@
           <a:lstStyle/>
           <a:p>
             <a:pPr algn="ctr"/>
+            <a:endParaRPr/>
           </a:p>
         </p:txBody>
       </p:sp>
@@ -17028,7 +16790,7 @@
 </file>
 
 <file path=ppt/slides/slide35.xml><?xml version="1.0" encoding="utf-8"?>
-<p:sld xmlns:a="http://schemas.openxmlformats.org/drawingml/2006/main" xmlns:p="http://schemas.openxmlformats.org/presentationml/2006/main" xmlns:r="http://schemas.openxmlformats.org/officeDocument/2006/relationships">
+<p:sld xmlns:a="http://schemas.openxmlformats.org/drawingml/2006/main" xmlns:r="http://schemas.openxmlformats.org/officeDocument/2006/relationships" xmlns:p="http://schemas.openxmlformats.org/presentationml/2006/main">
   <p:cSld>
     <p:spTree>
       <p:nvGrpSpPr>
@@ -17036,7 +16798,14 @@
         <p:cNvGrpSpPr/>
         <p:nvPr/>
       </p:nvGrpSpPr>
-      <p:grpSpPr/>
+      <p:grpSpPr>
+        <a:xfrm>
+          <a:off x="0" y="0"/>
+          <a:ext cx="0" cy="0"/>
+          <a:chOff x="0" y="0"/>
+          <a:chExt cx="0" cy="0"/>
+        </a:xfrm>
+      </p:grpSpPr>
       <p:sp>
         <p:nvSpPr>
           <p:cNvPr id="2" name="Rectangle 1"/>
@@ -17078,6 +16847,7 @@
           <a:lstStyle/>
           <a:p>
             <a:pPr algn="ctr"/>
+            <a:endParaRPr/>
           </a:p>
         </p:txBody>
       </p:sp>
@@ -17314,7 +17084,7 @@
 </file>
 
 <file path=ppt/slides/slide36.xml><?xml version="1.0" encoding="utf-8"?>
-<p:sld xmlns:a="http://schemas.openxmlformats.org/drawingml/2006/main" xmlns:p="http://schemas.openxmlformats.org/presentationml/2006/main" xmlns:r="http://schemas.openxmlformats.org/officeDocument/2006/relationships">
+<p:sld xmlns:a="http://schemas.openxmlformats.org/drawingml/2006/main" xmlns:r="http://schemas.openxmlformats.org/officeDocument/2006/relationships" xmlns:p="http://schemas.openxmlformats.org/presentationml/2006/main">
   <p:cSld>
     <p:spTree>
       <p:nvGrpSpPr>
@@ -17322,7 +17092,14 @@
         <p:cNvGrpSpPr/>
         <p:nvPr/>
       </p:nvGrpSpPr>
-      <p:grpSpPr/>
+      <p:grpSpPr>
+        <a:xfrm>
+          <a:off x="0" y="0"/>
+          <a:ext cx="0" cy="0"/>
+          <a:chOff x="0" y="0"/>
+          <a:chExt cx="0" cy="0"/>
+        </a:xfrm>
+      </p:grpSpPr>
       <p:sp>
         <p:nvSpPr>
           <p:cNvPr id="2" name="Rectangle 1"/>
@@ -17364,6 +17141,7 @@
           <a:lstStyle/>
           <a:p>
             <a:pPr algn="ctr"/>
+            <a:endParaRPr/>
           </a:p>
         </p:txBody>
       </p:sp>
@@ -17600,7 +17378,7 @@
 </file>
 
 <file path=ppt/slides/slide37.xml><?xml version="1.0" encoding="utf-8"?>
-<p:sld xmlns:a="http://schemas.openxmlformats.org/drawingml/2006/main" xmlns:p="http://schemas.openxmlformats.org/presentationml/2006/main" xmlns:r="http://schemas.openxmlformats.org/officeDocument/2006/relationships">
+<p:sld xmlns:a="http://schemas.openxmlformats.org/drawingml/2006/main" xmlns:r="http://schemas.openxmlformats.org/officeDocument/2006/relationships" xmlns:p="http://schemas.openxmlformats.org/presentationml/2006/main">
   <p:cSld>
     <p:spTree>
       <p:nvGrpSpPr>
@@ -17608,7 +17386,14 @@
         <p:cNvGrpSpPr/>
         <p:nvPr/>
       </p:nvGrpSpPr>
-      <p:grpSpPr/>
+      <p:grpSpPr>
+        <a:xfrm>
+          <a:off x="0" y="0"/>
+          <a:ext cx="0" cy="0"/>
+          <a:chOff x="0" y="0"/>
+          <a:chExt cx="0" cy="0"/>
+        </a:xfrm>
+      </p:grpSpPr>
       <p:sp>
         <p:nvSpPr>
           <p:cNvPr id="2" name="Rectangle 1"/>
@@ -17650,6 +17435,7 @@
           <a:lstStyle/>
           <a:p>
             <a:pPr algn="ctr"/>
+            <a:endParaRPr/>
           </a:p>
         </p:txBody>
       </p:sp>
@@ -17886,7 +17672,7 @@
 </file>
 
 <file path=ppt/slides/slide38.xml><?xml version="1.0" encoding="utf-8"?>
-<p:sld xmlns:a="http://schemas.openxmlformats.org/drawingml/2006/main" xmlns:p="http://schemas.openxmlformats.org/presentationml/2006/main" xmlns:r="http://schemas.openxmlformats.org/officeDocument/2006/relationships">
+<p:sld xmlns:a="http://schemas.openxmlformats.org/drawingml/2006/main" xmlns:r="http://schemas.openxmlformats.org/officeDocument/2006/relationships" xmlns:p="http://schemas.openxmlformats.org/presentationml/2006/main">
   <p:cSld>
     <p:spTree>
       <p:nvGrpSpPr>
@@ -17894,7 +17680,14 @@
         <p:cNvGrpSpPr/>
         <p:nvPr/>
       </p:nvGrpSpPr>
-      <p:grpSpPr/>
+      <p:grpSpPr>
+        <a:xfrm>
+          <a:off x="0" y="0"/>
+          <a:ext cx="0" cy="0"/>
+          <a:chOff x="0" y="0"/>
+          <a:chExt cx="0" cy="0"/>
+        </a:xfrm>
+      </p:grpSpPr>
       <p:sp>
         <p:nvSpPr>
           <p:cNvPr id="2" name="Rectangle 1"/>
@@ -17936,6 +17729,7 @@
           <a:lstStyle/>
           <a:p>
             <a:pPr algn="ctr"/>
+            <a:endParaRPr/>
           </a:p>
         </p:txBody>
       </p:sp>
@@ -18172,7 +17966,7 @@
 </file>
 
 <file path=ppt/slides/slide39.xml><?xml version="1.0" encoding="utf-8"?>
-<p:sld xmlns:a="http://schemas.openxmlformats.org/drawingml/2006/main" xmlns:p="http://schemas.openxmlformats.org/presentationml/2006/main" xmlns:r="http://schemas.openxmlformats.org/officeDocument/2006/relationships">
+<p:sld xmlns:a="http://schemas.openxmlformats.org/drawingml/2006/main" xmlns:r="http://schemas.openxmlformats.org/officeDocument/2006/relationships" xmlns:p="http://schemas.openxmlformats.org/presentationml/2006/main">
   <p:cSld>
     <p:spTree>
       <p:nvGrpSpPr>
@@ -18180,7 +17974,14 @@
         <p:cNvGrpSpPr/>
         <p:nvPr/>
       </p:nvGrpSpPr>
-      <p:grpSpPr/>
+      <p:grpSpPr>
+        <a:xfrm>
+          <a:off x="0" y="0"/>
+          <a:ext cx="0" cy="0"/>
+          <a:chOff x="0" y="0"/>
+          <a:chExt cx="0" cy="0"/>
+        </a:xfrm>
+      </p:grpSpPr>
       <p:sp>
         <p:nvSpPr>
           <p:cNvPr id="2" name="Rectangle 1"/>
@@ -18222,6 +18023,7 @@
           <a:lstStyle/>
           <a:p>
             <a:pPr algn="ctr"/>
+            <a:endParaRPr/>
           </a:p>
         </p:txBody>
       </p:sp>
@@ -18458,7 +18260,7 @@
 </file>
 
 <file path=ppt/slides/slide4.xml><?xml version="1.0" encoding="utf-8"?>
-<p:sld xmlns:a="http://schemas.openxmlformats.org/drawingml/2006/main" xmlns:p="http://schemas.openxmlformats.org/presentationml/2006/main" xmlns:r="http://schemas.openxmlformats.org/officeDocument/2006/relationships">
+<p:sld xmlns:a="http://schemas.openxmlformats.org/drawingml/2006/main" xmlns:r="http://schemas.openxmlformats.org/officeDocument/2006/relationships" xmlns:p="http://schemas.openxmlformats.org/presentationml/2006/main">
   <p:cSld>
     <p:spTree>
       <p:nvGrpSpPr>
@@ -18466,7 +18268,14 @@
         <p:cNvGrpSpPr/>
         <p:nvPr/>
       </p:nvGrpSpPr>
-      <p:grpSpPr/>
+      <p:grpSpPr>
+        <a:xfrm>
+          <a:off x="0" y="0"/>
+          <a:ext cx="0" cy="0"/>
+          <a:chOff x="0" y="0"/>
+          <a:chExt cx="0" cy="0"/>
+        </a:xfrm>
+      </p:grpSpPr>
       <p:sp>
         <p:nvSpPr>
           <p:cNvPr id="2" name="Rectangle 1"/>
@@ -18508,6 +18317,7 @@
           <a:lstStyle/>
           <a:p>
             <a:pPr algn="ctr"/>
+            <a:endParaRPr/>
           </a:p>
         </p:txBody>
       </p:sp>
@@ -18744,7 +18554,7 @@
 </file>
 
 <file path=ppt/slides/slide40.xml><?xml version="1.0" encoding="utf-8"?>
-<p:sld xmlns:a="http://schemas.openxmlformats.org/drawingml/2006/main" xmlns:p="http://schemas.openxmlformats.org/presentationml/2006/main" xmlns:r="http://schemas.openxmlformats.org/officeDocument/2006/relationships">
+<p:sld xmlns:a="http://schemas.openxmlformats.org/drawingml/2006/main" xmlns:r="http://schemas.openxmlformats.org/officeDocument/2006/relationships" xmlns:p="http://schemas.openxmlformats.org/presentationml/2006/main">
   <p:cSld>
     <p:spTree>
       <p:nvGrpSpPr>
@@ -18752,7 +18562,14 @@
         <p:cNvGrpSpPr/>
         <p:nvPr/>
       </p:nvGrpSpPr>
-      <p:grpSpPr/>
+      <p:grpSpPr>
+        <a:xfrm>
+          <a:off x="0" y="0"/>
+          <a:ext cx="0" cy="0"/>
+          <a:chOff x="0" y="0"/>
+          <a:chExt cx="0" cy="0"/>
+        </a:xfrm>
+      </p:grpSpPr>
       <p:sp>
         <p:nvSpPr>
           <p:cNvPr id="2" name="Rectangle 1"/>
@@ -18794,6 +18611,7 @@
           <a:lstStyle/>
           <a:p>
             <a:pPr algn="ctr"/>
+            <a:endParaRPr/>
           </a:p>
         </p:txBody>
       </p:sp>
@@ -19030,7 +18848,7 @@
 </file>
 
 <file path=ppt/slides/slide41.xml><?xml version="1.0" encoding="utf-8"?>
-<p:sld xmlns:a="http://schemas.openxmlformats.org/drawingml/2006/main" xmlns:p="http://schemas.openxmlformats.org/presentationml/2006/main" xmlns:r="http://schemas.openxmlformats.org/officeDocument/2006/relationships">
+<p:sld xmlns:a="http://schemas.openxmlformats.org/drawingml/2006/main" xmlns:r="http://schemas.openxmlformats.org/officeDocument/2006/relationships" xmlns:p="http://schemas.openxmlformats.org/presentationml/2006/main">
   <p:cSld>
     <p:spTree>
       <p:nvGrpSpPr>
@@ -19038,7 +18856,14 @@
         <p:cNvGrpSpPr/>
         <p:nvPr/>
       </p:nvGrpSpPr>
-      <p:grpSpPr/>
+      <p:grpSpPr>
+        <a:xfrm>
+          <a:off x="0" y="0"/>
+          <a:ext cx="0" cy="0"/>
+          <a:chOff x="0" y="0"/>
+          <a:chExt cx="0" cy="0"/>
+        </a:xfrm>
+      </p:grpSpPr>
       <p:sp>
         <p:nvSpPr>
           <p:cNvPr id="2" name="Rectangle 1"/>
@@ -19080,6 +18905,7 @@
           <a:lstStyle/>
           <a:p>
             <a:pPr algn="ctr"/>
+            <a:endParaRPr/>
           </a:p>
         </p:txBody>
       </p:sp>
@@ -19092,7 +18918,7 @@
           <p:nvPr/>
         </p:nvPicPr>
         <p:blipFill>
-          <a:blip r:embed="rId2"/>
+          <a:blip r:embed="rId3"/>
           <a:stretch>
             <a:fillRect/>
           </a:stretch>
@@ -19340,7 +19166,7 @@
 </file>
 
 <file path=ppt/slides/slide5.xml><?xml version="1.0" encoding="utf-8"?>
-<p:sld xmlns:a="http://schemas.openxmlformats.org/drawingml/2006/main" xmlns:p="http://schemas.openxmlformats.org/presentationml/2006/main" xmlns:r="http://schemas.openxmlformats.org/officeDocument/2006/relationships">
+<p:sld xmlns:a="http://schemas.openxmlformats.org/drawingml/2006/main" xmlns:r="http://schemas.openxmlformats.org/officeDocument/2006/relationships" xmlns:p="http://schemas.openxmlformats.org/presentationml/2006/main">
   <p:cSld>
     <p:spTree>
       <p:nvGrpSpPr>
@@ -19348,7 +19174,14 @@
         <p:cNvGrpSpPr/>
         <p:nvPr/>
       </p:nvGrpSpPr>
-      <p:grpSpPr/>
+      <p:grpSpPr>
+        <a:xfrm>
+          <a:off x="0" y="0"/>
+          <a:ext cx="0" cy="0"/>
+          <a:chOff x="0" y="0"/>
+          <a:chExt cx="0" cy="0"/>
+        </a:xfrm>
+      </p:grpSpPr>
       <p:sp>
         <p:nvSpPr>
           <p:cNvPr id="2" name="Rectangle 1"/>
@@ -19390,6 +19223,7 @@
           <a:lstStyle/>
           <a:p>
             <a:pPr algn="ctr"/>
+            <a:endParaRPr/>
           </a:p>
         </p:txBody>
       </p:sp>
@@ -19626,7 +19460,7 @@
 </file>
 
 <file path=ppt/slides/slide6.xml><?xml version="1.0" encoding="utf-8"?>
-<p:sld xmlns:a="http://schemas.openxmlformats.org/drawingml/2006/main" xmlns:p="http://schemas.openxmlformats.org/presentationml/2006/main" xmlns:r="http://schemas.openxmlformats.org/officeDocument/2006/relationships">
+<p:sld xmlns:a="http://schemas.openxmlformats.org/drawingml/2006/main" xmlns:r="http://schemas.openxmlformats.org/officeDocument/2006/relationships" xmlns:p="http://schemas.openxmlformats.org/presentationml/2006/main">
   <p:cSld>
     <p:spTree>
       <p:nvGrpSpPr>
@@ -19634,7 +19468,14 @@
         <p:cNvGrpSpPr/>
         <p:nvPr/>
       </p:nvGrpSpPr>
-      <p:grpSpPr/>
+      <p:grpSpPr>
+        <a:xfrm>
+          <a:off x="0" y="0"/>
+          <a:ext cx="0" cy="0"/>
+          <a:chOff x="0" y="0"/>
+          <a:chExt cx="0" cy="0"/>
+        </a:xfrm>
+      </p:grpSpPr>
       <p:sp>
         <p:nvSpPr>
           <p:cNvPr id="2" name="Rectangle 1"/>
@@ -19676,6 +19517,7 @@
           <a:lstStyle/>
           <a:p>
             <a:pPr algn="ctr"/>
+            <a:endParaRPr/>
           </a:p>
         </p:txBody>
       </p:sp>
@@ -19896,7 +19738,7 @@
 </file>
 
 <file path=ppt/slides/slide7.xml><?xml version="1.0" encoding="utf-8"?>
-<p:sld xmlns:a="http://schemas.openxmlformats.org/drawingml/2006/main" xmlns:p="http://schemas.openxmlformats.org/presentationml/2006/main" xmlns:r="http://schemas.openxmlformats.org/officeDocument/2006/relationships">
+<p:sld xmlns:a="http://schemas.openxmlformats.org/drawingml/2006/main" xmlns:r="http://schemas.openxmlformats.org/officeDocument/2006/relationships" xmlns:p="http://schemas.openxmlformats.org/presentationml/2006/main">
   <p:cSld>
     <p:spTree>
       <p:nvGrpSpPr>
@@ -19904,7 +19746,14 @@
         <p:cNvGrpSpPr/>
         <p:nvPr/>
       </p:nvGrpSpPr>
-      <p:grpSpPr/>
+      <p:grpSpPr>
+        <a:xfrm>
+          <a:off x="0" y="0"/>
+          <a:ext cx="0" cy="0"/>
+          <a:chOff x="0" y="0"/>
+          <a:chExt cx="0" cy="0"/>
+        </a:xfrm>
+      </p:grpSpPr>
       <p:sp>
         <p:nvSpPr>
           <p:cNvPr id="2" name="Rectangle 1"/>
@@ -19946,6 +19795,7 @@
           <a:lstStyle/>
           <a:p>
             <a:pPr algn="ctr"/>
+            <a:endParaRPr/>
           </a:p>
         </p:txBody>
       </p:sp>
@@ -19990,6 +19840,7 @@
           <a:lstStyle/>
           <a:p>
             <a:pPr algn="ctr"/>
+            <a:endParaRPr/>
           </a:p>
         </p:txBody>
       </p:sp>
@@ -20107,7 +19958,7 @@
 </file>
 
 <file path=ppt/slides/slide8.xml><?xml version="1.0" encoding="utf-8"?>
-<p:sld xmlns:a="http://schemas.openxmlformats.org/drawingml/2006/main" xmlns:p="http://schemas.openxmlformats.org/presentationml/2006/main" xmlns:r="http://schemas.openxmlformats.org/officeDocument/2006/relationships">
+<p:sld xmlns:a="http://schemas.openxmlformats.org/drawingml/2006/main" xmlns:r="http://schemas.openxmlformats.org/officeDocument/2006/relationships" xmlns:p="http://schemas.openxmlformats.org/presentationml/2006/main">
   <p:cSld>
     <p:spTree>
       <p:nvGrpSpPr>
@@ -20115,7 +19966,14 @@
         <p:cNvGrpSpPr/>
         <p:nvPr/>
       </p:nvGrpSpPr>
-      <p:grpSpPr/>
+      <p:grpSpPr>
+        <a:xfrm>
+          <a:off x="0" y="0"/>
+          <a:ext cx="0" cy="0"/>
+          <a:chOff x="0" y="0"/>
+          <a:chExt cx="0" cy="0"/>
+        </a:xfrm>
+      </p:grpSpPr>
       <p:sp>
         <p:nvSpPr>
           <p:cNvPr id="2" name="Rectangle 1"/>
@@ -20157,6 +20015,7 @@
           <a:lstStyle/>
           <a:p>
             <a:pPr algn="ctr"/>
+            <a:endParaRPr/>
           </a:p>
         </p:txBody>
       </p:sp>
@@ -20409,7 +20268,7 @@
 </file>
 
 <file path=ppt/slides/slide9.xml><?xml version="1.0" encoding="utf-8"?>
-<p:sld xmlns:a="http://schemas.openxmlformats.org/drawingml/2006/main" xmlns:p="http://schemas.openxmlformats.org/presentationml/2006/main" xmlns:r="http://schemas.openxmlformats.org/officeDocument/2006/relationships">
+<p:sld xmlns:a="http://schemas.openxmlformats.org/drawingml/2006/main" xmlns:r="http://schemas.openxmlformats.org/officeDocument/2006/relationships" xmlns:p="http://schemas.openxmlformats.org/presentationml/2006/main">
   <p:cSld>
     <p:spTree>
       <p:nvGrpSpPr>
@@ -20417,7 +20276,14 @@
         <p:cNvGrpSpPr/>
         <p:nvPr/>
       </p:nvGrpSpPr>
-      <p:grpSpPr/>
+      <p:grpSpPr>
+        <a:xfrm>
+          <a:off x="0" y="0"/>
+          <a:ext cx="0" cy="0"/>
+          <a:chOff x="0" y="0"/>
+          <a:chExt cx="0" cy="0"/>
+        </a:xfrm>
+      </p:grpSpPr>
       <p:sp>
         <p:nvSpPr>
           <p:cNvPr id="2" name="Rectangle 1"/>
@@ -20459,6 +20325,7 @@
           <a:lstStyle/>
           <a:p>
             <a:pPr algn="ctr"/>
+            <a:endParaRPr/>
           </a:p>
         </p:txBody>
       </p:sp>
@@ -20625,7 +20492,7 @@
           <p:nvPr/>
         </p:nvPicPr>
         <p:blipFill>
-          <a:blip r:embed="rId2"/>
+          <a:blip r:embed="rId3"/>
           <a:stretch>
             <a:fillRect/>
           </a:stretch>
@@ -21049,44 +20916,44 @@
         <a:sysClr val="window" lastClr="FFFFFF"/>
       </a:lt1>
       <a:dk2>
-        <a:srgbClr val="1F497D"/>
+        <a:srgbClr val="0E2841"/>
       </a:dk2>
       <a:lt2>
-        <a:srgbClr val="EEECE1"/>
+        <a:srgbClr val="E8E8E8"/>
       </a:lt2>
       <a:accent1>
-        <a:srgbClr val="4F81BD"/>
+        <a:srgbClr val="156082"/>
       </a:accent1>
       <a:accent2>
-        <a:srgbClr val="C0504D"/>
+        <a:srgbClr val="E97132"/>
       </a:accent2>
       <a:accent3>
-        <a:srgbClr val="9BBB59"/>
+        <a:srgbClr val="196B24"/>
       </a:accent3>
       <a:accent4>
-        <a:srgbClr val="8064A2"/>
+        <a:srgbClr val="0F9ED5"/>
       </a:accent4>
       <a:accent5>
-        <a:srgbClr val="4BACC6"/>
+        <a:srgbClr val="A02B93"/>
       </a:accent5>
       <a:accent6>
-        <a:srgbClr val="F79646"/>
+        <a:srgbClr val="4EA72E"/>
       </a:accent6>
       <a:hlink>
-        <a:srgbClr val="0000FF"/>
+        <a:srgbClr val="467886"/>
       </a:hlink>
       <a:folHlink>
-        <a:srgbClr val="800080"/>
+        <a:srgbClr val="96607D"/>
       </a:folHlink>
     </a:clrScheme>
     <a:fontScheme name="Office">
       <a:majorFont>
-        <a:latin typeface="Calibri"/>
+        <a:latin typeface="Aptos Display" panose="02110004020202020204"/>
         <a:ea typeface=""/>
         <a:cs typeface=""/>
-        <a:font script="Jpan" typeface="ＭＳ Ｐゴシック"/>
+        <a:font script="Jpan" typeface="游ゴシック Light"/>
         <a:font script="Hang" typeface="맑은 고딕"/>
-        <a:font script="Hans" typeface="宋体"/>
+        <a:font script="Hans" typeface="等线 Light"/>
         <a:font script="Hant" typeface="新細明體"/>
         <a:font script="Arab" typeface="Times New Roman"/>
         <a:font script="Hebr" typeface="Times New Roman"/>
@@ -21114,14 +20981,31 @@
         <a:font script="Viet" typeface="Times New Roman"/>
         <a:font script="Uigh" typeface="Microsoft Uighur"/>
         <a:font script="Geor" typeface="Sylfaen"/>
+        <a:font script="Armn" typeface="Arial"/>
+        <a:font script="Bugi" typeface="Leelawadee UI"/>
+        <a:font script="Bopo" typeface="Microsoft JhengHei"/>
+        <a:font script="Java" typeface="Javanese Text"/>
+        <a:font script="Lisu" typeface="Segoe UI"/>
+        <a:font script="Mymr" typeface="Myanmar Text"/>
+        <a:font script="Nkoo" typeface="Ebrima"/>
+        <a:font script="Olck" typeface="Nirmala UI"/>
+        <a:font script="Osma" typeface="Ebrima"/>
+        <a:font script="Phag" typeface="Phagspa"/>
+        <a:font script="Syrn" typeface="Estrangelo Edessa"/>
+        <a:font script="Syrj" typeface="Estrangelo Edessa"/>
+        <a:font script="Syre" typeface="Estrangelo Edessa"/>
+        <a:font script="Sora" typeface="Nirmala UI"/>
+        <a:font script="Tale" typeface="Microsoft Tai Le"/>
+        <a:font script="Talu" typeface="Microsoft New Tai Lue"/>
+        <a:font script="Tfng" typeface="Ebrima"/>
       </a:majorFont>
       <a:minorFont>
-        <a:latin typeface="Calibri"/>
+        <a:latin typeface="Aptos" panose="02110004020202020204"/>
         <a:ea typeface=""/>
         <a:cs typeface=""/>
-        <a:font script="Jpan" typeface="ＭＳ Ｐゴシック"/>
+        <a:font script="Jpan" typeface="游ゴシック"/>
         <a:font script="Hang" typeface="맑은 고딕"/>
-        <a:font script="Hans" typeface="宋体"/>
+        <a:font script="Hans" typeface="等线"/>
         <a:font script="Hant" typeface="新細明體"/>
         <a:font script="Arab" typeface="Arial"/>
         <a:font script="Hebr" typeface="Arial"/>
@@ -21149,6 +21033,23 @@
         <a:font script="Viet" typeface="Arial"/>
         <a:font script="Uigh" typeface="Microsoft Uighur"/>
         <a:font script="Geor" typeface="Sylfaen"/>
+        <a:font script="Armn" typeface="Arial"/>
+        <a:font script="Bugi" typeface="Leelawadee UI"/>
+        <a:font script="Bopo" typeface="Microsoft JhengHei"/>
+        <a:font script="Java" typeface="Javanese Text"/>
+        <a:font script="Lisu" typeface="Segoe UI"/>
+        <a:font script="Mymr" typeface="Myanmar Text"/>
+        <a:font script="Nkoo" typeface="Ebrima"/>
+        <a:font script="Olck" typeface="Nirmala UI"/>
+        <a:font script="Osma" typeface="Ebrima"/>
+        <a:font script="Phag" typeface="Phagspa"/>
+        <a:font script="Syrn" typeface="Estrangelo Edessa"/>
+        <a:font script="Syrj" typeface="Estrangelo Edessa"/>
+        <a:font script="Syre" typeface="Estrangelo Edessa"/>
+        <a:font script="Sora" typeface="Nirmala UI"/>
+        <a:font script="Tale" typeface="Microsoft Tai Le"/>
+        <a:font script="Talu" typeface="Microsoft New Tai Lue"/>
+        <a:font script="Tfng" typeface="Ebrima"/>
       </a:minorFont>
     </a:fontScheme>
     <a:fmtScheme name="Office">
@@ -21160,180 +21061,136 @@
           <a:gsLst>
             <a:gs pos="0">
               <a:schemeClr val="phClr">
-                <a:tint val="50000"/>
-                <a:satMod val="300000"/>
+                <a:lumMod val="110000"/>
+                <a:satMod val="105000"/>
+                <a:tint val="67000"/>
               </a:schemeClr>
             </a:gs>
-            <a:gs pos="35000">
+            <a:gs pos="50000">
               <a:schemeClr val="phClr">
-                <a:tint val="37000"/>
-                <a:satMod val="300000"/>
+                <a:lumMod val="105000"/>
+                <a:satMod val="103000"/>
+                <a:tint val="73000"/>
               </a:schemeClr>
             </a:gs>
             <a:gs pos="100000">
               <a:schemeClr val="phClr">
-                <a:tint val="15000"/>
-                <a:satMod val="350000"/>
+                <a:lumMod val="105000"/>
+                <a:satMod val="109000"/>
+                <a:tint val="81000"/>
               </a:schemeClr>
             </a:gs>
           </a:gsLst>
-          <a:lin ang="16200000" scaled="1"/>
+          <a:lin ang="5400000" scaled="0"/>
         </a:gradFill>
         <a:gradFill rotWithShape="1">
           <a:gsLst>
             <a:gs pos="0">
               <a:schemeClr val="phClr">
-                <a:tint val="100000"/>
+                <a:satMod val="103000"/>
+                <a:lumMod val="102000"/>
+                <a:tint val="94000"/>
+              </a:schemeClr>
+            </a:gs>
+            <a:gs pos="50000">
+              <a:schemeClr val="phClr">
+                <a:satMod val="110000"/>
+                <a:lumMod val="100000"/>
                 <a:shade val="100000"/>
-                <a:satMod val="130000"/>
               </a:schemeClr>
             </a:gs>
             <a:gs pos="100000">
               <a:schemeClr val="phClr">
-                <a:tint val="50000"/>
-                <a:shade val="100000"/>
-                <a:satMod val="350000"/>
+                <a:lumMod val="99000"/>
+                <a:satMod val="120000"/>
+                <a:shade val="78000"/>
               </a:schemeClr>
             </a:gs>
           </a:gsLst>
-          <a:lin ang="16200000" scaled="0"/>
+          <a:lin ang="5400000" scaled="0"/>
         </a:gradFill>
       </a:fillStyleLst>
       <a:lnStyleLst>
-        <a:ln w="9525" cap="flat" cmpd="sng" algn="ctr">
+        <a:ln w="12700" cap="flat" cmpd="sng" algn="ctr">
           <a:solidFill>
-            <a:schemeClr val="phClr">
-              <a:shade val="95000"/>
-              <a:satMod val="105000"/>
-            </a:schemeClr>
+            <a:schemeClr val="phClr"/>
           </a:solidFill>
           <a:prstDash val="solid"/>
+          <a:miter lim="800000"/>
+        </a:ln>
+        <a:ln w="19050" cap="flat" cmpd="sng" algn="ctr">
+          <a:solidFill>
+            <a:schemeClr val="phClr"/>
+          </a:solidFill>
+          <a:prstDash val="solid"/>
+          <a:miter lim="800000"/>
         </a:ln>
         <a:ln w="25400" cap="flat" cmpd="sng" algn="ctr">
           <a:solidFill>
             <a:schemeClr val="phClr"/>
           </a:solidFill>
           <a:prstDash val="solid"/>
-        </a:ln>
-        <a:ln w="38100" cap="flat" cmpd="sng" algn="ctr">
-          <a:solidFill>
-            <a:schemeClr val="phClr"/>
-          </a:solidFill>
-          <a:prstDash val="solid"/>
+          <a:miter lim="800000"/>
         </a:ln>
       </a:lnStyleLst>
       <a:effectStyleLst>
         <a:effectStyle>
+          <a:effectLst/>
+        </a:effectStyle>
+        <a:effectStyle>
+          <a:effectLst/>
+        </a:effectStyle>
+        <a:effectStyle>
           <a:effectLst>
-            <a:outerShdw blurRad="40000" dist="20000" dir="5400000" rotWithShape="0">
+            <a:outerShdw blurRad="57150" dist="19050" dir="5400000" algn="ctr" rotWithShape="0">
               <a:srgbClr val="000000">
-                <a:alpha val="38000"/>
+                <a:alpha val="63000"/>
               </a:srgbClr>
             </a:outerShdw>
           </a:effectLst>
-        </a:effectStyle>
-        <a:effectStyle>
-          <a:effectLst>
-            <a:outerShdw blurRad="40000" dist="23000" dir="5400000" rotWithShape="0">
-              <a:srgbClr val="000000">
-                <a:alpha val="35000"/>
-              </a:srgbClr>
-            </a:outerShdw>
-          </a:effectLst>
-        </a:effectStyle>
-        <a:effectStyle>
-          <a:effectLst>
-            <a:outerShdw blurRad="40000" dist="23000" dir="5400000" rotWithShape="0">
-              <a:srgbClr val="000000">
-                <a:alpha val="35000"/>
-              </a:srgbClr>
-            </a:outerShdw>
-          </a:effectLst>
-          <a:scene3d>
-            <a:camera prst="orthographicFront">
-              <a:rot lat="0" lon="0" rev="0"/>
-            </a:camera>
-            <a:lightRig rig="threePt" dir="t">
-              <a:rot lat="0" lon="0" rev="1200000"/>
-            </a:lightRig>
-          </a:scene3d>
-          <a:sp3d>
-            <a:bevelT w="63500" h="25400"/>
-          </a:sp3d>
         </a:effectStyle>
       </a:effectStyleLst>
       <a:bgFillStyleLst>
         <a:solidFill>
           <a:schemeClr val="phClr"/>
         </a:solidFill>
+        <a:solidFill>
+          <a:schemeClr val="phClr">
+            <a:tint val="95000"/>
+            <a:satMod val="170000"/>
+          </a:schemeClr>
+        </a:solidFill>
         <a:gradFill rotWithShape="1">
           <a:gsLst>
             <a:gs pos="0">
               <a:schemeClr val="phClr">
-                <a:tint val="40000"/>
-                <a:satMod val="350000"/>
+                <a:tint val="93000"/>
+                <a:satMod val="150000"/>
+                <a:shade val="98000"/>
+                <a:lumMod val="102000"/>
               </a:schemeClr>
             </a:gs>
-            <a:gs pos="40000">
+            <a:gs pos="50000">
               <a:schemeClr val="phClr">
-                <a:tint val="45000"/>
-                <a:shade val="99000"/>
-                <a:satMod val="350000"/>
+                <a:tint val="98000"/>
+                <a:satMod val="130000"/>
+                <a:shade val="90000"/>
+                <a:lumMod val="103000"/>
               </a:schemeClr>
             </a:gs>
             <a:gs pos="100000">
               <a:schemeClr val="phClr">
-                <a:shade val="20000"/>
-                <a:satMod val="255000"/>
+                <a:shade val="63000"/>
+                <a:satMod val="120000"/>
               </a:schemeClr>
             </a:gs>
           </a:gsLst>
-          <a:path path="circle">
-            <a:fillToRect l="50000" t="-80000" r="50000" b="180000"/>
-          </a:path>
-        </a:gradFill>
-        <a:gradFill rotWithShape="1">
-          <a:gsLst>
-            <a:gs pos="0">
-              <a:schemeClr val="phClr">
-                <a:tint val="80000"/>
-                <a:satMod val="300000"/>
-              </a:schemeClr>
-            </a:gs>
-            <a:gs pos="100000">
-              <a:schemeClr val="phClr">
-                <a:shade val="30000"/>
-                <a:satMod val="200000"/>
-              </a:schemeClr>
-            </a:gs>
-          </a:gsLst>
-          <a:path path="circle">
-            <a:fillToRect l="50000" t="50000" r="50000" b="50000"/>
-          </a:path>
+          <a:lin ang="5400000" scaled="0"/>
         </a:gradFill>
       </a:bgFillStyleLst>
     </a:fmtScheme>
   </a:themeElements>
   <a:objectDefaults>
-    <a:spDef>
-      <a:spPr/>
-      <a:bodyPr/>
-      <a:lstStyle/>
-      <a:style>
-        <a:lnRef idx="1">
-          <a:schemeClr val="accent1"/>
-        </a:lnRef>
-        <a:fillRef idx="3">
-          <a:schemeClr val="accent1"/>
-        </a:fillRef>
-        <a:effectRef idx="2">
-          <a:schemeClr val="accent1"/>
-        </a:effectRef>
-        <a:fontRef idx="minor">
-          <a:schemeClr val="lt1"/>
-        </a:fontRef>
-      </a:style>
-    </a:spDef>
     <a:lnDef>
       <a:spPr/>
       <a:bodyPr/>
@@ -21355,5 +21212,10 @@
     </a:lnDef>
   </a:objectDefaults>
   <a:extraClrSchemeLst/>
+  <a:extLst>
+    <a:ext uri="{05A4C25C-085E-4340-85A3-A5531E510DB2}">
+      <thm15:themeFamily xmlns:thm15="http://schemas.microsoft.com/office/thememl/2012/main" name="Office Theme" id="{2E142A2C-CD16-42D6-873A-C26D2A0506FA}" vid="{1BDDFF52-6CD6-40A5-AB3C-68EB2F1E4D0A}"/>
+    </a:ext>
+  </a:extLst>
 </a:theme>
 </file>